--- a/概要/【就職作品展_振り返りシート】_名前.pptx
+++ b/概要/【就職作品展_振り返りシート】_名前.pptx
@@ -5,19 +5,12 @@
     <p:sldMasterId id="2147483660" r:id="rId4"/>
   </p:sldMasterIdLst>
   <p:notesMasterIdLst>
-    <p:notesMasterId r:id="rId15"/>
+    <p:notesMasterId r:id="rId8"/>
   </p:notesMasterIdLst>
   <p:sldIdLst>
     <p:sldId id="256" r:id="rId5"/>
-    <p:sldId id="264" r:id="rId6"/>
-    <p:sldId id="266" r:id="rId7"/>
-    <p:sldId id="267" r:id="rId8"/>
-    <p:sldId id="258" r:id="rId9"/>
-    <p:sldId id="257" r:id="rId10"/>
-    <p:sldId id="262" r:id="rId11"/>
-    <p:sldId id="263" r:id="rId12"/>
-    <p:sldId id="259" r:id="rId13"/>
-    <p:sldId id="265" r:id="rId14"/>
+    <p:sldId id="266" r:id="rId6"/>
+    <p:sldId id="267" r:id="rId7"/>
   </p:sldIdLst>
   <p:sldSz cx="9144000" cy="5143500" type="screen16x9"/>
   <p:notesSz cx="6858000" cy="9144000"/>
@@ -132,7 +125,7 @@
       </p15:sldGuideLst>
     </p:ext>
     <p:ext uri="http://customooxmlschemas.google.com/">
-      <go:slidesCustomData xmlns:go="http://customooxmlschemas.google.com/" xmlns:ahyp="http://schemas.microsoft.com/office/drawing/2018/hyperlinkcolor" xmlns:p15="http://schemas.microsoft.com/office/powerpoint/2012/main" xmlns:p14="http://schemas.microsoft.com/office/powerpoint/2010/main" xmlns:com="http://schemas.openxmlformats.org/drawingml/2006/compatibility" xmlns:pvml="urn:schemas-microsoft-com:office:powerpoint" xmlns:v="urn:schemas-microsoft-com:vml" xmlns:o="urn:schemas-microsoft-com:office:office" xmlns:dgm="http://schemas.openxmlformats.org/drawingml/2006/diagram" xmlns:c="http://schemas.openxmlformats.org/drawingml/2006/chart" xmlns:mv="urn:schemas-microsoft-com:mac:vml" xmlns:mc="http://schemas.openxmlformats.org/markup-compatibility/2006" xmlns="" r:id="rId16" roundtripDataSignature="AMtx7mgyd33SDkWUcqlXidO/PpLYvlpvsQ=="/>
+      <go:slidesCustomData xmlns="" xmlns:mc="http://schemas.openxmlformats.org/markup-compatibility/2006" xmlns:mv="urn:schemas-microsoft-com:mac:vml" xmlns:c="http://schemas.openxmlformats.org/drawingml/2006/chart" xmlns:dgm="http://schemas.openxmlformats.org/drawingml/2006/diagram" xmlns:o="urn:schemas-microsoft-com:office:office" xmlns:v="urn:schemas-microsoft-com:vml" xmlns:pvml="urn:schemas-microsoft-com:office:powerpoint" xmlns:com="http://schemas.openxmlformats.org/drawingml/2006/compatibility" xmlns:p14="http://schemas.microsoft.com/office/powerpoint/2010/main" xmlns:p15="http://schemas.microsoft.com/office/powerpoint/2012/main" xmlns:ahyp="http://schemas.microsoft.com/office/drawing/2018/hyperlinkcolor" xmlns:go="http://customooxmlschemas.google.com/" r:id="rId16" roundtripDataSignature="AMtx7mgyd33SDkWUcqlXidO/PpLYvlpvsQ=="/>
     </p:ext>
   </p:extLst>
 </p:presentation>
@@ -886,12 +879,12 @@
 </p:notes>
 </file>
 
-<file path=ppt/notesSlides/notesSlide10.xml><?xml version="1.0" encoding="utf-8"?>
+<file path=ppt/notesSlides/notesSlide2.xml><?xml version="1.0" encoding="utf-8"?>
 <p:notes xmlns:a="http://schemas.openxmlformats.org/drawingml/2006/main" xmlns:r="http://schemas.openxmlformats.org/officeDocument/2006/relationships" xmlns:p="http://schemas.openxmlformats.org/presentationml/2006/main" showMasterSp="0" showMasterPhAnim="0">
   <p:cSld>
     <p:spTree>
       <p:nvGrpSpPr>
-        <p:cNvPr id="1" name="Shape 93"/>
+        <p:cNvPr id="1" name="Shape 62"/>
         <p:cNvGrpSpPr/>
         <p:nvPr/>
       </p:nvGrpSpPr>
@@ -905,7 +898,7 @@
       </p:grpSpPr>
       <p:sp>
         <p:nvSpPr>
-          <p:cNvPr id="94" name="Google Shape;94;p8:notes"/>
+          <p:cNvPr id="63" name="Google Shape;63;p3:notes"/>
           <p:cNvSpPr>
             <a:spLocks noGrp="1" noRot="1" noChangeAspect="1"/>
           </p:cNvSpPr>
@@ -956,7 +949,7 @@
       </p:sp>
       <p:sp>
         <p:nvSpPr>
-          <p:cNvPr id="95" name="Google Shape;95;p8:notes"/>
+          <p:cNvPr id="64" name="Google Shape;64;p3:notes"/>
           <p:cNvSpPr txBox="1">
             <a:spLocks noGrp="1"/>
           </p:cNvSpPr>
@@ -1003,7 +996,7 @@
     </p:spTree>
     <p:extLst>
       <p:ext uri="{BB962C8B-B14F-4D97-AF65-F5344CB8AC3E}">
-        <p14:creationId xmlns:p14="http://schemas.microsoft.com/office/powerpoint/2010/main" val="3648279289"/>
+        <p14:creationId xmlns:p14="http://schemas.microsoft.com/office/powerpoint/2010/main" val="4094127961"/>
       </p:ext>
     </p:extLst>
   </p:cSld>
@@ -1013,7 +1006,7 @@
 </p:notes>
 </file>
 
-<file path=ppt/notesSlides/notesSlide2.xml><?xml version="1.0" encoding="utf-8"?>
+<file path=ppt/notesSlides/notesSlide3.xml><?xml version="1.0" encoding="utf-8"?>
 <p:notes xmlns:a="http://schemas.openxmlformats.org/drawingml/2006/main" xmlns:r="http://schemas.openxmlformats.org/officeDocument/2006/relationships" xmlns:p="http://schemas.openxmlformats.org/presentationml/2006/main" showMasterSp="0" showMasterPhAnim="0">
   <p:cSld>
     <p:spTree>
@@ -1130,896 +1123,7 @@
     </p:spTree>
     <p:extLst>
       <p:ext uri="{BB962C8B-B14F-4D97-AF65-F5344CB8AC3E}">
-        <p14:creationId xmlns:p14="http://schemas.microsoft.com/office/powerpoint/2010/main" val="1974879357"/>
-      </p:ext>
-    </p:extLst>
-  </p:cSld>
-  <p:clrMapOvr>
-    <a:masterClrMapping/>
-  </p:clrMapOvr>
-</p:notes>
-</file>
-
-<file path=ppt/notesSlides/notesSlide3.xml><?xml version="1.0" encoding="utf-8"?>
-<p:notes xmlns:a="http://schemas.openxmlformats.org/drawingml/2006/main" xmlns:r="http://schemas.openxmlformats.org/officeDocument/2006/relationships" xmlns:p="http://schemas.openxmlformats.org/presentationml/2006/main" showMasterSp="0" showMasterPhAnim="0">
-  <p:cSld>
-    <p:spTree>
-      <p:nvGrpSpPr>
-        <p:cNvPr id="1" name="Shape 62"/>
-        <p:cNvGrpSpPr/>
-        <p:nvPr/>
-      </p:nvGrpSpPr>
-      <p:grpSpPr>
-        <a:xfrm>
-          <a:off x="0" y="0"/>
-          <a:ext cx="0" cy="0"/>
-          <a:chOff x="0" y="0"/>
-          <a:chExt cx="0" cy="0"/>
-        </a:xfrm>
-      </p:grpSpPr>
-      <p:sp>
-        <p:nvSpPr>
-          <p:cNvPr id="63" name="Google Shape;63;p3:notes"/>
-          <p:cNvSpPr>
-            <a:spLocks noGrp="1" noRot="1" noChangeAspect="1"/>
-          </p:cNvSpPr>
-          <p:nvPr>
-            <p:ph type="sldImg" idx="2"/>
-          </p:nvPr>
-        </p:nvSpPr>
-        <p:spPr>
-          <a:xfrm>
-            <a:off x="381000" y="685800"/>
-            <a:ext cx="6096000" cy="3429000"/>
-          </a:xfrm>
-          <a:custGeom>
-            <a:avLst/>
-            <a:gdLst/>
-            <a:ahLst/>
-            <a:cxnLst/>
-            <a:rect l="l" t="t" r="r" b="b"/>
-            <a:pathLst>
-              <a:path w="120000" h="120000" extrusionOk="0">
-                <a:moveTo>
-                  <a:pt x="0" y="0"/>
-                </a:moveTo>
-                <a:lnTo>
-                  <a:pt x="120000" y="0"/>
-                </a:lnTo>
-                <a:lnTo>
-                  <a:pt x="120000" y="120000"/>
-                </a:lnTo>
-                <a:lnTo>
-                  <a:pt x="0" y="120000"/>
-                </a:lnTo>
-                <a:close/>
-              </a:path>
-            </a:pathLst>
-          </a:custGeom>
-          <a:noFill/>
-          <a:ln w="9525" cap="flat" cmpd="sng">
-            <a:solidFill>
-              <a:srgbClr val="000000"/>
-            </a:solidFill>
-            <a:prstDash val="solid"/>
-            <a:round/>
-            <a:headEnd type="none" w="sm" len="sm"/>
-            <a:tailEnd type="none" w="sm" len="sm"/>
-          </a:ln>
-        </p:spPr>
-      </p:sp>
-      <p:sp>
-        <p:nvSpPr>
-          <p:cNvPr id="64" name="Google Shape;64;p3:notes"/>
-          <p:cNvSpPr txBox="1">
-            <a:spLocks noGrp="1"/>
-          </p:cNvSpPr>
-          <p:nvPr>
-            <p:ph type="body" idx="1"/>
-          </p:nvPr>
-        </p:nvSpPr>
-        <p:spPr>
-          <a:xfrm>
-            <a:off x="685800" y="4343400"/>
-            <a:ext cx="5486400" cy="4114800"/>
-          </a:xfrm>
-          <a:prstGeom prst="rect">
-            <a:avLst/>
-          </a:prstGeom>
-          <a:noFill/>
-          <a:ln>
-            <a:noFill/>
-          </a:ln>
-        </p:spPr>
-        <p:txBody>
-          <a:bodyPr spcFirstLastPara="1" wrap="square" lIns="91425" tIns="91425" rIns="91425" bIns="91425" anchor="t" anchorCtr="0">
-            <a:noAutofit/>
-          </a:bodyPr>
-          <a:lstStyle/>
-          <a:p>
-            <a:pPr marL="0" lvl="0" indent="0" algn="l" rtl="0">
-              <a:lnSpc>
-                <a:spcPct val="100000"/>
-              </a:lnSpc>
-              <a:spcBef>
-                <a:spcPts val="0"/>
-              </a:spcBef>
-              <a:spcAft>
-                <a:spcPts val="0"/>
-              </a:spcAft>
-              <a:buSzPts val="1100"/>
-              <a:buNone/>
-            </a:pPr>
-            <a:endParaRPr/>
-          </a:p>
-        </p:txBody>
-      </p:sp>
-    </p:spTree>
-    <p:extLst>
-      <p:ext uri="{BB962C8B-B14F-4D97-AF65-F5344CB8AC3E}">
-        <p14:creationId xmlns:p14="http://schemas.microsoft.com/office/powerpoint/2010/main" val="4094127961"/>
-      </p:ext>
-    </p:extLst>
-  </p:cSld>
-  <p:clrMapOvr>
-    <a:masterClrMapping/>
-  </p:clrMapOvr>
-</p:notes>
-</file>
-
-<file path=ppt/notesSlides/notesSlide4.xml><?xml version="1.0" encoding="utf-8"?>
-<p:notes xmlns:a="http://schemas.openxmlformats.org/drawingml/2006/main" xmlns:r="http://schemas.openxmlformats.org/officeDocument/2006/relationships" xmlns:p="http://schemas.openxmlformats.org/presentationml/2006/main" showMasterSp="0" showMasterPhAnim="0">
-  <p:cSld>
-    <p:spTree>
-      <p:nvGrpSpPr>
-        <p:cNvPr id="1" name="Shape 62"/>
-        <p:cNvGrpSpPr/>
-        <p:nvPr/>
-      </p:nvGrpSpPr>
-      <p:grpSpPr>
-        <a:xfrm>
-          <a:off x="0" y="0"/>
-          <a:ext cx="0" cy="0"/>
-          <a:chOff x="0" y="0"/>
-          <a:chExt cx="0" cy="0"/>
-        </a:xfrm>
-      </p:grpSpPr>
-      <p:sp>
-        <p:nvSpPr>
-          <p:cNvPr id="63" name="Google Shape;63;p3:notes"/>
-          <p:cNvSpPr>
-            <a:spLocks noGrp="1" noRot="1" noChangeAspect="1"/>
-          </p:cNvSpPr>
-          <p:nvPr>
-            <p:ph type="sldImg" idx="2"/>
-          </p:nvPr>
-        </p:nvSpPr>
-        <p:spPr>
-          <a:xfrm>
-            <a:off x="381000" y="685800"/>
-            <a:ext cx="6096000" cy="3429000"/>
-          </a:xfrm>
-          <a:custGeom>
-            <a:avLst/>
-            <a:gdLst/>
-            <a:ahLst/>
-            <a:cxnLst/>
-            <a:rect l="l" t="t" r="r" b="b"/>
-            <a:pathLst>
-              <a:path w="120000" h="120000" extrusionOk="0">
-                <a:moveTo>
-                  <a:pt x="0" y="0"/>
-                </a:moveTo>
-                <a:lnTo>
-                  <a:pt x="120000" y="0"/>
-                </a:lnTo>
-                <a:lnTo>
-                  <a:pt x="120000" y="120000"/>
-                </a:lnTo>
-                <a:lnTo>
-                  <a:pt x="0" y="120000"/>
-                </a:lnTo>
-                <a:close/>
-              </a:path>
-            </a:pathLst>
-          </a:custGeom>
-          <a:noFill/>
-          <a:ln w="9525" cap="flat" cmpd="sng">
-            <a:solidFill>
-              <a:srgbClr val="000000"/>
-            </a:solidFill>
-            <a:prstDash val="solid"/>
-            <a:round/>
-            <a:headEnd type="none" w="sm" len="sm"/>
-            <a:tailEnd type="none" w="sm" len="sm"/>
-          </a:ln>
-        </p:spPr>
-      </p:sp>
-      <p:sp>
-        <p:nvSpPr>
-          <p:cNvPr id="64" name="Google Shape;64;p3:notes"/>
-          <p:cNvSpPr txBox="1">
-            <a:spLocks noGrp="1"/>
-          </p:cNvSpPr>
-          <p:nvPr>
-            <p:ph type="body" idx="1"/>
-          </p:nvPr>
-        </p:nvSpPr>
-        <p:spPr>
-          <a:xfrm>
-            <a:off x="685800" y="4343400"/>
-            <a:ext cx="5486400" cy="4114800"/>
-          </a:xfrm>
-          <a:prstGeom prst="rect">
-            <a:avLst/>
-          </a:prstGeom>
-          <a:noFill/>
-          <a:ln>
-            <a:noFill/>
-          </a:ln>
-        </p:spPr>
-        <p:txBody>
-          <a:bodyPr spcFirstLastPara="1" wrap="square" lIns="91425" tIns="91425" rIns="91425" bIns="91425" anchor="t" anchorCtr="0">
-            <a:noAutofit/>
-          </a:bodyPr>
-          <a:lstStyle/>
-          <a:p>
-            <a:pPr marL="0" lvl="0" indent="0" algn="l" rtl="0">
-              <a:lnSpc>
-                <a:spcPct val="100000"/>
-              </a:lnSpc>
-              <a:spcBef>
-                <a:spcPts val="0"/>
-              </a:spcBef>
-              <a:spcAft>
-                <a:spcPts val="0"/>
-              </a:spcAft>
-              <a:buSzPts val="1100"/>
-              <a:buNone/>
-            </a:pPr>
-            <a:endParaRPr/>
-          </a:p>
-        </p:txBody>
-      </p:sp>
-    </p:spTree>
-    <p:extLst>
-      <p:ext uri="{BB962C8B-B14F-4D97-AF65-F5344CB8AC3E}">
         <p14:creationId xmlns:p14="http://schemas.microsoft.com/office/powerpoint/2010/main" val="4018054392"/>
-      </p:ext>
-    </p:extLst>
-  </p:cSld>
-  <p:clrMapOvr>
-    <a:masterClrMapping/>
-  </p:clrMapOvr>
-</p:notes>
-</file>
-
-<file path=ppt/notesSlides/notesSlide5.xml><?xml version="1.0" encoding="utf-8"?>
-<p:notes xmlns:a="http://schemas.openxmlformats.org/drawingml/2006/main" xmlns:r="http://schemas.openxmlformats.org/officeDocument/2006/relationships" xmlns:p="http://schemas.openxmlformats.org/presentationml/2006/main" showMasterSp="0" showMasterPhAnim="0">
-  <p:cSld>
-    <p:spTree>
-      <p:nvGrpSpPr>
-        <p:cNvPr id="1" name="Shape 62"/>
-        <p:cNvGrpSpPr/>
-        <p:nvPr/>
-      </p:nvGrpSpPr>
-      <p:grpSpPr>
-        <a:xfrm>
-          <a:off x="0" y="0"/>
-          <a:ext cx="0" cy="0"/>
-          <a:chOff x="0" y="0"/>
-          <a:chExt cx="0" cy="0"/>
-        </a:xfrm>
-      </p:grpSpPr>
-      <p:sp>
-        <p:nvSpPr>
-          <p:cNvPr id="63" name="Google Shape;63;p3:notes"/>
-          <p:cNvSpPr>
-            <a:spLocks noGrp="1" noRot="1" noChangeAspect="1"/>
-          </p:cNvSpPr>
-          <p:nvPr>
-            <p:ph type="sldImg" idx="2"/>
-          </p:nvPr>
-        </p:nvSpPr>
-        <p:spPr>
-          <a:xfrm>
-            <a:off x="381000" y="685800"/>
-            <a:ext cx="6096000" cy="3429000"/>
-          </a:xfrm>
-          <a:custGeom>
-            <a:avLst/>
-            <a:gdLst/>
-            <a:ahLst/>
-            <a:cxnLst/>
-            <a:rect l="l" t="t" r="r" b="b"/>
-            <a:pathLst>
-              <a:path w="120000" h="120000" extrusionOk="0">
-                <a:moveTo>
-                  <a:pt x="0" y="0"/>
-                </a:moveTo>
-                <a:lnTo>
-                  <a:pt x="120000" y="0"/>
-                </a:lnTo>
-                <a:lnTo>
-                  <a:pt x="120000" y="120000"/>
-                </a:lnTo>
-                <a:lnTo>
-                  <a:pt x="0" y="120000"/>
-                </a:lnTo>
-                <a:close/>
-              </a:path>
-            </a:pathLst>
-          </a:custGeom>
-          <a:noFill/>
-          <a:ln w="9525" cap="flat" cmpd="sng">
-            <a:solidFill>
-              <a:srgbClr val="000000"/>
-            </a:solidFill>
-            <a:prstDash val="solid"/>
-            <a:round/>
-            <a:headEnd type="none" w="sm" len="sm"/>
-            <a:tailEnd type="none" w="sm" len="sm"/>
-          </a:ln>
-        </p:spPr>
-      </p:sp>
-      <p:sp>
-        <p:nvSpPr>
-          <p:cNvPr id="64" name="Google Shape;64;p3:notes"/>
-          <p:cNvSpPr txBox="1">
-            <a:spLocks noGrp="1"/>
-          </p:cNvSpPr>
-          <p:nvPr>
-            <p:ph type="body" idx="1"/>
-          </p:nvPr>
-        </p:nvSpPr>
-        <p:spPr>
-          <a:xfrm>
-            <a:off x="685800" y="4343400"/>
-            <a:ext cx="5486400" cy="4114800"/>
-          </a:xfrm>
-          <a:prstGeom prst="rect">
-            <a:avLst/>
-          </a:prstGeom>
-          <a:noFill/>
-          <a:ln>
-            <a:noFill/>
-          </a:ln>
-        </p:spPr>
-        <p:txBody>
-          <a:bodyPr spcFirstLastPara="1" wrap="square" lIns="91425" tIns="91425" rIns="91425" bIns="91425" anchor="t" anchorCtr="0">
-            <a:noAutofit/>
-          </a:bodyPr>
-          <a:lstStyle/>
-          <a:p>
-            <a:pPr marL="0" lvl="0" indent="0" algn="l" rtl="0">
-              <a:lnSpc>
-                <a:spcPct val="100000"/>
-              </a:lnSpc>
-              <a:spcBef>
-                <a:spcPts val="0"/>
-              </a:spcBef>
-              <a:spcAft>
-                <a:spcPts val="0"/>
-              </a:spcAft>
-              <a:buSzPts val="1100"/>
-              <a:buNone/>
-            </a:pPr>
-            <a:endParaRPr/>
-          </a:p>
-        </p:txBody>
-      </p:sp>
-    </p:spTree>
-    <p:extLst>
-      <p:ext uri="{BB962C8B-B14F-4D97-AF65-F5344CB8AC3E}">
-        <p14:creationId xmlns:p14="http://schemas.microsoft.com/office/powerpoint/2010/main" val="3112130903"/>
-      </p:ext>
-    </p:extLst>
-  </p:cSld>
-  <p:clrMapOvr>
-    <a:masterClrMapping/>
-  </p:clrMapOvr>
-</p:notes>
-</file>
-
-<file path=ppt/notesSlides/notesSlide6.xml><?xml version="1.0" encoding="utf-8"?>
-<p:notes xmlns:a="http://schemas.openxmlformats.org/drawingml/2006/main" xmlns:r="http://schemas.openxmlformats.org/officeDocument/2006/relationships" xmlns:p="http://schemas.openxmlformats.org/presentationml/2006/main" showMasterSp="0" showMasterPhAnim="0">
-  <p:cSld>
-    <p:spTree>
-      <p:nvGrpSpPr>
-        <p:cNvPr id="1" name="Shape 56"/>
-        <p:cNvGrpSpPr/>
-        <p:nvPr/>
-      </p:nvGrpSpPr>
-      <p:grpSpPr>
-        <a:xfrm>
-          <a:off x="0" y="0"/>
-          <a:ext cx="0" cy="0"/>
-          <a:chOff x="0" y="0"/>
-          <a:chExt cx="0" cy="0"/>
-        </a:xfrm>
-      </p:grpSpPr>
-      <p:sp>
-        <p:nvSpPr>
-          <p:cNvPr id="57" name="Google Shape;57;p2:notes"/>
-          <p:cNvSpPr>
-            <a:spLocks noGrp="1" noRot="1" noChangeAspect="1"/>
-          </p:cNvSpPr>
-          <p:nvPr>
-            <p:ph type="sldImg" idx="2"/>
-          </p:nvPr>
-        </p:nvSpPr>
-        <p:spPr>
-          <a:xfrm>
-            <a:off x="381000" y="685800"/>
-            <a:ext cx="6096000" cy="3429000"/>
-          </a:xfrm>
-          <a:custGeom>
-            <a:avLst/>
-            <a:gdLst/>
-            <a:ahLst/>
-            <a:cxnLst/>
-            <a:rect l="l" t="t" r="r" b="b"/>
-            <a:pathLst>
-              <a:path w="120000" h="120000" extrusionOk="0">
-                <a:moveTo>
-                  <a:pt x="0" y="0"/>
-                </a:moveTo>
-                <a:lnTo>
-                  <a:pt x="120000" y="0"/>
-                </a:lnTo>
-                <a:lnTo>
-                  <a:pt x="120000" y="120000"/>
-                </a:lnTo>
-                <a:lnTo>
-                  <a:pt x="0" y="120000"/>
-                </a:lnTo>
-                <a:close/>
-              </a:path>
-            </a:pathLst>
-          </a:custGeom>
-          <a:noFill/>
-          <a:ln w="9525" cap="flat" cmpd="sng">
-            <a:solidFill>
-              <a:srgbClr val="000000"/>
-            </a:solidFill>
-            <a:prstDash val="solid"/>
-            <a:round/>
-            <a:headEnd type="none" w="sm" len="sm"/>
-            <a:tailEnd type="none" w="sm" len="sm"/>
-          </a:ln>
-        </p:spPr>
-      </p:sp>
-      <p:sp>
-        <p:nvSpPr>
-          <p:cNvPr id="58" name="Google Shape;58;p2:notes"/>
-          <p:cNvSpPr txBox="1">
-            <a:spLocks noGrp="1"/>
-          </p:cNvSpPr>
-          <p:nvPr>
-            <p:ph type="body" idx="1"/>
-          </p:nvPr>
-        </p:nvSpPr>
-        <p:spPr>
-          <a:xfrm>
-            <a:off x="685800" y="4343400"/>
-            <a:ext cx="5486400" cy="4114800"/>
-          </a:xfrm>
-          <a:prstGeom prst="rect">
-            <a:avLst/>
-          </a:prstGeom>
-          <a:noFill/>
-          <a:ln>
-            <a:noFill/>
-          </a:ln>
-        </p:spPr>
-        <p:txBody>
-          <a:bodyPr spcFirstLastPara="1" wrap="square" lIns="91425" tIns="91425" rIns="91425" bIns="91425" anchor="t" anchorCtr="0">
-            <a:noAutofit/>
-          </a:bodyPr>
-          <a:lstStyle/>
-          <a:p>
-            <a:pPr marL="0" lvl="0" indent="0" algn="l" rtl="0">
-              <a:lnSpc>
-                <a:spcPct val="100000"/>
-              </a:lnSpc>
-              <a:spcBef>
-                <a:spcPts val="0"/>
-              </a:spcBef>
-              <a:spcAft>
-                <a:spcPts val="0"/>
-              </a:spcAft>
-              <a:buSzPts val="1100"/>
-              <a:buNone/>
-            </a:pPr>
-            <a:endParaRPr/>
-          </a:p>
-        </p:txBody>
-      </p:sp>
-    </p:spTree>
-    <p:extLst>
-      <p:ext uri="{BB962C8B-B14F-4D97-AF65-F5344CB8AC3E}">
-        <p14:creationId xmlns:p14="http://schemas.microsoft.com/office/powerpoint/2010/main" val="1027382645"/>
-      </p:ext>
-    </p:extLst>
-  </p:cSld>
-  <p:clrMapOvr>
-    <a:masterClrMapping/>
-  </p:clrMapOvr>
-</p:notes>
-</file>
-
-<file path=ppt/notesSlides/notesSlide7.xml><?xml version="1.0" encoding="utf-8"?>
-<p:notes xmlns:a="http://schemas.openxmlformats.org/drawingml/2006/main" xmlns:r="http://schemas.openxmlformats.org/officeDocument/2006/relationships" xmlns:p="http://schemas.openxmlformats.org/presentationml/2006/main" showMasterSp="0" showMasterPhAnim="0">
-  <p:cSld>
-    <p:spTree>
-      <p:nvGrpSpPr>
-        <p:cNvPr id="1" name="Shape 87"/>
-        <p:cNvGrpSpPr/>
-        <p:nvPr/>
-      </p:nvGrpSpPr>
-      <p:grpSpPr>
-        <a:xfrm>
-          <a:off x="0" y="0"/>
-          <a:ext cx="0" cy="0"/>
-          <a:chOff x="0" y="0"/>
-          <a:chExt cx="0" cy="0"/>
-        </a:xfrm>
-      </p:grpSpPr>
-      <p:sp>
-        <p:nvSpPr>
-          <p:cNvPr id="88" name="Google Shape;88;p7:notes"/>
-          <p:cNvSpPr>
-            <a:spLocks noGrp="1" noRot="1" noChangeAspect="1"/>
-          </p:cNvSpPr>
-          <p:nvPr>
-            <p:ph type="sldImg" idx="2"/>
-          </p:nvPr>
-        </p:nvSpPr>
-        <p:spPr>
-          <a:xfrm>
-            <a:off x="381000" y="685800"/>
-            <a:ext cx="6096000" cy="3429000"/>
-          </a:xfrm>
-          <a:custGeom>
-            <a:avLst/>
-            <a:gdLst/>
-            <a:ahLst/>
-            <a:cxnLst/>
-            <a:rect l="l" t="t" r="r" b="b"/>
-            <a:pathLst>
-              <a:path w="120000" h="120000" extrusionOk="0">
-                <a:moveTo>
-                  <a:pt x="0" y="0"/>
-                </a:moveTo>
-                <a:lnTo>
-                  <a:pt x="120000" y="0"/>
-                </a:lnTo>
-                <a:lnTo>
-                  <a:pt x="120000" y="120000"/>
-                </a:lnTo>
-                <a:lnTo>
-                  <a:pt x="0" y="120000"/>
-                </a:lnTo>
-                <a:close/>
-              </a:path>
-            </a:pathLst>
-          </a:custGeom>
-          <a:noFill/>
-          <a:ln w="9525" cap="flat" cmpd="sng">
-            <a:solidFill>
-              <a:srgbClr val="000000"/>
-            </a:solidFill>
-            <a:prstDash val="solid"/>
-            <a:round/>
-            <a:headEnd type="none" w="sm" len="sm"/>
-            <a:tailEnd type="none" w="sm" len="sm"/>
-          </a:ln>
-        </p:spPr>
-      </p:sp>
-      <p:sp>
-        <p:nvSpPr>
-          <p:cNvPr id="89" name="Google Shape;89;p7:notes"/>
-          <p:cNvSpPr txBox="1">
-            <a:spLocks noGrp="1"/>
-          </p:cNvSpPr>
-          <p:nvPr>
-            <p:ph type="body" idx="1"/>
-          </p:nvPr>
-        </p:nvSpPr>
-        <p:spPr>
-          <a:xfrm>
-            <a:off x="685800" y="4343400"/>
-            <a:ext cx="5486400" cy="4114800"/>
-          </a:xfrm>
-          <a:prstGeom prst="rect">
-            <a:avLst/>
-          </a:prstGeom>
-          <a:noFill/>
-          <a:ln>
-            <a:noFill/>
-          </a:ln>
-        </p:spPr>
-        <p:txBody>
-          <a:bodyPr spcFirstLastPara="1" wrap="square" lIns="91425" tIns="91425" rIns="91425" bIns="91425" anchor="t" anchorCtr="0">
-            <a:noAutofit/>
-          </a:bodyPr>
-          <a:lstStyle/>
-          <a:p>
-            <a:pPr marL="0" lvl="0" indent="0" algn="l" rtl="0">
-              <a:lnSpc>
-                <a:spcPct val="100000"/>
-              </a:lnSpc>
-              <a:spcBef>
-                <a:spcPts val="0"/>
-              </a:spcBef>
-              <a:spcAft>
-                <a:spcPts val="0"/>
-              </a:spcAft>
-              <a:buSzPts val="1100"/>
-              <a:buNone/>
-            </a:pPr>
-            <a:endParaRPr/>
-          </a:p>
-        </p:txBody>
-      </p:sp>
-    </p:spTree>
-    <p:extLst>
-      <p:ext uri="{BB962C8B-B14F-4D97-AF65-F5344CB8AC3E}">
-        <p14:creationId xmlns:p14="http://schemas.microsoft.com/office/powerpoint/2010/main" val="469598129"/>
-      </p:ext>
-    </p:extLst>
-  </p:cSld>
-  <p:clrMapOvr>
-    <a:masterClrMapping/>
-  </p:clrMapOvr>
-</p:notes>
-</file>
-
-<file path=ppt/notesSlides/notesSlide8.xml><?xml version="1.0" encoding="utf-8"?>
-<p:notes xmlns:a="http://schemas.openxmlformats.org/drawingml/2006/main" xmlns:r="http://schemas.openxmlformats.org/officeDocument/2006/relationships" xmlns:p="http://schemas.openxmlformats.org/presentationml/2006/main" showMasterSp="0" showMasterPhAnim="0">
-  <p:cSld>
-    <p:spTree>
-      <p:nvGrpSpPr>
-        <p:cNvPr id="1" name="Shape 93"/>
-        <p:cNvGrpSpPr/>
-        <p:nvPr/>
-      </p:nvGrpSpPr>
-      <p:grpSpPr>
-        <a:xfrm>
-          <a:off x="0" y="0"/>
-          <a:ext cx="0" cy="0"/>
-          <a:chOff x="0" y="0"/>
-          <a:chExt cx="0" cy="0"/>
-        </a:xfrm>
-      </p:grpSpPr>
-      <p:sp>
-        <p:nvSpPr>
-          <p:cNvPr id="94" name="Google Shape;94;p8:notes"/>
-          <p:cNvSpPr>
-            <a:spLocks noGrp="1" noRot="1" noChangeAspect="1"/>
-          </p:cNvSpPr>
-          <p:nvPr>
-            <p:ph type="sldImg" idx="2"/>
-          </p:nvPr>
-        </p:nvSpPr>
-        <p:spPr>
-          <a:xfrm>
-            <a:off x="381000" y="685800"/>
-            <a:ext cx="6096000" cy="3429000"/>
-          </a:xfrm>
-          <a:custGeom>
-            <a:avLst/>
-            <a:gdLst/>
-            <a:ahLst/>
-            <a:cxnLst/>
-            <a:rect l="l" t="t" r="r" b="b"/>
-            <a:pathLst>
-              <a:path w="120000" h="120000" extrusionOk="0">
-                <a:moveTo>
-                  <a:pt x="0" y="0"/>
-                </a:moveTo>
-                <a:lnTo>
-                  <a:pt x="120000" y="0"/>
-                </a:lnTo>
-                <a:lnTo>
-                  <a:pt x="120000" y="120000"/>
-                </a:lnTo>
-                <a:lnTo>
-                  <a:pt x="0" y="120000"/>
-                </a:lnTo>
-                <a:close/>
-              </a:path>
-            </a:pathLst>
-          </a:custGeom>
-          <a:noFill/>
-          <a:ln w="9525" cap="flat" cmpd="sng">
-            <a:solidFill>
-              <a:srgbClr val="000000"/>
-            </a:solidFill>
-            <a:prstDash val="solid"/>
-            <a:round/>
-            <a:headEnd type="none" w="sm" len="sm"/>
-            <a:tailEnd type="none" w="sm" len="sm"/>
-          </a:ln>
-        </p:spPr>
-      </p:sp>
-      <p:sp>
-        <p:nvSpPr>
-          <p:cNvPr id="95" name="Google Shape;95;p8:notes"/>
-          <p:cNvSpPr txBox="1">
-            <a:spLocks noGrp="1"/>
-          </p:cNvSpPr>
-          <p:nvPr>
-            <p:ph type="body" idx="1"/>
-          </p:nvPr>
-        </p:nvSpPr>
-        <p:spPr>
-          <a:xfrm>
-            <a:off x="685800" y="4343400"/>
-            <a:ext cx="5486400" cy="4114800"/>
-          </a:xfrm>
-          <a:prstGeom prst="rect">
-            <a:avLst/>
-          </a:prstGeom>
-          <a:noFill/>
-          <a:ln>
-            <a:noFill/>
-          </a:ln>
-        </p:spPr>
-        <p:txBody>
-          <a:bodyPr spcFirstLastPara="1" wrap="square" lIns="91425" tIns="91425" rIns="91425" bIns="91425" anchor="t" anchorCtr="0">
-            <a:noAutofit/>
-          </a:bodyPr>
-          <a:lstStyle/>
-          <a:p>
-            <a:pPr marL="0" lvl="0" indent="0" algn="l" rtl="0">
-              <a:lnSpc>
-                <a:spcPct val="100000"/>
-              </a:lnSpc>
-              <a:spcBef>
-                <a:spcPts val="0"/>
-              </a:spcBef>
-              <a:spcAft>
-                <a:spcPts val="0"/>
-              </a:spcAft>
-              <a:buSzPts val="1100"/>
-              <a:buNone/>
-            </a:pPr>
-            <a:endParaRPr/>
-          </a:p>
-        </p:txBody>
-      </p:sp>
-    </p:spTree>
-    <p:extLst>
-      <p:ext uri="{BB962C8B-B14F-4D97-AF65-F5344CB8AC3E}">
-        <p14:creationId xmlns:p14="http://schemas.microsoft.com/office/powerpoint/2010/main" val="1072437651"/>
-      </p:ext>
-    </p:extLst>
-  </p:cSld>
-  <p:clrMapOvr>
-    <a:masterClrMapping/>
-  </p:clrMapOvr>
-</p:notes>
-</file>
-
-<file path=ppt/notesSlides/notesSlide9.xml><?xml version="1.0" encoding="utf-8"?>
-<p:notes xmlns:a="http://schemas.openxmlformats.org/drawingml/2006/main" xmlns:r="http://schemas.openxmlformats.org/officeDocument/2006/relationships" xmlns:p="http://schemas.openxmlformats.org/presentationml/2006/main" showMasterSp="0" showMasterPhAnim="0">
-  <p:cSld>
-    <p:spTree>
-      <p:nvGrpSpPr>
-        <p:cNvPr id="1" name="Shape 68"/>
-        <p:cNvGrpSpPr/>
-        <p:nvPr/>
-      </p:nvGrpSpPr>
-      <p:grpSpPr>
-        <a:xfrm>
-          <a:off x="0" y="0"/>
-          <a:ext cx="0" cy="0"/>
-          <a:chOff x="0" y="0"/>
-          <a:chExt cx="0" cy="0"/>
-        </a:xfrm>
-      </p:grpSpPr>
-      <p:sp>
-        <p:nvSpPr>
-          <p:cNvPr id="69" name="Google Shape;69;p4:notes"/>
-          <p:cNvSpPr>
-            <a:spLocks noGrp="1" noRot="1" noChangeAspect="1"/>
-          </p:cNvSpPr>
-          <p:nvPr>
-            <p:ph type="sldImg" idx="2"/>
-          </p:nvPr>
-        </p:nvSpPr>
-        <p:spPr>
-          <a:xfrm>
-            <a:off x="381000" y="685800"/>
-            <a:ext cx="6096000" cy="3429000"/>
-          </a:xfrm>
-          <a:custGeom>
-            <a:avLst/>
-            <a:gdLst/>
-            <a:ahLst/>
-            <a:cxnLst/>
-            <a:rect l="l" t="t" r="r" b="b"/>
-            <a:pathLst>
-              <a:path w="120000" h="120000" extrusionOk="0">
-                <a:moveTo>
-                  <a:pt x="0" y="0"/>
-                </a:moveTo>
-                <a:lnTo>
-                  <a:pt x="120000" y="0"/>
-                </a:lnTo>
-                <a:lnTo>
-                  <a:pt x="120000" y="120000"/>
-                </a:lnTo>
-                <a:lnTo>
-                  <a:pt x="0" y="120000"/>
-                </a:lnTo>
-                <a:close/>
-              </a:path>
-            </a:pathLst>
-          </a:custGeom>
-          <a:noFill/>
-          <a:ln w="9525" cap="flat" cmpd="sng">
-            <a:solidFill>
-              <a:srgbClr val="000000"/>
-            </a:solidFill>
-            <a:prstDash val="solid"/>
-            <a:round/>
-            <a:headEnd type="none" w="sm" len="sm"/>
-            <a:tailEnd type="none" w="sm" len="sm"/>
-          </a:ln>
-        </p:spPr>
-      </p:sp>
-      <p:sp>
-        <p:nvSpPr>
-          <p:cNvPr id="70" name="Google Shape;70;p4:notes"/>
-          <p:cNvSpPr txBox="1">
-            <a:spLocks noGrp="1"/>
-          </p:cNvSpPr>
-          <p:nvPr>
-            <p:ph type="body" idx="1"/>
-          </p:nvPr>
-        </p:nvSpPr>
-        <p:spPr>
-          <a:xfrm>
-            <a:off x="685800" y="4343400"/>
-            <a:ext cx="5486400" cy="4114800"/>
-          </a:xfrm>
-          <a:prstGeom prst="rect">
-            <a:avLst/>
-          </a:prstGeom>
-          <a:noFill/>
-          <a:ln>
-            <a:noFill/>
-          </a:ln>
-        </p:spPr>
-        <p:txBody>
-          <a:bodyPr spcFirstLastPara="1" wrap="square" lIns="91425" tIns="91425" rIns="91425" bIns="91425" anchor="t" anchorCtr="0">
-            <a:noAutofit/>
-          </a:bodyPr>
-          <a:lstStyle/>
-          <a:p>
-            <a:pPr marL="0" lvl="0" indent="0" algn="l" rtl="0">
-              <a:lnSpc>
-                <a:spcPct val="100000"/>
-              </a:lnSpc>
-              <a:spcBef>
-                <a:spcPts val="0"/>
-              </a:spcBef>
-              <a:spcAft>
-                <a:spcPts val="0"/>
-              </a:spcAft>
-              <a:buSzPts val="1100"/>
-              <a:buNone/>
-            </a:pPr>
-            <a:endParaRPr/>
-          </a:p>
-        </p:txBody>
-      </p:sp>
-    </p:spTree>
-    <p:extLst>
-      <p:ext uri="{BB962C8B-B14F-4D97-AF65-F5344CB8AC3E}">
-        <p14:creationId xmlns:p14="http://schemas.microsoft.com/office/powerpoint/2010/main" val="244699211"/>
       </p:ext>
     </p:extLst>
   </p:cSld>
@@ -2075,7 +1179,7 @@
           </a:lstStyle>
           <a:p>
             <a:r>
-              <a:rPr lang="ja-JP" altLang="en-US" smtClean="0"/>
+              <a:rPr lang="ja-JP" altLang="en-US"/>
               <a:t>マスター タイトルの書式設定</a:t>
             </a:r>
             <a:endParaRPr lang="en-US" dirty="0"/>
@@ -2196,7 +1300,7 @@
           </a:lstStyle>
           <a:p>
             <a:r>
-              <a:rPr lang="ja-JP" altLang="en-US" smtClean="0"/>
+              <a:rPr lang="ja-JP" altLang="en-US"/>
               <a:t>マスター サブタイトルの書式設定</a:t>
             </a:r>
             <a:endParaRPr lang="en-US" dirty="0"/>
@@ -2221,7 +1325,7 @@
             <a:fld id="{B61BEF0D-F0BB-DE4B-95CE-6DB70DBA9567}" type="datetimeFigureOut">
               <a:rPr lang="en-US" dirty="0"/>
               <a:pPr/>
-              <a:t>11/21/2025</a:t>
+              <a:t>11/24/2025</a:t>
             </a:fld>
             <a:endParaRPr lang="en-US" dirty="0"/>
           </a:p>
@@ -2500,7 +1604,7 @@
           <a:lstStyle/>
           <a:p>
             <a:r>
-              <a:rPr lang="ja-JP" altLang="en-US" smtClean="0"/>
+              <a:rPr lang="ja-JP" altLang="en-US"/>
               <a:t>マスター タイトルの書式設定</a:t>
             </a:r>
             <a:endParaRPr lang="en-US" dirty="0"/>
@@ -2587,7 +1691,7 @@
           </a:lstStyle>
           <a:p>
             <a:r>
-              <a:rPr lang="ja-JP" altLang="en-US" smtClean="0"/>
+              <a:rPr lang="ja-JP" altLang="en-US"/>
               <a:t>図を追加</a:t>
             </a:r>
             <a:endParaRPr lang="en-US" dirty="0"/>
@@ -2644,7 +1748,7 @@
           <a:p>
             <a:pPr lvl="0"/>
             <a:r>
-              <a:rPr lang="ja-JP" altLang="en-US" smtClean="0"/>
+              <a:rPr lang="ja-JP" altLang="en-US"/>
               <a:t>マスター テキストの書式設定</a:t>
             </a:r>
           </a:p>
@@ -2668,7 +1772,7 @@
             <a:fld id="{B61BEF0D-F0BB-DE4B-95CE-6DB70DBA9567}" type="datetimeFigureOut">
               <a:rPr lang="en-US" dirty="0"/>
               <a:pPr/>
-              <a:t>11/21/2025</a:t>
+              <a:t>11/24/2025</a:t>
             </a:fld>
             <a:endParaRPr lang="en-US" dirty="0"/>
           </a:p>
@@ -2783,7 +1887,7 @@
           </a:lstStyle>
           <a:p>
             <a:r>
-              <a:rPr lang="ja-JP" altLang="en-US" smtClean="0"/>
+              <a:rPr lang="ja-JP" altLang="en-US"/>
               <a:t>マスター タイトルの書式設定</a:t>
             </a:r>
             <a:endParaRPr lang="en-US" dirty="0"/>
@@ -2905,7 +2009,7 @@
           <a:p>
             <a:pPr lvl="0"/>
             <a:r>
-              <a:rPr lang="ja-JP" altLang="en-US" smtClean="0"/>
+              <a:rPr lang="ja-JP" altLang="en-US"/>
               <a:t>マスター テキストの書式設定</a:t>
             </a:r>
           </a:p>
@@ -2929,7 +2033,7 @@
             <a:fld id="{B61BEF0D-F0BB-DE4B-95CE-6DB70DBA9567}" type="datetimeFigureOut">
               <a:rPr lang="en-US" dirty="0"/>
               <a:pPr/>
-              <a:t>11/21/2025</a:t>
+              <a:t>11/24/2025</a:t>
             </a:fld>
             <a:endParaRPr lang="en-US" dirty="0"/>
           </a:p>
@@ -3048,7 +2152,7 @@
           </a:lstStyle>
           <a:p>
             <a:r>
-              <a:rPr lang="ja-JP" altLang="en-US" smtClean="0"/>
+              <a:rPr lang="ja-JP" altLang="en-US"/>
               <a:t>マスター タイトルの書式設定</a:t>
             </a:r>
             <a:endParaRPr lang="en-US" dirty="0"/>
@@ -3103,7 +2207,7 @@
           <a:p>
             <a:pPr lvl="0"/>
             <a:r>
-              <a:rPr lang="ja-JP" altLang="en-US" smtClean="0"/>
+              <a:rPr lang="ja-JP" altLang="en-US"/>
               <a:t>マスター テキストの書式設定</a:t>
             </a:r>
           </a:p>
@@ -3224,7 +2328,7 @@
           <a:p>
             <a:pPr lvl="0"/>
             <a:r>
-              <a:rPr lang="ja-JP" altLang="en-US" smtClean="0"/>
+              <a:rPr lang="ja-JP" altLang="en-US"/>
               <a:t>マスター テキストの書式設定</a:t>
             </a:r>
           </a:p>
@@ -3248,7 +2352,7 @@
             <a:fld id="{B61BEF0D-F0BB-DE4B-95CE-6DB70DBA9567}" type="datetimeFigureOut">
               <a:rPr lang="en-US" dirty="0"/>
               <a:pPr/>
-              <a:t>11/21/2025</a:t>
+              <a:t>11/24/2025</a:t>
             </a:fld>
             <a:endParaRPr lang="en-US" dirty="0"/>
           </a:p>
@@ -3431,7 +2535,7 @@
           </a:lstStyle>
           <a:p>
             <a:r>
-              <a:rPr lang="ja-JP" altLang="en-US" smtClean="0"/>
+              <a:rPr lang="ja-JP" altLang="en-US"/>
               <a:t>マスター タイトルの書式設定</a:t>
             </a:r>
             <a:endParaRPr lang="en-US" dirty="0"/>
@@ -3553,7 +2657,7 @@
           <a:p>
             <a:pPr lvl="0"/>
             <a:r>
-              <a:rPr lang="ja-JP" altLang="en-US" smtClean="0"/>
+              <a:rPr lang="ja-JP" altLang="en-US"/>
               <a:t>マスター テキストの書式設定</a:t>
             </a:r>
           </a:p>
@@ -3577,7 +2681,7 @@
             <a:fld id="{B61BEF0D-F0BB-DE4B-95CE-6DB70DBA9567}" type="datetimeFigureOut">
               <a:rPr lang="en-US" dirty="0"/>
               <a:pPr/>
-              <a:t>11/21/2025</a:t>
+              <a:t>11/24/2025</a:t>
             </a:fld>
             <a:endParaRPr lang="en-US" dirty="0"/>
           </a:p>
@@ -3696,7 +2800,7 @@
           </a:lstStyle>
           <a:p>
             <a:r>
-              <a:rPr lang="ja-JP" altLang="en-US" smtClean="0"/>
+              <a:rPr lang="ja-JP" altLang="en-US"/>
               <a:t>マスター タイトルの書式設定</a:t>
             </a:r>
             <a:endParaRPr lang="en-US" dirty="0"/>
@@ -3745,7 +2849,7 @@
               <a:buNone/>
             </a:pPr>
             <a:r>
-              <a:rPr lang="ja-JP" altLang="en-US" smtClean="0"/>
+              <a:rPr lang="ja-JP" altLang="en-US"/>
               <a:t>マスター テキストの書式設定</a:t>
             </a:r>
           </a:p>
@@ -3866,7 +2970,7 @@
           <a:p>
             <a:pPr lvl="0"/>
             <a:r>
-              <a:rPr lang="ja-JP" altLang="en-US" smtClean="0"/>
+              <a:rPr lang="ja-JP" altLang="en-US"/>
               <a:t>マスター テキストの書式設定</a:t>
             </a:r>
           </a:p>
@@ -3890,7 +2994,7 @@
             <a:fld id="{B61BEF0D-F0BB-DE4B-95CE-6DB70DBA9567}" type="datetimeFigureOut">
               <a:rPr lang="en-US" dirty="0"/>
               <a:pPr/>
-              <a:t>11/21/2025</a:t>
+              <a:t>11/24/2025</a:t>
             </a:fld>
             <a:endParaRPr lang="en-US" dirty="0"/>
           </a:p>
@@ -4074,7 +3178,7 @@
           <a:p>
             <a:pPr marL="0" lvl="0"/>
             <a:r>
-              <a:rPr lang="ja-JP" altLang="en-US" smtClean="0"/>
+              <a:rPr lang="ja-JP" altLang="en-US"/>
               <a:t>マスター タイトルの書式設定</a:t>
             </a:r>
             <a:endParaRPr lang="en-US" dirty="0"/>
@@ -4123,7 +3227,7 @@
               <a:buNone/>
             </a:pPr>
             <a:r>
-              <a:rPr lang="ja-JP" altLang="en-US" smtClean="0"/>
+              <a:rPr lang="ja-JP" altLang="en-US"/>
               <a:t>マスター テキストの書式設定</a:t>
             </a:r>
           </a:p>
@@ -4244,7 +3348,7 @@
           <a:p>
             <a:pPr lvl="0"/>
             <a:r>
-              <a:rPr lang="ja-JP" altLang="en-US" smtClean="0"/>
+              <a:rPr lang="ja-JP" altLang="en-US"/>
               <a:t>マスター テキストの書式設定</a:t>
             </a:r>
           </a:p>
@@ -4268,7 +3372,7 @@
             <a:fld id="{B61BEF0D-F0BB-DE4B-95CE-6DB70DBA9567}" type="datetimeFigureOut">
               <a:rPr lang="en-US" dirty="0"/>
               <a:pPr/>
-              <a:t>11/21/2025</a:t>
+              <a:t>11/24/2025</a:t>
             </a:fld>
             <a:endParaRPr lang="en-US" dirty="0"/>
           </a:p>
@@ -4376,7 +3480,7 @@
           </a:lstStyle>
           <a:p>
             <a:r>
-              <a:rPr lang="ja-JP" altLang="en-US" smtClean="0"/>
+              <a:rPr lang="ja-JP" altLang="en-US"/>
               <a:t>マスター タイトルの書式設定</a:t>
             </a:r>
             <a:endParaRPr lang="en-US" dirty="0"/>
@@ -4400,67 +3504,67 @@
           <a:p>
             <a:pPr lvl="0"/>
             <a:r>
-              <a:rPr lang="ja-JP" altLang="en-US" smtClean="0"/>
+              <a:rPr lang="ja-JP" altLang="en-US"/>
               <a:t>マスター テキストの書式設定</a:t>
             </a:r>
           </a:p>
           <a:p>
             <a:pPr lvl="1"/>
             <a:r>
-              <a:rPr lang="ja-JP" altLang="en-US" smtClean="0"/>
+              <a:rPr lang="ja-JP" altLang="en-US"/>
               <a:t>第 </a:t>
             </a:r>
             <a:r>
-              <a:rPr lang="en-US" altLang="ja-JP" smtClean="0"/>
+              <a:rPr lang="en-US" altLang="ja-JP"/>
               <a:t>2 </a:t>
             </a:r>
             <a:r>
-              <a:rPr lang="ja-JP" altLang="en-US" smtClean="0"/>
+              <a:rPr lang="ja-JP" altLang="en-US"/>
               <a:t>レベル</a:t>
             </a:r>
           </a:p>
           <a:p>
             <a:pPr lvl="2"/>
             <a:r>
-              <a:rPr lang="ja-JP" altLang="en-US" smtClean="0"/>
+              <a:rPr lang="ja-JP" altLang="en-US"/>
               <a:t>第 </a:t>
             </a:r>
             <a:r>
-              <a:rPr lang="en-US" altLang="ja-JP" smtClean="0"/>
+              <a:rPr lang="en-US" altLang="ja-JP"/>
               <a:t>3 </a:t>
             </a:r>
             <a:r>
-              <a:rPr lang="ja-JP" altLang="en-US" smtClean="0"/>
+              <a:rPr lang="ja-JP" altLang="en-US"/>
               <a:t>レベル</a:t>
             </a:r>
           </a:p>
           <a:p>
             <a:pPr lvl="3"/>
             <a:r>
-              <a:rPr lang="ja-JP" altLang="en-US" smtClean="0"/>
+              <a:rPr lang="ja-JP" altLang="en-US"/>
               <a:t>第 </a:t>
             </a:r>
             <a:r>
-              <a:rPr lang="en-US" altLang="ja-JP" smtClean="0"/>
+              <a:rPr lang="en-US" altLang="ja-JP"/>
               <a:t>4 </a:t>
             </a:r>
             <a:r>
-              <a:rPr lang="ja-JP" altLang="en-US" smtClean="0"/>
+              <a:rPr lang="ja-JP" altLang="en-US"/>
               <a:t>レベル</a:t>
             </a:r>
           </a:p>
           <a:p>
             <a:pPr lvl="4"/>
             <a:r>
-              <a:rPr lang="ja-JP" altLang="en-US" smtClean="0"/>
+              <a:rPr lang="ja-JP" altLang="en-US"/>
               <a:t>第 </a:t>
             </a:r>
             <a:r>
-              <a:rPr lang="en-US" altLang="ja-JP" smtClean="0"/>
+              <a:rPr lang="en-US" altLang="ja-JP"/>
               <a:t>5 </a:t>
             </a:r>
             <a:r>
-              <a:rPr lang="ja-JP" altLang="en-US" smtClean="0"/>
+              <a:rPr lang="ja-JP" altLang="en-US"/>
               <a:t>レベル</a:t>
             </a:r>
             <a:endParaRPr lang="en-US" dirty="0"/>
@@ -4485,7 +3589,7 @@
             <a:fld id="{B61BEF0D-F0BB-DE4B-95CE-6DB70DBA9567}" type="datetimeFigureOut">
               <a:rPr lang="en-US" dirty="0"/>
               <a:pPr/>
-              <a:t>11/21/2025</a:t>
+              <a:t>11/24/2025</a:t>
             </a:fld>
             <a:endParaRPr lang="en-US" dirty="0"/>
           </a:p>
@@ -4594,7 +3698,7 @@
           <a:lstStyle/>
           <a:p>
             <a:r>
-              <a:rPr lang="ja-JP" altLang="en-US" smtClean="0"/>
+              <a:rPr lang="ja-JP" altLang="en-US"/>
               <a:t>マスター タイトルの書式設定</a:t>
             </a:r>
             <a:endParaRPr lang="en-US" dirty="0"/>
@@ -4623,67 +3727,67 @@
           <a:p>
             <a:pPr lvl="0"/>
             <a:r>
-              <a:rPr lang="ja-JP" altLang="en-US" smtClean="0"/>
+              <a:rPr lang="ja-JP" altLang="en-US"/>
               <a:t>マスター テキストの書式設定</a:t>
             </a:r>
           </a:p>
           <a:p>
             <a:pPr lvl="1"/>
             <a:r>
-              <a:rPr lang="ja-JP" altLang="en-US" smtClean="0"/>
+              <a:rPr lang="ja-JP" altLang="en-US"/>
               <a:t>第 </a:t>
             </a:r>
             <a:r>
-              <a:rPr lang="en-US" altLang="ja-JP" smtClean="0"/>
+              <a:rPr lang="en-US" altLang="ja-JP"/>
               <a:t>2 </a:t>
             </a:r>
             <a:r>
-              <a:rPr lang="ja-JP" altLang="en-US" smtClean="0"/>
+              <a:rPr lang="ja-JP" altLang="en-US"/>
               <a:t>レベル</a:t>
             </a:r>
           </a:p>
           <a:p>
             <a:pPr lvl="2"/>
             <a:r>
-              <a:rPr lang="ja-JP" altLang="en-US" smtClean="0"/>
+              <a:rPr lang="ja-JP" altLang="en-US"/>
               <a:t>第 </a:t>
             </a:r>
             <a:r>
-              <a:rPr lang="en-US" altLang="ja-JP" smtClean="0"/>
+              <a:rPr lang="en-US" altLang="ja-JP"/>
               <a:t>3 </a:t>
             </a:r>
             <a:r>
-              <a:rPr lang="ja-JP" altLang="en-US" smtClean="0"/>
+              <a:rPr lang="ja-JP" altLang="en-US"/>
               <a:t>レベル</a:t>
             </a:r>
           </a:p>
           <a:p>
             <a:pPr lvl="3"/>
             <a:r>
-              <a:rPr lang="ja-JP" altLang="en-US" smtClean="0"/>
+              <a:rPr lang="ja-JP" altLang="en-US"/>
               <a:t>第 </a:t>
             </a:r>
             <a:r>
-              <a:rPr lang="en-US" altLang="ja-JP" smtClean="0"/>
+              <a:rPr lang="en-US" altLang="ja-JP"/>
               <a:t>4 </a:t>
             </a:r>
             <a:r>
-              <a:rPr lang="ja-JP" altLang="en-US" smtClean="0"/>
+              <a:rPr lang="ja-JP" altLang="en-US"/>
               <a:t>レベル</a:t>
             </a:r>
           </a:p>
           <a:p>
             <a:pPr lvl="4"/>
             <a:r>
-              <a:rPr lang="ja-JP" altLang="en-US" smtClean="0"/>
+              <a:rPr lang="ja-JP" altLang="en-US"/>
               <a:t>第 </a:t>
             </a:r>
             <a:r>
-              <a:rPr lang="en-US" altLang="ja-JP" smtClean="0"/>
+              <a:rPr lang="en-US" altLang="ja-JP"/>
               <a:t>5 </a:t>
             </a:r>
             <a:r>
-              <a:rPr lang="ja-JP" altLang="en-US" smtClean="0"/>
+              <a:rPr lang="ja-JP" altLang="en-US"/>
               <a:t>レベル</a:t>
             </a:r>
             <a:endParaRPr lang="en-US" dirty="0"/>
@@ -4708,7 +3812,7 @@
             <a:fld id="{B61BEF0D-F0BB-DE4B-95CE-6DB70DBA9567}" type="datetimeFigureOut">
               <a:rPr lang="en-US" dirty="0"/>
               <a:pPr/>
-              <a:t>11/21/2025</a:t>
+              <a:t>11/24/2025</a:t>
             </a:fld>
             <a:endParaRPr lang="en-US" dirty="0"/>
           </a:p>
@@ -5443,7 +4547,7 @@
           <a:lstStyle/>
           <a:p>
             <a:r>
-              <a:rPr lang="ja-JP" altLang="en-US" smtClean="0"/>
+              <a:rPr lang="ja-JP" altLang="en-US"/>
               <a:t>マスター タイトルの書式設定</a:t>
             </a:r>
             <a:endParaRPr lang="en-US" dirty="0"/>
@@ -5467,67 +4571,67 @@
           <a:p>
             <a:pPr lvl="0"/>
             <a:r>
-              <a:rPr lang="ja-JP" altLang="en-US" smtClean="0"/>
+              <a:rPr lang="ja-JP" altLang="en-US"/>
               <a:t>マスター テキストの書式設定</a:t>
             </a:r>
           </a:p>
           <a:p>
             <a:pPr lvl="1"/>
             <a:r>
-              <a:rPr lang="ja-JP" altLang="en-US" smtClean="0"/>
+              <a:rPr lang="ja-JP" altLang="en-US"/>
               <a:t>第 </a:t>
             </a:r>
             <a:r>
-              <a:rPr lang="en-US" altLang="ja-JP" smtClean="0"/>
+              <a:rPr lang="en-US" altLang="ja-JP"/>
               <a:t>2 </a:t>
             </a:r>
             <a:r>
-              <a:rPr lang="ja-JP" altLang="en-US" smtClean="0"/>
+              <a:rPr lang="ja-JP" altLang="en-US"/>
               <a:t>レベル</a:t>
             </a:r>
           </a:p>
           <a:p>
             <a:pPr lvl="2"/>
             <a:r>
-              <a:rPr lang="ja-JP" altLang="en-US" smtClean="0"/>
+              <a:rPr lang="ja-JP" altLang="en-US"/>
               <a:t>第 </a:t>
             </a:r>
             <a:r>
-              <a:rPr lang="en-US" altLang="ja-JP" smtClean="0"/>
+              <a:rPr lang="en-US" altLang="ja-JP"/>
               <a:t>3 </a:t>
             </a:r>
             <a:r>
-              <a:rPr lang="ja-JP" altLang="en-US" smtClean="0"/>
+              <a:rPr lang="ja-JP" altLang="en-US"/>
               <a:t>レベル</a:t>
             </a:r>
           </a:p>
           <a:p>
             <a:pPr lvl="3"/>
             <a:r>
-              <a:rPr lang="ja-JP" altLang="en-US" smtClean="0"/>
+              <a:rPr lang="ja-JP" altLang="en-US"/>
               <a:t>第 </a:t>
             </a:r>
             <a:r>
-              <a:rPr lang="en-US" altLang="ja-JP" smtClean="0"/>
+              <a:rPr lang="en-US" altLang="ja-JP"/>
               <a:t>4 </a:t>
             </a:r>
             <a:r>
-              <a:rPr lang="ja-JP" altLang="en-US" smtClean="0"/>
+              <a:rPr lang="ja-JP" altLang="en-US"/>
               <a:t>レベル</a:t>
             </a:r>
           </a:p>
           <a:p>
             <a:pPr lvl="4"/>
             <a:r>
-              <a:rPr lang="ja-JP" altLang="en-US" smtClean="0"/>
+              <a:rPr lang="ja-JP" altLang="en-US"/>
               <a:t>第 </a:t>
             </a:r>
             <a:r>
-              <a:rPr lang="en-US" altLang="ja-JP" smtClean="0"/>
+              <a:rPr lang="en-US" altLang="ja-JP"/>
               <a:t>5 </a:t>
             </a:r>
             <a:r>
-              <a:rPr lang="ja-JP" altLang="en-US" smtClean="0"/>
+              <a:rPr lang="ja-JP" altLang="en-US"/>
               <a:t>レベル</a:t>
             </a:r>
             <a:endParaRPr lang="en-US" dirty="0"/>
@@ -5552,7 +4656,7 @@
             <a:fld id="{B61BEF0D-F0BB-DE4B-95CE-6DB70DBA9567}" type="datetimeFigureOut">
               <a:rPr lang="en-US" dirty="0"/>
               <a:pPr/>
-              <a:t>11/21/2025</a:t>
+              <a:t>11/24/2025</a:t>
             </a:fld>
             <a:endParaRPr lang="en-US" dirty="0"/>
           </a:p>
@@ -5667,7 +4771,7 @@
           </a:lstStyle>
           <a:p>
             <a:r>
-              <a:rPr lang="ja-JP" altLang="en-US" smtClean="0"/>
+              <a:rPr lang="ja-JP" altLang="en-US"/>
               <a:t>マスター タイトルの書式設定</a:t>
             </a:r>
             <a:endParaRPr lang="en-US" dirty="0"/>
@@ -5789,7 +4893,7 @@
           <a:p>
             <a:pPr lvl="0"/>
             <a:r>
-              <a:rPr lang="ja-JP" altLang="en-US" smtClean="0"/>
+              <a:rPr lang="ja-JP" altLang="en-US"/>
               <a:t>マスター テキストの書式設定</a:t>
             </a:r>
           </a:p>
@@ -5813,7 +4917,7 @@
             <a:fld id="{B61BEF0D-F0BB-DE4B-95CE-6DB70DBA9567}" type="datetimeFigureOut">
               <a:rPr lang="en-US" dirty="0"/>
               <a:pPr/>
-              <a:t>11/21/2025</a:t>
+              <a:t>11/24/2025</a:t>
             </a:fld>
             <a:endParaRPr lang="en-US" dirty="0"/>
           </a:p>
@@ -5917,7 +5021,7 @@
           <a:lstStyle/>
           <a:p>
             <a:r>
-              <a:rPr lang="ja-JP" altLang="en-US" smtClean="0"/>
+              <a:rPr lang="ja-JP" altLang="en-US"/>
               <a:t>マスター タイトルの書式設定</a:t>
             </a:r>
             <a:endParaRPr lang="en-US" dirty="0"/>
@@ -5948,67 +5052,67 @@
           <a:p>
             <a:pPr lvl="0"/>
             <a:r>
-              <a:rPr lang="ja-JP" altLang="en-US" smtClean="0"/>
+              <a:rPr lang="ja-JP" altLang="en-US"/>
               <a:t>マスター テキストの書式設定</a:t>
             </a:r>
           </a:p>
           <a:p>
             <a:pPr lvl="1"/>
             <a:r>
-              <a:rPr lang="ja-JP" altLang="en-US" smtClean="0"/>
+              <a:rPr lang="ja-JP" altLang="en-US"/>
               <a:t>第 </a:t>
             </a:r>
             <a:r>
-              <a:rPr lang="en-US" altLang="ja-JP" smtClean="0"/>
+              <a:rPr lang="en-US" altLang="ja-JP"/>
               <a:t>2 </a:t>
             </a:r>
             <a:r>
-              <a:rPr lang="ja-JP" altLang="en-US" smtClean="0"/>
+              <a:rPr lang="ja-JP" altLang="en-US"/>
               <a:t>レベル</a:t>
             </a:r>
           </a:p>
           <a:p>
             <a:pPr lvl="2"/>
             <a:r>
-              <a:rPr lang="ja-JP" altLang="en-US" smtClean="0"/>
+              <a:rPr lang="ja-JP" altLang="en-US"/>
               <a:t>第 </a:t>
             </a:r>
             <a:r>
-              <a:rPr lang="en-US" altLang="ja-JP" smtClean="0"/>
+              <a:rPr lang="en-US" altLang="ja-JP"/>
               <a:t>3 </a:t>
             </a:r>
             <a:r>
-              <a:rPr lang="ja-JP" altLang="en-US" smtClean="0"/>
+              <a:rPr lang="ja-JP" altLang="en-US"/>
               <a:t>レベル</a:t>
             </a:r>
           </a:p>
           <a:p>
             <a:pPr lvl="3"/>
             <a:r>
-              <a:rPr lang="ja-JP" altLang="en-US" smtClean="0"/>
+              <a:rPr lang="ja-JP" altLang="en-US"/>
               <a:t>第 </a:t>
             </a:r>
             <a:r>
-              <a:rPr lang="en-US" altLang="ja-JP" smtClean="0"/>
+              <a:rPr lang="en-US" altLang="ja-JP"/>
               <a:t>4 </a:t>
             </a:r>
             <a:r>
-              <a:rPr lang="ja-JP" altLang="en-US" smtClean="0"/>
+              <a:rPr lang="ja-JP" altLang="en-US"/>
               <a:t>レベル</a:t>
             </a:r>
           </a:p>
           <a:p>
             <a:pPr lvl="4"/>
             <a:r>
-              <a:rPr lang="ja-JP" altLang="en-US" smtClean="0"/>
+              <a:rPr lang="ja-JP" altLang="en-US"/>
               <a:t>第 </a:t>
             </a:r>
             <a:r>
-              <a:rPr lang="en-US" altLang="ja-JP" smtClean="0"/>
+              <a:rPr lang="en-US" altLang="ja-JP"/>
               <a:t>5 </a:t>
             </a:r>
             <a:r>
-              <a:rPr lang="ja-JP" altLang="en-US" smtClean="0"/>
+              <a:rPr lang="ja-JP" altLang="en-US"/>
               <a:t>レベル</a:t>
             </a:r>
             <a:endParaRPr lang="en-US" dirty="0"/>
@@ -6039,67 +5143,67 @@
           <a:p>
             <a:pPr lvl="0"/>
             <a:r>
-              <a:rPr lang="ja-JP" altLang="en-US" smtClean="0"/>
+              <a:rPr lang="ja-JP" altLang="en-US"/>
               <a:t>マスター テキストの書式設定</a:t>
             </a:r>
           </a:p>
           <a:p>
             <a:pPr lvl="1"/>
             <a:r>
-              <a:rPr lang="ja-JP" altLang="en-US" smtClean="0"/>
+              <a:rPr lang="ja-JP" altLang="en-US"/>
               <a:t>第 </a:t>
             </a:r>
             <a:r>
-              <a:rPr lang="en-US" altLang="ja-JP" smtClean="0"/>
+              <a:rPr lang="en-US" altLang="ja-JP"/>
               <a:t>2 </a:t>
             </a:r>
             <a:r>
-              <a:rPr lang="ja-JP" altLang="en-US" smtClean="0"/>
+              <a:rPr lang="ja-JP" altLang="en-US"/>
               <a:t>レベル</a:t>
             </a:r>
           </a:p>
           <a:p>
             <a:pPr lvl="2"/>
             <a:r>
-              <a:rPr lang="ja-JP" altLang="en-US" smtClean="0"/>
+              <a:rPr lang="ja-JP" altLang="en-US"/>
               <a:t>第 </a:t>
             </a:r>
             <a:r>
-              <a:rPr lang="en-US" altLang="ja-JP" smtClean="0"/>
+              <a:rPr lang="en-US" altLang="ja-JP"/>
               <a:t>3 </a:t>
             </a:r>
             <a:r>
-              <a:rPr lang="ja-JP" altLang="en-US" smtClean="0"/>
+              <a:rPr lang="ja-JP" altLang="en-US"/>
               <a:t>レベル</a:t>
             </a:r>
           </a:p>
           <a:p>
             <a:pPr lvl="3"/>
             <a:r>
-              <a:rPr lang="ja-JP" altLang="en-US" smtClean="0"/>
+              <a:rPr lang="ja-JP" altLang="en-US"/>
               <a:t>第 </a:t>
             </a:r>
             <a:r>
-              <a:rPr lang="en-US" altLang="ja-JP" smtClean="0"/>
+              <a:rPr lang="en-US" altLang="ja-JP"/>
               <a:t>4 </a:t>
             </a:r>
             <a:r>
-              <a:rPr lang="ja-JP" altLang="en-US" smtClean="0"/>
+              <a:rPr lang="ja-JP" altLang="en-US"/>
               <a:t>レベル</a:t>
             </a:r>
           </a:p>
           <a:p>
             <a:pPr lvl="4"/>
             <a:r>
-              <a:rPr lang="ja-JP" altLang="en-US" smtClean="0"/>
+              <a:rPr lang="ja-JP" altLang="en-US"/>
               <a:t>第 </a:t>
             </a:r>
             <a:r>
-              <a:rPr lang="en-US" altLang="ja-JP" smtClean="0"/>
+              <a:rPr lang="en-US" altLang="ja-JP"/>
               <a:t>5 </a:t>
             </a:r>
             <a:r>
-              <a:rPr lang="ja-JP" altLang="en-US" smtClean="0"/>
+              <a:rPr lang="ja-JP" altLang="en-US"/>
               <a:t>レベル</a:t>
             </a:r>
             <a:endParaRPr lang="en-US" dirty="0"/>
@@ -6124,7 +5228,7 @@
             <a:fld id="{B61BEF0D-F0BB-DE4B-95CE-6DB70DBA9567}" type="datetimeFigureOut">
               <a:rPr lang="en-US" dirty="0"/>
               <a:pPr/>
-              <a:t>11/21/2025</a:t>
+              <a:t>11/24/2025</a:t>
             </a:fld>
             <a:endParaRPr lang="en-US" dirty="0"/>
           </a:p>
@@ -6232,7 +5336,7 @@
           </a:lstStyle>
           <a:p>
             <a:r>
-              <a:rPr lang="ja-JP" altLang="en-US" smtClean="0"/>
+              <a:rPr lang="ja-JP" altLang="en-US"/>
               <a:t>マスター タイトルの書式設定</a:t>
             </a:r>
             <a:endParaRPr lang="en-US" dirty="0"/>
@@ -6304,7 +5408,7 @@
           <a:p>
             <a:pPr lvl="0"/>
             <a:r>
-              <a:rPr lang="ja-JP" altLang="en-US" smtClean="0"/>
+              <a:rPr lang="ja-JP" altLang="en-US"/>
               <a:t>マスター テキストの書式設定</a:t>
             </a:r>
           </a:p>
@@ -6334,67 +5438,67 @@
           <a:p>
             <a:pPr lvl="0"/>
             <a:r>
-              <a:rPr lang="ja-JP" altLang="en-US" smtClean="0"/>
+              <a:rPr lang="ja-JP" altLang="en-US"/>
               <a:t>マスター テキストの書式設定</a:t>
             </a:r>
           </a:p>
           <a:p>
             <a:pPr lvl="1"/>
             <a:r>
-              <a:rPr lang="ja-JP" altLang="en-US" smtClean="0"/>
+              <a:rPr lang="ja-JP" altLang="en-US"/>
               <a:t>第 </a:t>
             </a:r>
             <a:r>
-              <a:rPr lang="en-US" altLang="ja-JP" smtClean="0"/>
+              <a:rPr lang="en-US" altLang="ja-JP"/>
               <a:t>2 </a:t>
             </a:r>
             <a:r>
-              <a:rPr lang="ja-JP" altLang="en-US" smtClean="0"/>
+              <a:rPr lang="ja-JP" altLang="en-US"/>
               <a:t>レベル</a:t>
             </a:r>
           </a:p>
           <a:p>
             <a:pPr lvl="2"/>
             <a:r>
-              <a:rPr lang="ja-JP" altLang="en-US" smtClean="0"/>
+              <a:rPr lang="ja-JP" altLang="en-US"/>
               <a:t>第 </a:t>
             </a:r>
             <a:r>
-              <a:rPr lang="en-US" altLang="ja-JP" smtClean="0"/>
+              <a:rPr lang="en-US" altLang="ja-JP"/>
               <a:t>3 </a:t>
             </a:r>
             <a:r>
-              <a:rPr lang="ja-JP" altLang="en-US" smtClean="0"/>
+              <a:rPr lang="ja-JP" altLang="en-US"/>
               <a:t>レベル</a:t>
             </a:r>
           </a:p>
           <a:p>
             <a:pPr lvl="3"/>
             <a:r>
-              <a:rPr lang="ja-JP" altLang="en-US" smtClean="0"/>
+              <a:rPr lang="ja-JP" altLang="en-US"/>
               <a:t>第 </a:t>
             </a:r>
             <a:r>
-              <a:rPr lang="en-US" altLang="ja-JP" smtClean="0"/>
+              <a:rPr lang="en-US" altLang="ja-JP"/>
               <a:t>4 </a:t>
             </a:r>
             <a:r>
-              <a:rPr lang="ja-JP" altLang="en-US" smtClean="0"/>
+              <a:rPr lang="ja-JP" altLang="en-US"/>
               <a:t>レベル</a:t>
             </a:r>
           </a:p>
           <a:p>
             <a:pPr lvl="4"/>
             <a:r>
-              <a:rPr lang="ja-JP" altLang="en-US" smtClean="0"/>
+              <a:rPr lang="ja-JP" altLang="en-US"/>
               <a:t>第 </a:t>
             </a:r>
             <a:r>
-              <a:rPr lang="en-US" altLang="ja-JP" smtClean="0"/>
+              <a:rPr lang="en-US" altLang="ja-JP"/>
               <a:t>5 </a:t>
             </a:r>
             <a:r>
-              <a:rPr lang="ja-JP" altLang="en-US" smtClean="0"/>
+              <a:rPr lang="ja-JP" altLang="en-US"/>
               <a:t>レベル</a:t>
             </a:r>
             <a:endParaRPr lang="en-US" dirty="0"/>
@@ -6466,7 +5570,7 @@
           <a:p>
             <a:pPr lvl="0"/>
             <a:r>
-              <a:rPr lang="ja-JP" altLang="en-US" smtClean="0"/>
+              <a:rPr lang="ja-JP" altLang="en-US"/>
               <a:t>マスター テキストの書式設定</a:t>
             </a:r>
           </a:p>
@@ -6496,67 +5600,67 @@
           <a:p>
             <a:pPr lvl="0"/>
             <a:r>
-              <a:rPr lang="ja-JP" altLang="en-US" smtClean="0"/>
+              <a:rPr lang="ja-JP" altLang="en-US"/>
               <a:t>マスター テキストの書式設定</a:t>
             </a:r>
           </a:p>
           <a:p>
             <a:pPr lvl="1"/>
             <a:r>
-              <a:rPr lang="ja-JP" altLang="en-US" smtClean="0"/>
+              <a:rPr lang="ja-JP" altLang="en-US"/>
               <a:t>第 </a:t>
             </a:r>
             <a:r>
-              <a:rPr lang="en-US" altLang="ja-JP" smtClean="0"/>
+              <a:rPr lang="en-US" altLang="ja-JP"/>
               <a:t>2 </a:t>
             </a:r>
             <a:r>
-              <a:rPr lang="ja-JP" altLang="en-US" smtClean="0"/>
+              <a:rPr lang="ja-JP" altLang="en-US"/>
               <a:t>レベル</a:t>
             </a:r>
           </a:p>
           <a:p>
             <a:pPr lvl="2"/>
             <a:r>
-              <a:rPr lang="ja-JP" altLang="en-US" smtClean="0"/>
+              <a:rPr lang="ja-JP" altLang="en-US"/>
               <a:t>第 </a:t>
             </a:r>
             <a:r>
-              <a:rPr lang="en-US" altLang="ja-JP" smtClean="0"/>
+              <a:rPr lang="en-US" altLang="ja-JP"/>
               <a:t>3 </a:t>
             </a:r>
             <a:r>
-              <a:rPr lang="ja-JP" altLang="en-US" smtClean="0"/>
+              <a:rPr lang="ja-JP" altLang="en-US"/>
               <a:t>レベル</a:t>
             </a:r>
           </a:p>
           <a:p>
             <a:pPr lvl="3"/>
             <a:r>
-              <a:rPr lang="ja-JP" altLang="en-US" smtClean="0"/>
+              <a:rPr lang="ja-JP" altLang="en-US"/>
               <a:t>第 </a:t>
             </a:r>
             <a:r>
-              <a:rPr lang="en-US" altLang="ja-JP" smtClean="0"/>
+              <a:rPr lang="en-US" altLang="ja-JP"/>
               <a:t>4 </a:t>
             </a:r>
             <a:r>
-              <a:rPr lang="ja-JP" altLang="en-US" smtClean="0"/>
+              <a:rPr lang="ja-JP" altLang="en-US"/>
               <a:t>レベル</a:t>
             </a:r>
           </a:p>
           <a:p>
             <a:pPr lvl="4"/>
             <a:r>
-              <a:rPr lang="ja-JP" altLang="en-US" smtClean="0"/>
+              <a:rPr lang="ja-JP" altLang="en-US"/>
               <a:t>第 </a:t>
             </a:r>
             <a:r>
-              <a:rPr lang="en-US" altLang="ja-JP" smtClean="0"/>
+              <a:rPr lang="en-US" altLang="ja-JP"/>
               <a:t>5 </a:t>
             </a:r>
             <a:r>
-              <a:rPr lang="ja-JP" altLang="en-US" smtClean="0"/>
+              <a:rPr lang="ja-JP" altLang="en-US"/>
               <a:t>レベル</a:t>
             </a:r>
             <a:endParaRPr lang="en-US" dirty="0"/>
@@ -6581,7 +5685,7 @@
             <a:fld id="{B61BEF0D-F0BB-DE4B-95CE-6DB70DBA9567}" type="datetimeFigureOut">
               <a:rPr lang="en-US" dirty="0"/>
               <a:pPr/>
-              <a:t>11/21/2025</a:t>
+              <a:t>11/24/2025</a:t>
             </a:fld>
             <a:endParaRPr lang="en-US" dirty="0"/>
           </a:p>
@@ -6685,7 +5789,7 @@
           <a:lstStyle/>
           <a:p>
             <a:r>
-              <a:rPr lang="ja-JP" altLang="en-US" smtClean="0"/>
+              <a:rPr lang="ja-JP" altLang="en-US"/>
               <a:t>マスター タイトルの書式設定</a:t>
             </a:r>
             <a:endParaRPr lang="en-US" dirty="0"/>
@@ -6710,7 +5814,7 @@
             <a:fld id="{B61BEF0D-F0BB-DE4B-95CE-6DB70DBA9567}" type="datetimeFigureOut">
               <a:rPr lang="en-US" dirty="0"/>
               <a:pPr/>
-              <a:t>11/21/2025</a:t>
+              <a:t>11/24/2025</a:t>
             </a:fld>
             <a:endParaRPr lang="en-US" dirty="0"/>
           </a:p>
@@ -6816,7 +5920,7 @@
             <a:fld id="{B61BEF0D-F0BB-DE4B-95CE-6DB70DBA9567}" type="datetimeFigureOut">
               <a:rPr lang="en-US" dirty="0"/>
               <a:pPr/>
-              <a:t>11/21/2025</a:t>
+              <a:t>11/24/2025</a:t>
             </a:fld>
             <a:endParaRPr lang="en-US" dirty="0"/>
           </a:p>
@@ -6931,7 +6035,7 @@
           </a:lstStyle>
           <a:p>
             <a:r>
-              <a:rPr lang="ja-JP" altLang="en-US" smtClean="0"/>
+              <a:rPr lang="ja-JP" altLang="en-US"/>
               <a:t>マスター タイトルの書式設定</a:t>
             </a:r>
             <a:endParaRPr lang="en-US" dirty="0"/>
@@ -6962,67 +6066,67 @@
           <a:p>
             <a:pPr lvl="0"/>
             <a:r>
-              <a:rPr lang="ja-JP" altLang="en-US" smtClean="0"/>
+              <a:rPr lang="ja-JP" altLang="en-US"/>
               <a:t>マスター テキストの書式設定</a:t>
             </a:r>
           </a:p>
           <a:p>
             <a:pPr lvl="1"/>
             <a:r>
-              <a:rPr lang="ja-JP" altLang="en-US" smtClean="0"/>
+              <a:rPr lang="ja-JP" altLang="en-US"/>
               <a:t>第 </a:t>
             </a:r>
             <a:r>
-              <a:rPr lang="en-US" altLang="ja-JP" smtClean="0"/>
+              <a:rPr lang="en-US" altLang="ja-JP"/>
               <a:t>2 </a:t>
             </a:r>
             <a:r>
-              <a:rPr lang="ja-JP" altLang="en-US" smtClean="0"/>
+              <a:rPr lang="ja-JP" altLang="en-US"/>
               <a:t>レベル</a:t>
             </a:r>
           </a:p>
           <a:p>
             <a:pPr lvl="2"/>
             <a:r>
-              <a:rPr lang="ja-JP" altLang="en-US" smtClean="0"/>
+              <a:rPr lang="ja-JP" altLang="en-US"/>
               <a:t>第 </a:t>
             </a:r>
             <a:r>
-              <a:rPr lang="en-US" altLang="ja-JP" smtClean="0"/>
+              <a:rPr lang="en-US" altLang="ja-JP"/>
               <a:t>3 </a:t>
             </a:r>
             <a:r>
-              <a:rPr lang="ja-JP" altLang="en-US" smtClean="0"/>
+              <a:rPr lang="ja-JP" altLang="en-US"/>
               <a:t>レベル</a:t>
             </a:r>
           </a:p>
           <a:p>
             <a:pPr lvl="3"/>
             <a:r>
-              <a:rPr lang="ja-JP" altLang="en-US" smtClean="0"/>
+              <a:rPr lang="ja-JP" altLang="en-US"/>
               <a:t>第 </a:t>
             </a:r>
             <a:r>
-              <a:rPr lang="en-US" altLang="ja-JP" smtClean="0"/>
+              <a:rPr lang="en-US" altLang="ja-JP"/>
               <a:t>4 </a:t>
             </a:r>
             <a:r>
-              <a:rPr lang="ja-JP" altLang="en-US" smtClean="0"/>
+              <a:rPr lang="ja-JP" altLang="en-US"/>
               <a:t>レベル</a:t>
             </a:r>
           </a:p>
           <a:p>
             <a:pPr lvl="4"/>
             <a:r>
-              <a:rPr lang="ja-JP" altLang="en-US" smtClean="0"/>
+              <a:rPr lang="ja-JP" altLang="en-US"/>
               <a:t>第 </a:t>
             </a:r>
             <a:r>
-              <a:rPr lang="en-US" altLang="ja-JP" smtClean="0"/>
+              <a:rPr lang="en-US" altLang="ja-JP"/>
               <a:t>5 </a:t>
             </a:r>
             <a:r>
-              <a:rPr lang="ja-JP" altLang="en-US" smtClean="0"/>
+              <a:rPr lang="ja-JP" altLang="en-US"/>
               <a:t>レベル</a:t>
             </a:r>
             <a:endParaRPr lang="en-US" dirty="0"/>
@@ -7090,7 +6194,7 @@
           <a:p>
             <a:pPr lvl="0"/>
             <a:r>
-              <a:rPr lang="ja-JP" altLang="en-US" smtClean="0"/>
+              <a:rPr lang="ja-JP" altLang="en-US"/>
               <a:t>マスター テキストの書式設定</a:t>
             </a:r>
           </a:p>
@@ -7114,7 +6218,7 @@
             <a:fld id="{B61BEF0D-F0BB-DE4B-95CE-6DB70DBA9567}" type="datetimeFigureOut">
               <a:rPr lang="en-US" dirty="0"/>
               <a:pPr/>
-              <a:t>11/21/2025</a:t>
+              <a:t>11/24/2025</a:t>
             </a:fld>
             <a:endParaRPr lang="en-US" dirty="0"/>
           </a:p>
@@ -7229,7 +6333,7 @@
           </a:lstStyle>
           <a:p>
             <a:r>
-              <a:rPr lang="ja-JP" altLang="en-US" smtClean="0"/>
+              <a:rPr lang="ja-JP" altLang="en-US"/>
               <a:t>マスター タイトルの書式設定</a:t>
             </a:r>
             <a:endParaRPr lang="en-US" dirty="0"/>
@@ -7316,7 +6420,7 @@
           </a:lstStyle>
           <a:p>
             <a:r>
-              <a:rPr lang="ja-JP" altLang="en-US" smtClean="0"/>
+              <a:rPr lang="ja-JP" altLang="en-US"/>
               <a:t>図を追加</a:t>
             </a:r>
             <a:endParaRPr lang="en-US" dirty="0"/>
@@ -7384,7 +6488,7 @@
           <a:p>
             <a:pPr lvl="0"/>
             <a:r>
-              <a:rPr lang="ja-JP" altLang="en-US" smtClean="0"/>
+              <a:rPr lang="ja-JP" altLang="en-US"/>
               <a:t>マスター テキストの書式設定</a:t>
             </a:r>
           </a:p>
@@ -7408,7 +6512,7 @@
             <a:fld id="{B61BEF0D-F0BB-DE4B-95CE-6DB70DBA9567}" type="datetimeFigureOut">
               <a:rPr lang="en-US" dirty="0"/>
               <a:pPr/>
-              <a:t>11/21/2025</a:t>
+              <a:t>11/24/2025</a:t>
             </a:fld>
             <a:endParaRPr lang="en-US" dirty="0"/>
           </a:p>
@@ -7718,7 +6822,7 @@
           <a:lstStyle/>
           <a:p>
             <a:r>
-              <a:rPr lang="ja-JP" altLang="en-US" smtClean="0"/>
+              <a:rPr lang="ja-JP" altLang="en-US"/>
               <a:t>マスター タイトルの書式設定</a:t>
             </a:r>
             <a:endParaRPr lang="en-US" dirty="0"/>
@@ -7752,67 +6856,67 @@
           <a:p>
             <a:pPr lvl="0"/>
             <a:r>
-              <a:rPr lang="ja-JP" altLang="en-US" smtClean="0"/>
+              <a:rPr lang="ja-JP" altLang="en-US"/>
               <a:t>マスター テキストの書式設定</a:t>
             </a:r>
           </a:p>
           <a:p>
             <a:pPr lvl="1"/>
             <a:r>
-              <a:rPr lang="ja-JP" altLang="en-US" smtClean="0"/>
+              <a:rPr lang="ja-JP" altLang="en-US"/>
               <a:t>第 </a:t>
             </a:r>
             <a:r>
-              <a:rPr lang="en-US" altLang="ja-JP" smtClean="0"/>
+              <a:rPr lang="en-US" altLang="ja-JP"/>
               <a:t>2 </a:t>
             </a:r>
             <a:r>
-              <a:rPr lang="ja-JP" altLang="en-US" smtClean="0"/>
+              <a:rPr lang="ja-JP" altLang="en-US"/>
               <a:t>レベル</a:t>
             </a:r>
           </a:p>
           <a:p>
             <a:pPr lvl="2"/>
             <a:r>
-              <a:rPr lang="ja-JP" altLang="en-US" smtClean="0"/>
+              <a:rPr lang="ja-JP" altLang="en-US"/>
               <a:t>第 </a:t>
             </a:r>
             <a:r>
-              <a:rPr lang="en-US" altLang="ja-JP" smtClean="0"/>
+              <a:rPr lang="en-US" altLang="ja-JP"/>
               <a:t>3 </a:t>
             </a:r>
             <a:r>
-              <a:rPr lang="ja-JP" altLang="en-US" smtClean="0"/>
+              <a:rPr lang="ja-JP" altLang="en-US"/>
               <a:t>レベル</a:t>
             </a:r>
           </a:p>
           <a:p>
             <a:pPr lvl="3"/>
             <a:r>
-              <a:rPr lang="ja-JP" altLang="en-US" smtClean="0"/>
+              <a:rPr lang="ja-JP" altLang="en-US"/>
               <a:t>第 </a:t>
             </a:r>
             <a:r>
-              <a:rPr lang="en-US" altLang="ja-JP" smtClean="0"/>
+              <a:rPr lang="en-US" altLang="ja-JP"/>
               <a:t>4 </a:t>
             </a:r>
             <a:r>
-              <a:rPr lang="ja-JP" altLang="en-US" smtClean="0"/>
+              <a:rPr lang="ja-JP" altLang="en-US"/>
               <a:t>レベル</a:t>
             </a:r>
           </a:p>
           <a:p>
             <a:pPr lvl="4"/>
             <a:r>
-              <a:rPr lang="ja-JP" altLang="en-US" smtClean="0"/>
+              <a:rPr lang="ja-JP" altLang="en-US"/>
               <a:t>第 </a:t>
             </a:r>
             <a:r>
-              <a:rPr lang="en-US" altLang="ja-JP" smtClean="0"/>
+              <a:rPr lang="en-US" altLang="ja-JP"/>
               <a:t>5 </a:t>
             </a:r>
             <a:r>
-              <a:rPr lang="ja-JP" altLang="en-US" smtClean="0"/>
+              <a:rPr lang="ja-JP" altLang="en-US"/>
               <a:t>レベル</a:t>
             </a:r>
             <a:endParaRPr lang="en-US" dirty="0"/>
@@ -7857,7 +6961,7 @@
             <a:fld id="{B61BEF0D-F0BB-DE4B-95CE-6DB70DBA9567}" type="datetimeFigureOut">
               <a:rPr lang="en-US" dirty="0"/>
               <a:pPr/>
-              <a:t>11/21/2025</a:t>
+              <a:t>11/24/2025</a:t>
             </a:fld>
             <a:endParaRPr lang="en-US" dirty="0"/>
           </a:p>
@@ -8414,202 +7518,9 @@
           </p:nvPr>
         </p:nvSpPr>
         <p:spPr>
-          <a:prstGeom prst="rect">
-            <a:avLst/>
-          </a:prstGeom>
-          <a:noFill/>
-          <a:ln>
-            <a:noFill/>
-          </a:ln>
-        </p:spPr>
-        <p:txBody>
-          <a:bodyPr spcFirstLastPara="1" wrap="square" lIns="91425" tIns="91425" rIns="91425" bIns="91425" anchor="b" anchorCtr="0">
-            <a:normAutofit/>
-          </a:bodyPr>
-          <a:lstStyle/>
-          <a:p>
-            <a:pPr lvl="0"/>
-            <a:r>
-              <a:rPr lang="ja" sz="4400"/>
-              <a:t>【</a:t>
-            </a:r>
-            <a:r>
-              <a:rPr lang="ja-JP" altLang="en-US" sz="4400"/>
-              <a:t>就職作品展</a:t>
-            </a:r>
-            <a:r>
-              <a:rPr lang="en-US" altLang="ja-JP" sz="4400" dirty="0"/>
-              <a:t>_</a:t>
-            </a:r>
-            <a:r>
-              <a:rPr lang="ja" sz="4400"/>
-              <a:t>振り返り】</a:t>
-            </a:r>
-          </a:p>
-        </p:txBody>
-      </p:sp>
-      <p:sp>
-        <p:nvSpPr>
-          <p:cNvPr id="55" name="Google Shape;55;p1"/>
-          <p:cNvSpPr txBox="1">
-            <a:spLocks noGrp="1"/>
-          </p:cNvSpPr>
-          <p:nvPr>
-            <p:ph type="subTitle" idx="1"/>
-          </p:nvPr>
-        </p:nvSpPr>
-        <p:spPr>
-          <a:prstGeom prst="rect">
-            <a:avLst/>
-          </a:prstGeom>
-          <a:noFill/>
-          <a:ln>
-            <a:noFill/>
-          </a:ln>
-        </p:spPr>
-        <p:txBody>
-          <a:bodyPr spcFirstLastPara="1" wrap="square" lIns="91425" tIns="91425" rIns="91425" bIns="91425" anchor="t" anchorCtr="0">
-            <a:normAutofit/>
-          </a:bodyPr>
-          <a:lstStyle/>
-          <a:p>
-            <a:pPr marL="0" lvl="0" indent="0" algn="ctr" rtl="0">
-              <a:lnSpc>
-                <a:spcPct val="100000"/>
-              </a:lnSpc>
-              <a:spcBef>
-                <a:spcPts val="0"/>
-              </a:spcBef>
-              <a:spcAft>
-                <a:spcPts val="0"/>
-              </a:spcAft>
-              <a:buSzPts val="2800"/>
-              <a:buNone/>
-            </a:pPr>
-            <a:r>
-              <a:rPr lang="ja-JP" altLang="en-US" dirty="0" smtClean="0">
-                <a:solidFill>
-                  <a:schemeClr val="tx1"/>
-                </a:solidFill>
-              </a:rPr>
-              <a:t>善原敬子</a:t>
-            </a:r>
-            <a:endParaRPr dirty="0">
-              <a:solidFill>
-                <a:schemeClr val="tx1"/>
-              </a:solidFill>
-            </a:endParaRPr>
-          </a:p>
-        </p:txBody>
-      </p:sp>
-    </p:spTree>
-  </p:cSld>
-  <p:clrMapOvr>
-    <a:masterClrMapping/>
-  </p:clrMapOvr>
-  <p:timing>
-    <p:tnLst>
-      <p:par>
-        <p:cTn id="1" dur="indefinite" restart="never" nodeType="tmRoot"/>
-      </p:par>
-    </p:tnLst>
-  </p:timing>
-</p:sld>
-</file>
-
-<file path=ppt/slides/slide10.xml><?xml version="1.0" encoding="utf-8"?>
-<p:sld xmlns:a="http://schemas.openxmlformats.org/drawingml/2006/main" xmlns:r="http://schemas.openxmlformats.org/officeDocument/2006/relationships" xmlns:p="http://schemas.openxmlformats.org/presentationml/2006/main">
-  <p:cSld>
-    <p:spTree>
-      <p:nvGrpSpPr>
-        <p:cNvPr id="1" name="Shape 96"/>
-        <p:cNvGrpSpPr/>
-        <p:nvPr/>
-      </p:nvGrpSpPr>
-      <p:grpSpPr>
-        <a:xfrm>
-          <a:off x="0" y="0"/>
-          <a:ext cx="0" cy="0"/>
-          <a:chOff x="0" y="0"/>
-          <a:chExt cx="0" cy="0"/>
-        </a:xfrm>
-      </p:grpSpPr>
-      <p:sp>
-        <p:nvSpPr>
-          <p:cNvPr id="97" name="Google Shape;97;p8"/>
-          <p:cNvSpPr txBox="1">
-            <a:spLocks noGrp="1"/>
-          </p:cNvSpPr>
-          <p:nvPr>
-            <p:ph type="title"/>
-          </p:nvPr>
-        </p:nvSpPr>
-        <p:spPr>
-          <a:prstGeom prst="rect">
-            <a:avLst/>
-          </a:prstGeom>
-          <a:noFill/>
-          <a:ln>
-            <a:noFill/>
-          </a:ln>
-        </p:spPr>
-        <p:txBody>
-          <a:bodyPr spcFirstLastPara="1" wrap="square" lIns="91425" tIns="91425" rIns="91425" bIns="91425" anchor="t" anchorCtr="0">
-            <a:noAutofit/>
-          </a:bodyPr>
-          <a:lstStyle/>
-          <a:p>
-            <a:pPr marL="0" lvl="0" indent="0" algn="l" rtl="0">
-              <a:lnSpc>
-                <a:spcPct val="100000"/>
-              </a:lnSpc>
-              <a:spcBef>
-                <a:spcPts val="0"/>
-              </a:spcBef>
-              <a:spcAft>
-                <a:spcPts val="0"/>
-              </a:spcAft>
-              <a:buSzPts val="2800"/>
-              <a:buNone/>
-            </a:pPr>
-            <a:r>
-              <a:rPr lang="ja" sz="2100" dirty="0"/>
-              <a:t>Q</a:t>
-            </a:r>
-            <a:r>
-              <a:rPr lang="en-US" altLang="ja-JP" sz="2100" dirty="0"/>
-              <a:t>8</a:t>
-            </a:r>
-            <a:r>
-              <a:rPr lang="ja" sz="2100" dirty="0"/>
-              <a:t>. </a:t>
-            </a:r>
-            <a:r>
-              <a:rPr lang="ja-JP" altLang="en-US" sz="2100" dirty="0"/>
-              <a:t>その他、今回の制作を通じて感じたことがあれば自由にどうぞ！</a:t>
-            </a:r>
-            <a:endParaRPr sz="2100" dirty="0"/>
-          </a:p>
-        </p:txBody>
-      </p:sp>
-      <p:sp>
-        <p:nvSpPr>
-          <p:cNvPr id="6" name="Google Shape;67;p3">
-            <a:extLst>
-              <a:ext uri="{FF2B5EF4-FFF2-40B4-BE49-F238E27FC236}">
-                <a16:creationId xmlns:a16="http://schemas.microsoft.com/office/drawing/2014/main" id="{10C9520A-3685-40AA-892F-2E788A66E791}"/>
-              </a:ext>
-            </a:extLst>
-          </p:cNvPr>
-          <p:cNvSpPr txBox="1">
-            <a:spLocks/>
-          </p:cNvSpPr>
-          <p:nvPr/>
-        </p:nvSpPr>
-        <p:spPr>
           <a:xfrm>
-            <a:off x="464100" y="1304875"/>
-            <a:ext cx="8520600" cy="3416400"/>
+            <a:off x="513159" y="1341120"/>
+            <a:ext cx="7213522" cy="887731"/>
           </a:xfrm>
           <a:prstGeom prst="rect">
             <a:avLst/>
@@ -8620,11 +7531,61 @@
           </a:ln>
         </p:spPr>
         <p:txBody>
+          <a:bodyPr spcFirstLastPara="1" wrap="square" lIns="91425" tIns="91425" rIns="91425" bIns="91425" anchor="b" anchorCtr="0">
+            <a:normAutofit/>
+          </a:bodyPr>
+          <a:lstStyle/>
+          <a:p>
+            <a:pPr lvl="0"/>
+            <a:r>
+              <a:rPr lang="ja" sz="4400" dirty="0"/>
+              <a:t>【</a:t>
+            </a:r>
+            <a:r>
+              <a:rPr lang="ja-JP" altLang="en-US" sz="4400" dirty="0"/>
+              <a:t>就職作品展</a:t>
+            </a:r>
+            <a:r>
+              <a:rPr lang="en-US" altLang="ja-JP" sz="4400" dirty="0"/>
+              <a:t>_</a:t>
+            </a:r>
+            <a:r>
+              <a:rPr lang="ja" sz="4400" dirty="0"/>
+              <a:t>振り返り】</a:t>
+            </a:r>
+          </a:p>
+        </p:txBody>
+      </p:sp>
+      <p:sp>
+        <p:nvSpPr>
+          <p:cNvPr id="55" name="Google Shape;55;p1"/>
+          <p:cNvSpPr txBox="1">
+            <a:spLocks noGrp="1"/>
+          </p:cNvSpPr>
+          <p:nvPr>
+            <p:ph type="subTitle" idx="1"/>
+          </p:nvPr>
+        </p:nvSpPr>
+        <p:spPr>
+          <a:xfrm>
+            <a:off x="1259919" y="2571750"/>
+            <a:ext cx="4800600" cy="1460500"/>
+          </a:xfrm>
+          <a:prstGeom prst="rect">
+            <a:avLst/>
+          </a:prstGeom>
+          <a:noFill/>
+          <a:ln>
+            <a:noFill/>
+          </a:ln>
+        </p:spPr>
+        <p:txBody>
           <a:bodyPr spcFirstLastPara="1" wrap="square" lIns="91425" tIns="91425" rIns="91425" bIns="91425" anchor="t" anchorCtr="0">
             <a:normAutofit/>
           </a:bodyPr>
-          <a:lstStyle>
-            <a:defPPr marR="0" lvl="0" algn="l" rtl="0">
+          <a:lstStyle/>
+          <a:p>
+            <a:pPr marL="0" lvl="0" indent="0" algn="ctr" rtl="0">
               <a:lnSpc>
                 <a:spcPct val="100000"/>
               </a:lnSpc>
@@ -8634,315 +7595,26 @@
               <a:spcAft>
                 <a:spcPts val="0"/>
               </a:spcAft>
-            </a:defPPr>
-            <a:lvl1pPr marL="457200" marR="0" lvl="0" indent="-342900" algn="l" rtl="0">
-              <a:lnSpc>
-                <a:spcPct val="115000"/>
-              </a:lnSpc>
-              <a:spcBef>
-                <a:spcPts val="0"/>
-              </a:spcBef>
-              <a:spcAft>
-                <a:spcPts val="0"/>
-              </a:spcAft>
-              <a:buClr>
-                <a:schemeClr val="dk2"/>
-              </a:buClr>
-              <a:buSzPts val="1800"/>
-              <a:buFont typeface="Arial"/>
-              <a:buChar char="●"/>
-              <a:defRPr sz="1800" b="0" i="0" u="none" strike="noStrike" cap="none">
-                <a:solidFill>
-                  <a:schemeClr val="dk2"/>
-                </a:solidFill>
-                <a:latin typeface="Arial"/>
-                <a:ea typeface="Arial"/>
-                <a:cs typeface="Arial"/>
-                <a:sym typeface="Arial"/>
-              </a:defRPr>
-            </a:lvl1pPr>
-            <a:lvl2pPr marL="914400" marR="0" lvl="1" indent="-317500" algn="l" rtl="0">
-              <a:lnSpc>
-                <a:spcPct val="115000"/>
-              </a:lnSpc>
-              <a:spcBef>
-                <a:spcPts val="0"/>
-              </a:spcBef>
-              <a:spcAft>
-                <a:spcPts val="0"/>
-              </a:spcAft>
-              <a:buClr>
-                <a:schemeClr val="dk2"/>
-              </a:buClr>
-              <a:buSzPts val="1400"/>
-              <a:buFont typeface="Arial"/>
-              <a:buChar char="○"/>
-              <a:defRPr sz="1400" b="0" i="0" u="none" strike="noStrike" cap="none">
-                <a:solidFill>
-                  <a:schemeClr val="dk2"/>
-                </a:solidFill>
-                <a:latin typeface="Arial"/>
-                <a:ea typeface="Arial"/>
-                <a:cs typeface="Arial"/>
-                <a:sym typeface="Arial"/>
-              </a:defRPr>
-            </a:lvl2pPr>
-            <a:lvl3pPr marL="1371600" marR="0" lvl="2" indent="-317500" algn="l" rtl="0">
-              <a:lnSpc>
-                <a:spcPct val="115000"/>
-              </a:lnSpc>
-              <a:spcBef>
-                <a:spcPts val="0"/>
-              </a:spcBef>
-              <a:spcAft>
-                <a:spcPts val="0"/>
-              </a:spcAft>
-              <a:buClr>
-                <a:schemeClr val="dk2"/>
-              </a:buClr>
-              <a:buSzPts val="1400"/>
-              <a:buFont typeface="Arial"/>
-              <a:buChar char="■"/>
-              <a:defRPr sz="1400" b="0" i="0" u="none" strike="noStrike" cap="none">
-                <a:solidFill>
-                  <a:schemeClr val="dk2"/>
-                </a:solidFill>
-                <a:latin typeface="Arial"/>
-                <a:ea typeface="Arial"/>
-                <a:cs typeface="Arial"/>
-                <a:sym typeface="Arial"/>
-              </a:defRPr>
-            </a:lvl3pPr>
-            <a:lvl4pPr marL="1828800" marR="0" lvl="3" indent="-317500" algn="l" rtl="0">
-              <a:lnSpc>
-                <a:spcPct val="115000"/>
-              </a:lnSpc>
-              <a:spcBef>
-                <a:spcPts val="0"/>
-              </a:spcBef>
-              <a:spcAft>
-                <a:spcPts val="0"/>
-              </a:spcAft>
-              <a:buClr>
-                <a:schemeClr val="dk2"/>
-              </a:buClr>
-              <a:buSzPts val="1400"/>
-              <a:buFont typeface="Arial"/>
-              <a:buChar char="●"/>
-              <a:defRPr sz="1400" b="0" i="0" u="none" strike="noStrike" cap="none">
-                <a:solidFill>
-                  <a:schemeClr val="dk2"/>
-                </a:solidFill>
-                <a:latin typeface="Arial"/>
-                <a:ea typeface="Arial"/>
-                <a:cs typeface="Arial"/>
-                <a:sym typeface="Arial"/>
-              </a:defRPr>
-            </a:lvl4pPr>
-            <a:lvl5pPr marL="2286000" marR="0" lvl="4" indent="-317500" algn="l" rtl="0">
-              <a:lnSpc>
-                <a:spcPct val="115000"/>
-              </a:lnSpc>
-              <a:spcBef>
-                <a:spcPts val="0"/>
-              </a:spcBef>
-              <a:spcAft>
-                <a:spcPts val="0"/>
-              </a:spcAft>
-              <a:buClr>
-                <a:schemeClr val="dk2"/>
-              </a:buClr>
-              <a:buSzPts val="1400"/>
-              <a:buFont typeface="Arial"/>
-              <a:buChar char="○"/>
-              <a:defRPr sz="1400" b="0" i="0" u="none" strike="noStrike" cap="none">
-                <a:solidFill>
-                  <a:schemeClr val="dk2"/>
-                </a:solidFill>
-                <a:latin typeface="Arial"/>
-                <a:ea typeface="Arial"/>
-                <a:cs typeface="Arial"/>
-                <a:sym typeface="Arial"/>
-              </a:defRPr>
-            </a:lvl5pPr>
-            <a:lvl6pPr marL="2743200" marR="0" lvl="5" indent="-317500" algn="l" rtl="0">
-              <a:lnSpc>
-                <a:spcPct val="115000"/>
-              </a:lnSpc>
-              <a:spcBef>
-                <a:spcPts val="0"/>
-              </a:spcBef>
-              <a:spcAft>
-                <a:spcPts val="0"/>
-              </a:spcAft>
-              <a:buClr>
-                <a:schemeClr val="dk2"/>
-              </a:buClr>
-              <a:buSzPts val="1400"/>
-              <a:buFont typeface="Arial"/>
-              <a:buChar char="■"/>
-              <a:defRPr sz="1400" b="0" i="0" u="none" strike="noStrike" cap="none">
-                <a:solidFill>
-                  <a:schemeClr val="dk2"/>
-                </a:solidFill>
-                <a:latin typeface="Arial"/>
-                <a:ea typeface="Arial"/>
-                <a:cs typeface="Arial"/>
-                <a:sym typeface="Arial"/>
-              </a:defRPr>
-            </a:lvl6pPr>
-            <a:lvl7pPr marL="3200400" marR="0" lvl="6" indent="-317500" algn="l" rtl="0">
-              <a:lnSpc>
-                <a:spcPct val="115000"/>
-              </a:lnSpc>
-              <a:spcBef>
-                <a:spcPts val="0"/>
-              </a:spcBef>
-              <a:spcAft>
-                <a:spcPts val="0"/>
-              </a:spcAft>
-              <a:buClr>
-                <a:schemeClr val="dk2"/>
-              </a:buClr>
-              <a:buSzPts val="1400"/>
-              <a:buFont typeface="Arial"/>
-              <a:buChar char="●"/>
-              <a:defRPr sz="1400" b="0" i="0" u="none" strike="noStrike" cap="none">
-                <a:solidFill>
-                  <a:schemeClr val="dk2"/>
-                </a:solidFill>
-                <a:latin typeface="Arial"/>
-                <a:ea typeface="Arial"/>
-                <a:cs typeface="Arial"/>
-                <a:sym typeface="Arial"/>
-              </a:defRPr>
-            </a:lvl7pPr>
-            <a:lvl8pPr marL="3657600" marR="0" lvl="7" indent="-317500" algn="l" rtl="0">
-              <a:lnSpc>
-                <a:spcPct val="115000"/>
-              </a:lnSpc>
-              <a:spcBef>
-                <a:spcPts val="0"/>
-              </a:spcBef>
-              <a:spcAft>
-                <a:spcPts val="0"/>
-              </a:spcAft>
-              <a:buClr>
-                <a:schemeClr val="dk2"/>
-              </a:buClr>
-              <a:buSzPts val="1400"/>
-              <a:buFont typeface="Arial"/>
-              <a:buChar char="○"/>
-              <a:defRPr sz="1400" b="0" i="0" u="none" strike="noStrike" cap="none">
-                <a:solidFill>
-                  <a:schemeClr val="dk2"/>
-                </a:solidFill>
-                <a:latin typeface="Arial"/>
-                <a:ea typeface="Arial"/>
-                <a:cs typeface="Arial"/>
-                <a:sym typeface="Arial"/>
-              </a:defRPr>
-            </a:lvl8pPr>
-            <a:lvl9pPr marL="4114800" marR="0" lvl="8" indent="-317500" algn="l" rtl="0">
-              <a:lnSpc>
-                <a:spcPct val="115000"/>
-              </a:lnSpc>
-              <a:spcBef>
-                <a:spcPts val="0"/>
-              </a:spcBef>
-              <a:spcAft>
-                <a:spcPts val="0"/>
-              </a:spcAft>
-              <a:buClr>
-                <a:schemeClr val="dk2"/>
-              </a:buClr>
-              <a:buSzPts val="1400"/>
-              <a:buFont typeface="Arial"/>
-              <a:buChar char="■"/>
-              <a:defRPr sz="1400" b="0" i="0" u="none" strike="noStrike" cap="none">
-                <a:solidFill>
-                  <a:schemeClr val="dk2"/>
-                </a:solidFill>
-                <a:latin typeface="Arial"/>
-                <a:ea typeface="Arial"/>
-                <a:cs typeface="Arial"/>
-                <a:sym typeface="Arial"/>
-              </a:defRPr>
-            </a:lvl9pPr>
-          </a:lstStyle>
-          <a:p>
-            <a:pPr marL="0" indent="0">
-              <a:spcBef>
-                <a:spcPts val="1200"/>
-              </a:spcBef>
-              <a:buFont typeface="Arial"/>
+              <a:buSzPts val="2800"/>
               <a:buNone/>
             </a:pPr>
             <a:r>
-              <a:rPr lang="ja" altLang="en-US"/>
-              <a:t>・</a:t>
-            </a:r>
-          </a:p>
-          <a:p>
-            <a:pPr marL="0" indent="0">
-              <a:spcBef>
-                <a:spcPts val="1200"/>
-              </a:spcBef>
-              <a:buFont typeface="Arial"/>
-              <a:buNone/>
-            </a:pPr>
-            <a:endParaRPr lang="ja" altLang="en-US"/>
-          </a:p>
-          <a:p>
-            <a:pPr marL="0" indent="0">
-              <a:spcBef>
-                <a:spcPts val="1200"/>
-              </a:spcBef>
-              <a:buFont typeface="Arial"/>
-              <a:buNone/>
-            </a:pPr>
-            <a:r>
-              <a:rPr lang="ja" altLang="en-US"/>
-              <a:t>・</a:t>
-            </a:r>
-          </a:p>
-          <a:p>
-            <a:pPr marL="0" indent="0">
-              <a:spcBef>
-                <a:spcPts val="1200"/>
-              </a:spcBef>
-              <a:spcAft>
-                <a:spcPts val="1200"/>
-              </a:spcAft>
-              <a:buFont typeface="Arial"/>
-              <a:buNone/>
-            </a:pPr>
-            <a:endParaRPr lang="ja" altLang="en-US"/>
-          </a:p>
-          <a:p>
-            <a:pPr marL="0" indent="0">
-              <a:spcBef>
-                <a:spcPts val="1200"/>
-              </a:spcBef>
-              <a:spcAft>
-                <a:spcPts val="1200"/>
-              </a:spcAft>
-              <a:buFont typeface="Arial"/>
-              <a:buNone/>
-            </a:pPr>
-            <a:r>
-              <a:rPr lang="ja" altLang="en-US"/>
-              <a:t>・</a:t>
-            </a:r>
+              <a:rPr lang="ja-JP" altLang="en-US" sz="2400" dirty="0">
+                <a:solidFill>
+                  <a:schemeClr val="tx1"/>
+                </a:solidFill>
+              </a:rPr>
+              <a:t>善原敬子</a:t>
+            </a:r>
+            <a:endParaRPr sz="2400" dirty="0">
+              <a:solidFill>
+                <a:schemeClr val="tx1"/>
+              </a:solidFill>
+            </a:endParaRPr>
           </a:p>
         </p:txBody>
       </p:sp>
     </p:spTree>
-    <p:extLst>
-      <p:ext uri="{BB962C8B-B14F-4D97-AF65-F5344CB8AC3E}">
-        <p14:creationId xmlns:p14="http://schemas.microsoft.com/office/powerpoint/2010/main" val="2458318810"/>
-      </p:ext>
-    </p:extLst>
   </p:cSld>
   <p:clrMapOvr>
     <a:masterClrMapping/>
@@ -8996,276 +7668,6 @@
               <a:buSzPct val="111111"/>
             </a:pPr>
             <a:r>
-              <a:rPr lang="ja-JP" altLang="en-US" sz="2200"/>
-              <a:t>はじめに</a:t>
-            </a:r>
-            <a:endParaRPr sz="2200"/>
-          </a:p>
-        </p:txBody>
-      </p:sp>
-      <p:sp>
-        <p:nvSpPr>
-          <p:cNvPr id="67" name="Google Shape;67;p3"/>
-          <p:cNvSpPr txBox="1">
-            <a:spLocks noGrp="1"/>
-          </p:cNvSpPr>
-          <p:nvPr>
-            <p:ph type="body" idx="1"/>
-          </p:nvPr>
-        </p:nvSpPr>
-        <p:spPr>
-          <a:prstGeom prst="rect">
-            <a:avLst/>
-          </a:prstGeom>
-          <a:noFill/>
-          <a:ln>
-            <a:noFill/>
-          </a:ln>
-        </p:spPr>
-        <p:txBody>
-          <a:bodyPr spcFirstLastPara="1" wrap="square" lIns="91425" tIns="91425" rIns="91425" bIns="91425" anchor="t" anchorCtr="0">
-            <a:normAutofit/>
-          </a:bodyPr>
-          <a:lstStyle/>
-          <a:p>
-            <a:pPr marL="0" lvl="0" indent="0">
-              <a:spcBef>
-                <a:spcPts val="1200"/>
-              </a:spcBef>
-              <a:buNone/>
-            </a:pPr>
-            <a:r>
-              <a:rPr lang="ja"/>
-              <a:t>・</a:t>
-            </a:r>
-            <a:r>
-              <a:rPr lang="ja-JP" altLang="en-US"/>
-              <a:t>このシートの作成目的は、自分の成長を可視化</a:t>
-            </a:r>
-            <a:r>
-              <a:rPr lang="en-US" altLang="ja-JP"/>
-              <a:t>/</a:t>
-            </a:r>
-            <a:r>
-              <a:rPr lang="ja-JP" altLang="en-US"/>
-              <a:t>言語化することです。</a:t>
-            </a:r>
-            <a:endParaRPr lang="en-US" altLang="ja-JP"/>
-          </a:p>
-          <a:p>
-            <a:pPr marL="0" lvl="0" indent="0">
-              <a:spcBef>
-                <a:spcPts val="1200"/>
-              </a:spcBef>
-              <a:buNone/>
-            </a:pPr>
-            <a:r>
-              <a:rPr lang="ja-JP" altLang="en-US"/>
-              <a:t>　今後の就職活動をはじめ、人に伝えられるように纏めておきましょう。</a:t>
-            </a:r>
-            <a:endParaRPr lang="en-US" altLang="ja-JP"/>
-          </a:p>
-          <a:p>
-            <a:pPr marL="0" lvl="0" indent="0">
-              <a:spcBef>
-                <a:spcPts val="1200"/>
-              </a:spcBef>
-              <a:buNone/>
-            </a:pPr>
-            <a:r>
-              <a:rPr lang="ja-JP" altLang="en-US"/>
-              <a:t>　＜ </a:t>
-            </a:r>
-            <a:r>
-              <a:rPr lang="en-US" altLang="ja"/>
-              <a:t>Plan</a:t>
-            </a:r>
-            <a:r>
-              <a:rPr lang="ja" altLang="en-US"/>
-              <a:t>（</a:t>
-            </a:r>
-            <a:r>
-              <a:rPr lang="ja-JP" altLang="en-US"/>
-              <a:t>計画）、</a:t>
-            </a:r>
-            <a:r>
-              <a:rPr lang="en-US" altLang="ja"/>
-              <a:t>Do</a:t>
-            </a:r>
-            <a:r>
-              <a:rPr lang="ja" altLang="en-US"/>
-              <a:t>（</a:t>
-            </a:r>
-            <a:r>
-              <a:rPr lang="ja-JP" altLang="en-US"/>
-              <a:t>実行）、</a:t>
-            </a:r>
-            <a:r>
-              <a:rPr lang="en-US" altLang="ja" b="1" u="sng">
-                <a:solidFill>
-                  <a:srgbClr val="FF0000"/>
-                </a:solidFill>
-              </a:rPr>
-              <a:t>Check</a:t>
-            </a:r>
-            <a:r>
-              <a:rPr lang="ja" altLang="en-US" b="1" u="sng">
-                <a:solidFill>
-                  <a:srgbClr val="FF0000"/>
-                </a:solidFill>
-              </a:rPr>
-              <a:t>（</a:t>
-            </a:r>
-            <a:r>
-              <a:rPr lang="ja-JP" altLang="en-US" b="1" u="sng">
-                <a:solidFill>
-                  <a:srgbClr val="FF0000"/>
-                </a:solidFill>
-              </a:rPr>
-              <a:t>評価）</a:t>
-            </a:r>
-            <a:r>
-              <a:rPr lang="ja-JP" altLang="en-US"/>
-              <a:t>、</a:t>
-            </a:r>
-            <a:r>
-              <a:rPr lang="en-US" altLang="ja"/>
-              <a:t>Action</a:t>
-            </a:r>
-            <a:r>
-              <a:rPr lang="ja" altLang="en-US"/>
-              <a:t>（</a:t>
-            </a:r>
-            <a:r>
-              <a:rPr lang="ja-JP" altLang="en-US"/>
-              <a:t>改善）＞</a:t>
-            </a:r>
-            <a:endParaRPr/>
-          </a:p>
-          <a:p>
-            <a:pPr marL="0" lvl="0" indent="0" algn="l" rtl="0">
-              <a:lnSpc>
-                <a:spcPct val="115000"/>
-              </a:lnSpc>
-              <a:spcBef>
-                <a:spcPts val="1200"/>
-              </a:spcBef>
-              <a:spcAft>
-                <a:spcPts val="0"/>
-              </a:spcAft>
-              <a:buSzPts val="1800"/>
-              <a:buNone/>
-            </a:pPr>
-            <a:r>
-              <a:rPr lang="ja"/>
-              <a:t>・</a:t>
-            </a:r>
-            <a:r>
-              <a:rPr lang="ja-JP" altLang="en-US"/>
-              <a:t>各項目（シート）、</a:t>
-            </a:r>
-            <a:r>
-              <a:rPr lang="en-US" altLang="ja-JP"/>
-              <a:t>3</a:t>
-            </a:r>
-            <a:r>
-              <a:rPr lang="ja-JP" altLang="en-US"/>
-              <a:t>つ以上は記載しましょう。</a:t>
-            </a:r>
-            <a:endParaRPr/>
-          </a:p>
-          <a:p>
-            <a:pPr marL="0" lvl="0" indent="0" algn="l" rtl="0">
-              <a:lnSpc>
-                <a:spcPct val="115000"/>
-              </a:lnSpc>
-              <a:spcBef>
-                <a:spcPts val="1200"/>
-              </a:spcBef>
-              <a:spcAft>
-                <a:spcPts val="1200"/>
-              </a:spcAft>
-              <a:buSzPts val="1800"/>
-              <a:buNone/>
-            </a:pPr>
-            <a:r>
-              <a:rPr lang="ja"/>
-              <a:t>・</a:t>
-            </a:r>
-            <a:r>
-              <a:rPr lang="ja-JP" altLang="en-US"/>
-              <a:t>記載するスペースが少なければ、ページを増やしてください。</a:t>
-            </a:r>
-            <a:endParaRPr/>
-          </a:p>
-        </p:txBody>
-      </p:sp>
-    </p:spTree>
-    <p:extLst>
-      <p:ext uri="{BB962C8B-B14F-4D97-AF65-F5344CB8AC3E}">
-        <p14:creationId xmlns:p14="http://schemas.microsoft.com/office/powerpoint/2010/main" val="3227380457"/>
-      </p:ext>
-    </p:extLst>
-  </p:cSld>
-  <p:clrMapOvr>
-    <a:masterClrMapping/>
-  </p:clrMapOvr>
-  <p:timing>
-    <p:tnLst>
-      <p:par>
-        <p:cTn id="1" dur="indefinite" restart="never" nodeType="tmRoot"/>
-      </p:par>
-    </p:tnLst>
-  </p:timing>
-</p:sld>
-</file>
-
-<file path=ppt/slides/slide3.xml><?xml version="1.0" encoding="utf-8"?>
-<p:sld xmlns:a="http://schemas.openxmlformats.org/drawingml/2006/main" xmlns:r="http://schemas.openxmlformats.org/officeDocument/2006/relationships" xmlns:p="http://schemas.openxmlformats.org/presentationml/2006/main">
-  <p:cSld>
-    <p:spTree>
-      <p:nvGrpSpPr>
-        <p:cNvPr id="1" name="Shape 65"/>
-        <p:cNvGrpSpPr/>
-        <p:nvPr/>
-      </p:nvGrpSpPr>
-      <p:grpSpPr>
-        <a:xfrm>
-          <a:off x="0" y="0"/>
-          <a:ext cx="0" cy="0"/>
-          <a:chOff x="0" y="0"/>
-          <a:chExt cx="0" cy="0"/>
-        </a:xfrm>
-      </p:grpSpPr>
-      <p:sp>
-        <p:nvSpPr>
-          <p:cNvPr id="66" name="Google Shape;66;p3"/>
-          <p:cNvSpPr txBox="1">
-            <a:spLocks noGrp="1"/>
-          </p:cNvSpPr>
-          <p:nvPr>
-            <p:ph type="title"/>
-          </p:nvPr>
-        </p:nvSpPr>
-        <p:spPr>
-          <a:prstGeom prst="rect">
-            <a:avLst/>
-          </a:prstGeom>
-          <a:noFill/>
-          <a:ln>
-            <a:noFill/>
-          </a:ln>
-        </p:spPr>
-        <p:txBody>
-          <a:bodyPr spcFirstLastPara="1" wrap="square" lIns="91425" tIns="91425" rIns="91425" bIns="91425" anchor="t" anchorCtr="0">
-            <a:noAutofit/>
-          </a:bodyPr>
-          <a:lstStyle/>
-          <a:p>
-            <a:pPr lvl="0">
-              <a:buSzPct val="111111"/>
-            </a:pPr>
-            <a:r>
               <a:rPr lang="ja" sz="2200" dirty="0"/>
               <a:t>Q</a:t>
             </a:r>
@@ -9300,7 +7702,7 @@
           <p:nvPr>
             <p:extLst>
               <p:ext uri="{D42A27DB-BD31-4B8C-83A1-F6EECF244321}">
-                <p14:modId xmlns:p14="http://schemas.microsoft.com/office/powerpoint/2010/main" val="347203405"/>
+                <p14:modId xmlns:p14="http://schemas.microsoft.com/office/powerpoint/2010/main" val="3803129"/>
               </p:ext>
             </p:extLst>
           </p:nvPr>
@@ -9400,10 +7802,9 @@
                     </a:p>
                     <a:p>
                       <a:r>
-                        <a:rPr kumimoji="1" lang="ja-JP" altLang="en-US" dirty="0" smtClean="0"/>
+                        <a:rPr kumimoji="1" lang="ja-JP" altLang="en-US" dirty="0"/>
                         <a:t>爽快感を持たせたい</a:t>
                       </a:r>
-                      <a:endParaRPr kumimoji="1" lang="ja-JP" altLang="en-US" dirty="0"/>
                     </a:p>
                   </a:txBody>
                   <a:tcPr/>
@@ -9413,7 +7814,14 @@
                     <a:bodyPr/>
                     <a:lstStyle/>
                     <a:p>
-                      <a:endParaRPr kumimoji="1" lang="ja-JP" altLang="en-US" dirty="0"/>
+                      <a:endParaRPr kumimoji="1" lang="en-US" altLang="ja-JP" dirty="0"/>
+                    </a:p>
+                    <a:p>
+                      <a:r>
+                        <a:rPr kumimoji="1" lang="ja-JP" altLang="en-US" dirty="0"/>
+                        <a:t>回避時のアニメーションと速度を調整して実装</a:t>
+                      </a:r>
+                      <a:endParaRPr kumimoji="1" lang="en-US" altLang="ja-JP" dirty="0"/>
                     </a:p>
                   </a:txBody>
                   <a:tcPr/>
@@ -9434,10 +7842,9 @@
                     </a:p>
                     <a:p>
                       <a:r>
-                        <a:rPr kumimoji="1" lang="ja-JP" altLang="en-US" dirty="0" smtClean="0"/>
+                        <a:rPr kumimoji="1" lang="ja-JP" altLang="en-US" dirty="0"/>
                         <a:t>パリィだけでクリアするゲームを作りたい</a:t>
                       </a:r>
-                      <a:endParaRPr kumimoji="1" lang="ja-JP" altLang="en-US" dirty="0"/>
                     </a:p>
                   </a:txBody>
                   <a:tcPr/>
@@ -9447,7 +7854,13 @@
                     <a:bodyPr/>
                     <a:lstStyle/>
                     <a:p>
-                      <a:endParaRPr kumimoji="1" lang="ja-JP" altLang="en-US" dirty="0"/>
+                      <a:endParaRPr kumimoji="1" lang="en-US" altLang="ja-JP" dirty="0"/>
+                    </a:p>
+                    <a:p>
+                      <a:r>
+                        <a:rPr kumimoji="1" lang="ja-JP" altLang="en-US" dirty="0"/>
+                        <a:t>パリィは実装済み</a:t>
+                      </a:r>
                     </a:p>
                   </a:txBody>
                   <a:tcPr/>
@@ -9467,7 +7880,10 @@
                       <a:endParaRPr kumimoji="1" lang="en-US" altLang="ja-JP" dirty="0"/>
                     </a:p>
                     <a:p>
-                      <a:endParaRPr kumimoji="1" lang="ja-JP" altLang="en-US" dirty="0"/>
+                      <a:r>
+                        <a:rPr kumimoji="1" lang="ja-JP" altLang="en-US" dirty="0"/>
+                        <a:t>アクション苦手な人でも楽しめるゲームにしたい</a:t>
+                      </a:r>
                     </a:p>
                   </a:txBody>
                   <a:tcPr/>
@@ -9477,7 +7893,21 @@
                     <a:bodyPr/>
                     <a:lstStyle/>
                     <a:p>
-                      <a:endParaRPr kumimoji="1" lang="ja-JP" altLang="en-US"/>
+                      <a:endParaRPr kumimoji="1" lang="en-US" altLang="ja-JP" dirty="0"/>
+                    </a:p>
+                    <a:p>
+                      <a:r>
+                        <a:rPr kumimoji="1" lang="ja-JP" altLang="en-US" dirty="0"/>
+                        <a:t>敵のレベルデザインなどを調整</a:t>
+                      </a:r>
+                      <a:r>
+                        <a:rPr kumimoji="1" lang="en-US" altLang="ja-JP" dirty="0"/>
+                        <a:t>&amp;</a:t>
+                      </a:r>
+                      <a:r>
+                        <a:rPr kumimoji="1" lang="ja-JP" altLang="en-US" dirty="0"/>
+                        <a:t>考え中。</a:t>
+                      </a:r>
                     </a:p>
                   </a:txBody>
                   <a:tcPr/>
@@ -9562,17 +7992,10 @@
   <p:clrMapOvr>
     <a:masterClrMapping/>
   </p:clrMapOvr>
-  <p:timing>
-    <p:tnLst>
-      <p:par>
-        <p:cTn id="1" dur="indefinite" restart="never" nodeType="tmRoot"/>
-      </p:par>
-    </p:tnLst>
-  </p:timing>
 </p:sld>
 </file>
 
-<file path=ppt/slides/slide4.xml><?xml version="1.0" encoding="utf-8"?>
+<file path=ppt/slides/slide3.xml><?xml version="1.0" encoding="utf-8"?>
 <p:sld xmlns:a="http://schemas.openxmlformats.org/drawingml/2006/main" xmlns:r="http://schemas.openxmlformats.org/officeDocument/2006/relationships" xmlns:p="http://schemas.openxmlformats.org/presentationml/2006/main">
   <p:cSld>
     <p:spTree>
@@ -9652,14 +8075,14 @@
           <p:nvPr>
             <p:extLst>
               <p:ext uri="{D42A27DB-BD31-4B8C-83A1-F6EECF244321}">
-                <p14:modId xmlns:p14="http://schemas.microsoft.com/office/powerpoint/2010/main" val="1177243589"/>
+                <p14:modId xmlns:p14="http://schemas.microsoft.com/office/powerpoint/2010/main" val="3884568212"/>
               </p:ext>
             </p:extLst>
           </p:nvPr>
         </p:nvGraphicFramePr>
         <p:xfrm>
-          <a:off x="503852" y="1017724"/>
-          <a:ext cx="8068648" cy="3740888"/>
+          <a:off x="449580" y="1017724"/>
+          <a:ext cx="8122920" cy="3740888"/>
         </p:xfrm>
         <a:graphic>
           <a:graphicData uri="http://schemas.openxmlformats.org/drawingml/2006/table">
@@ -9668,14 +8091,14 @@
                 <a:tableStyleId>{35758FB7-9AC5-4552-8A53-C91805E547FA}</a:tableStyleId>
               </a:tblPr>
               <a:tblGrid>
-                <a:gridCol w="4034324">
+                <a:gridCol w="4061460">
                   <a:extLst>
                     <a:ext uri="{9D8B030D-6E8A-4147-A177-3AD203B41FA5}">
                       <a16:colId xmlns:a16="http://schemas.microsoft.com/office/drawing/2014/main" val="2255531799"/>
                     </a:ext>
                   </a:extLst>
                 </a:gridCol>
-                <a:gridCol w="4034324">
+                <a:gridCol w="4061460">
                   <a:extLst>
                     <a:ext uri="{9D8B030D-6E8A-4147-A177-3AD203B41FA5}">
                       <a16:colId xmlns:a16="http://schemas.microsoft.com/office/drawing/2014/main" val="3166914974"/>
@@ -9751,7 +8174,18 @@
                       <a:endParaRPr kumimoji="1" lang="en-US" altLang="ja-JP" dirty="0"/>
                     </a:p>
                     <a:p>
-                      <a:endParaRPr kumimoji="1" lang="ja-JP" altLang="en-US" dirty="0"/>
+                      <a:r>
+                        <a:rPr kumimoji="1" lang="ja-JP" altLang="en-US" dirty="0"/>
+                        <a:t>敵</a:t>
+                      </a:r>
+                      <a:r>
+                        <a:rPr kumimoji="1" lang="en-US" altLang="ja-JP" dirty="0"/>
+                        <a:t>AI</a:t>
+                      </a:r>
+                      <a:r>
+                        <a:rPr kumimoji="1" lang="ja-JP" altLang="en-US" dirty="0"/>
+                        <a:t>の制御や行動パターン実装</a:t>
+                      </a:r>
                     </a:p>
                   </a:txBody>
                   <a:tcPr/>
@@ -9761,7 +8195,13 @@
                     <a:bodyPr/>
                     <a:lstStyle/>
                     <a:p>
-                      <a:endParaRPr kumimoji="1" lang="ja-JP" altLang="en-US"/>
+                      <a:endParaRPr kumimoji="1" lang="en-US" altLang="ja-JP" dirty="0"/>
+                    </a:p>
+                    <a:p>
+                      <a:r>
+                        <a:rPr kumimoji="1" lang="ja-JP" altLang="en-US" dirty="0"/>
+                        <a:t>考えていた攻撃は実装済み</a:t>
+                      </a:r>
                     </a:p>
                   </a:txBody>
                   <a:tcPr/>
@@ -9781,7 +8221,14 @@
                       <a:endParaRPr kumimoji="1" lang="en-US" altLang="ja-JP" dirty="0"/>
                     </a:p>
                     <a:p>
-                      <a:endParaRPr kumimoji="1" lang="ja-JP" altLang="en-US" dirty="0"/>
+                      <a:r>
+                        <a:rPr kumimoji="1" lang="en-US" altLang="ja-JP" dirty="0"/>
+                        <a:t>Json</a:t>
+                      </a:r>
+                      <a:r>
+                        <a:rPr kumimoji="1" lang="ja-JP" altLang="en-US" dirty="0"/>
+                        <a:t>データと管理クラスを作る</a:t>
+                      </a:r>
                     </a:p>
                   </a:txBody>
                   <a:tcPr/>
@@ -9791,7 +8238,13 @@
                     <a:bodyPr/>
                     <a:lstStyle/>
                     <a:p>
-                      <a:endParaRPr kumimoji="1" lang="ja-JP" altLang="en-US" dirty="0"/>
+                      <a:endParaRPr kumimoji="1" lang="en-US" altLang="ja-JP" dirty="0"/>
+                    </a:p>
+                    <a:p>
+                      <a:r>
+                        <a:rPr kumimoji="1" lang="ja-JP" altLang="en-US" dirty="0"/>
+                        <a:t>実装済み。簡易的な管理クラスも実装。</a:t>
+                      </a:r>
                     </a:p>
                   </a:txBody>
                   <a:tcPr/>
@@ -9811,7 +8264,10 @@
                       <a:endParaRPr kumimoji="1" lang="en-US" altLang="ja-JP" dirty="0"/>
                     </a:p>
                     <a:p>
-                      <a:endParaRPr kumimoji="1" lang="ja-JP" altLang="en-US" dirty="0"/>
+                      <a:r>
+                        <a:rPr kumimoji="1" lang="ja-JP" altLang="en-US" dirty="0"/>
+                        <a:t>カメラワーク</a:t>
+                      </a:r>
                     </a:p>
                   </a:txBody>
                   <a:tcPr/>
@@ -9821,7 +8277,13 @@
                     <a:bodyPr/>
                     <a:lstStyle/>
                     <a:p>
-                      <a:endParaRPr kumimoji="1" lang="ja-JP" altLang="en-US"/>
+                      <a:endParaRPr kumimoji="1" lang="en-US" altLang="ja-JP" dirty="0"/>
+                    </a:p>
+                    <a:p>
+                      <a:r>
+                        <a:rPr kumimoji="1" lang="ja-JP" altLang="en-US" dirty="0"/>
+                        <a:t>実装済み。</a:t>
+                      </a:r>
                     </a:p>
                   </a:txBody>
                   <a:tcPr/>
@@ -9841,7 +8303,10 @@
                       <a:endParaRPr kumimoji="1" lang="en-US" altLang="ja-JP" dirty="0"/>
                     </a:p>
                     <a:p>
-                      <a:endParaRPr kumimoji="1" lang="ja-JP" altLang="en-US" dirty="0"/>
+                      <a:r>
+                        <a:rPr kumimoji="1" lang="ja-JP" altLang="en-US" dirty="0"/>
+                        <a:t>ライトのシェーダー</a:t>
+                      </a:r>
                     </a:p>
                   </a:txBody>
                   <a:tcPr/>
@@ -9851,7 +8316,13 @@
                     <a:bodyPr/>
                     <a:lstStyle/>
                     <a:p>
-                      <a:endParaRPr kumimoji="1" lang="ja-JP" altLang="en-US" dirty="0"/>
+                      <a:endParaRPr kumimoji="1" lang="en-US" altLang="ja-JP" dirty="0"/>
+                    </a:p>
+                    <a:p>
+                      <a:r>
+                        <a:rPr kumimoji="1" lang="ja-JP" altLang="en-US" dirty="0"/>
+                        <a:t>ポイントライトは実装済み。</a:t>
+                      </a:r>
                     </a:p>
                   </a:txBody>
                   <a:tcPr/>
@@ -9902,1960 +8373,6 @@
         <p14:creationId xmlns:p14="http://schemas.microsoft.com/office/powerpoint/2010/main" val="876563505"/>
       </p:ext>
     </p:extLst>
-  </p:cSld>
-  <p:clrMapOvr>
-    <a:masterClrMapping/>
-  </p:clrMapOvr>
-</p:sld>
-</file>
-
-<file path=ppt/slides/slide5.xml><?xml version="1.0" encoding="utf-8"?>
-<p:sld xmlns:a="http://schemas.openxmlformats.org/drawingml/2006/main" xmlns:r="http://schemas.openxmlformats.org/officeDocument/2006/relationships" xmlns:p="http://schemas.openxmlformats.org/presentationml/2006/main">
-  <p:cSld>
-    <p:spTree>
-      <p:nvGrpSpPr>
-        <p:cNvPr id="1" name="Shape 65"/>
-        <p:cNvGrpSpPr/>
-        <p:nvPr/>
-      </p:nvGrpSpPr>
-      <p:grpSpPr>
-        <a:xfrm>
-          <a:off x="0" y="0"/>
-          <a:ext cx="0" cy="0"/>
-          <a:chOff x="0" y="0"/>
-          <a:chExt cx="0" cy="0"/>
-        </a:xfrm>
-      </p:grpSpPr>
-      <p:sp>
-        <p:nvSpPr>
-          <p:cNvPr id="66" name="Google Shape;66;p3"/>
-          <p:cNvSpPr txBox="1">
-            <a:spLocks noGrp="1"/>
-          </p:cNvSpPr>
-          <p:nvPr>
-            <p:ph type="title"/>
-          </p:nvPr>
-        </p:nvSpPr>
-        <p:spPr>
-          <a:prstGeom prst="rect">
-            <a:avLst/>
-          </a:prstGeom>
-          <a:noFill/>
-          <a:ln>
-            <a:noFill/>
-          </a:ln>
-        </p:spPr>
-        <p:txBody>
-          <a:bodyPr spcFirstLastPara="1" wrap="square" lIns="91425" tIns="91425" rIns="91425" bIns="91425" anchor="t" anchorCtr="0">
-            <a:noAutofit/>
-          </a:bodyPr>
-          <a:lstStyle/>
-          <a:p>
-            <a:pPr lvl="0">
-              <a:buSzPct val="111111"/>
-            </a:pPr>
-            <a:r>
-              <a:rPr lang="ja" sz="2200" dirty="0"/>
-              <a:t>Q</a:t>
-            </a:r>
-            <a:r>
-              <a:rPr lang="en-US" altLang="ja" sz="2200" dirty="0"/>
-              <a:t>3</a:t>
-            </a:r>
-            <a:r>
-              <a:rPr lang="ja" sz="2200" dirty="0"/>
-              <a:t>.</a:t>
-            </a:r>
-            <a:r>
-              <a:rPr lang="ja-JP" altLang="en-US" sz="2200" dirty="0"/>
-              <a:t>今回の制作で特に「やり切れたな！」と思う事は</a:t>
-            </a:r>
-            <a:r>
-              <a:rPr lang="ja" sz="2200" dirty="0"/>
-              <a:t>、何ですか？</a:t>
-            </a:r>
-            <a:endParaRPr sz="2200" dirty="0"/>
-          </a:p>
-        </p:txBody>
-      </p:sp>
-      <p:sp>
-        <p:nvSpPr>
-          <p:cNvPr id="67" name="Google Shape;67;p3"/>
-          <p:cNvSpPr txBox="1">
-            <a:spLocks noGrp="1"/>
-          </p:cNvSpPr>
-          <p:nvPr>
-            <p:ph type="body" idx="1"/>
-          </p:nvPr>
-        </p:nvSpPr>
-        <p:spPr>
-          <a:prstGeom prst="rect">
-            <a:avLst/>
-          </a:prstGeom>
-          <a:noFill/>
-          <a:ln>
-            <a:noFill/>
-          </a:ln>
-        </p:spPr>
-        <p:txBody>
-          <a:bodyPr spcFirstLastPara="1" wrap="square" lIns="91425" tIns="91425" rIns="91425" bIns="91425" anchor="t" anchorCtr="0">
-            <a:normAutofit/>
-          </a:bodyPr>
-          <a:lstStyle/>
-          <a:p>
-            <a:pPr marL="0" lvl="0" indent="0" algn="l" rtl="0">
-              <a:lnSpc>
-                <a:spcPct val="115000"/>
-              </a:lnSpc>
-              <a:spcBef>
-                <a:spcPts val="1200"/>
-              </a:spcBef>
-              <a:spcAft>
-                <a:spcPts val="0"/>
-              </a:spcAft>
-              <a:buSzPts val="1800"/>
-              <a:buNone/>
-            </a:pPr>
-            <a:r>
-              <a:rPr lang="ja"/>
-              <a:t>・</a:t>
-            </a:r>
-            <a:endParaRPr lang="ja" altLang="en-US">
-              <a:solidFill>
-                <a:schemeClr val="tx1"/>
-              </a:solidFill>
-            </a:endParaRPr>
-          </a:p>
-          <a:p>
-            <a:pPr marL="0" lvl="0" indent="0" algn="l" rtl="0">
-              <a:lnSpc>
-                <a:spcPct val="115000"/>
-              </a:lnSpc>
-              <a:spcBef>
-                <a:spcPts val="1200"/>
-              </a:spcBef>
-              <a:spcAft>
-                <a:spcPts val="0"/>
-              </a:spcAft>
-              <a:buSzPts val="1800"/>
-              <a:buNone/>
-            </a:pPr>
-            <a:endParaRPr lang="en-US" altLang="ja"/>
-          </a:p>
-          <a:p>
-            <a:pPr marL="0" lvl="0" indent="0" algn="l" rtl="0">
-              <a:lnSpc>
-                <a:spcPct val="115000"/>
-              </a:lnSpc>
-              <a:spcBef>
-                <a:spcPts val="1200"/>
-              </a:spcBef>
-              <a:spcAft>
-                <a:spcPts val="0"/>
-              </a:spcAft>
-              <a:buSzPts val="1800"/>
-              <a:buNone/>
-            </a:pPr>
-            <a:r>
-              <a:rPr lang="ja"/>
-              <a:t>・</a:t>
-            </a:r>
-            <a:endParaRPr/>
-          </a:p>
-          <a:p>
-            <a:pPr marL="0" lvl="0" indent="0" algn="l" rtl="0">
-              <a:lnSpc>
-                <a:spcPct val="115000"/>
-              </a:lnSpc>
-              <a:spcBef>
-                <a:spcPts val="1200"/>
-              </a:spcBef>
-              <a:spcAft>
-                <a:spcPts val="1200"/>
-              </a:spcAft>
-              <a:buSzPts val="1800"/>
-              <a:buNone/>
-            </a:pPr>
-            <a:endParaRPr lang="en-US" altLang="ja"/>
-          </a:p>
-          <a:p>
-            <a:pPr marL="0" lvl="0" indent="0" algn="l" rtl="0">
-              <a:lnSpc>
-                <a:spcPct val="115000"/>
-              </a:lnSpc>
-              <a:spcBef>
-                <a:spcPts val="1200"/>
-              </a:spcBef>
-              <a:spcAft>
-                <a:spcPts val="1200"/>
-              </a:spcAft>
-              <a:buSzPts val="1800"/>
-              <a:buNone/>
-            </a:pPr>
-            <a:r>
-              <a:rPr lang="ja"/>
-              <a:t>・</a:t>
-            </a:r>
-            <a:endParaRPr/>
-          </a:p>
-        </p:txBody>
-      </p:sp>
-    </p:spTree>
-  </p:cSld>
-  <p:clrMapOvr>
-    <a:masterClrMapping/>
-  </p:clrMapOvr>
-</p:sld>
-</file>
-
-<file path=ppt/slides/slide6.xml><?xml version="1.0" encoding="utf-8"?>
-<p:sld xmlns:a="http://schemas.openxmlformats.org/drawingml/2006/main" xmlns:r="http://schemas.openxmlformats.org/officeDocument/2006/relationships" xmlns:p="http://schemas.openxmlformats.org/presentationml/2006/main">
-  <p:cSld>
-    <p:spTree>
-      <p:nvGrpSpPr>
-        <p:cNvPr id="1" name="Shape 59"/>
-        <p:cNvGrpSpPr/>
-        <p:nvPr/>
-      </p:nvGrpSpPr>
-      <p:grpSpPr>
-        <a:xfrm>
-          <a:off x="0" y="0"/>
-          <a:ext cx="0" cy="0"/>
-          <a:chOff x="0" y="0"/>
-          <a:chExt cx="0" cy="0"/>
-        </a:xfrm>
-      </p:grpSpPr>
-      <p:sp>
-        <p:nvSpPr>
-          <p:cNvPr id="60" name="Google Shape;60;p2"/>
-          <p:cNvSpPr txBox="1">
-            <a:spLocks noGrp="1"/>
-          </p:cNvSpPr>
-          <p:nvPr>
-            <p:ph type="title"/>
-          </p:nvPr>
-        </p:nvSpPr>
-        <p:spPr>
-          <a:prstGeom prst="rect">
-            <a:avLst/>
-          </a:prstGeom>
-          <a:noFill/>
-          <a:ln>
-            <a:noFill/>
-          </a:ln>
-        </p:spPr>
-        <p:txBody>
-          <a:bodyPr spcFirstLastPara="1" wrap="square" lIns="91425" tIns="91425" rIns="91425" bIns="91425" anchor="t" anchorCtr="0">
-            <a:normAutofit/>
-          </a:bodyPr>
-          <a:lstStyle/>
-          <a:p>
-            <a:pPr marL="0" lvl="0" indent="0" algn="l" rtl="0">
-              <a:lnSpc>
-                <a:spcPct val="100000"/>
-              </a:lnSpc>
-              <a:spcBef>
-                <a:spcPts val="0"/>
-              </a:spcBef>
-              <a:spcAft>
-                <a:spcPts val="0"/>
-              </a:spcAft>
-              <a:buSzPct val="111111"/>
-              <a:buNone/>
-            </a:pPr>
-            <a:r>
-              <a:rPr lang="ja" sz="2200" dirty="0"/>
-              <a:t>Q</a:t>
-            </a:r>
-            <a:r>
-              <a:rPr lang="en-US" altLang="ja-JP" sz="2200" dirty="0"/>
-              <a:t>4</a:t>
-            </a:r>
-            <a:r>
-              <a:rPr lang="ja" sz="2200" dirty="0"/>
-              <a:t>.</a:t>
-            </a:r>
-            <a:r>
-              <a:rPr lang="ja-JP" altLang="en-US" sz="2200" dirty="0"/>
-              <a:t>今回の制作で学んだ技術</a:t>
-            </a:r>
-            <a:r>
-              <a:rPr lang="ja" sz="2200" dirty="0"/>
-              <a:t>を、教えてください。</a:t>
-            </a:r>
-            <a:endParaRPr sz="2200" dirty="0"/>
-          </a:p>
-        </p:txBody>
-      </p:sp>
-      <p:sp>
-        <p:nvSpPr>
-          <p:cNvPr id="6" name="Google Shape;67;p3">
-            <a:extLst>
-              <a:ext uri="{FF2B5EF4-FFF2-40B4-BE49-F238E27FC236}">
-                <a16:creationId xmlns:a16="http://schemas.microsoft.com/office/drawing/2014/main" id="{02967ADB-64AB-4C41-8606-2955D73AE5B9}"/>
-              </a:ext>
-            </a:extLst>
-          </p:cNvPr>
-          <p:cNvSpPr txBox="1">
-            <a:spLocks/>
-          </p:cNvSpPr>
-          <p:nvPr/>
-        </p:nvSpPr>
-        <p:spPr>
-          <a:xfrm>
-            <a:off x="464100" y="1304875"/>
-            <a:ext cx="8520600" cy="3416400"/>
-          </a:xfrm>
-          <a:prstGeom prst="rect">
-            <a:avLst/>
-          </a:prstGeom>
-          <a:noFill/>
-          <a:ln>
-            <a:noFill/>
-          </a:ln>
-        </p:spPr>
-        <p:txBody>
-          <a:bodyPr spcFirstLastPara="1" wrap="square" lIns="91425" tIns="91425" rIns="91425" bIns="91425" anchor="t" anchorCtr="0">
-            <a:normAutofit/>
-          </a:bodyPr>
-          <a:lstStyle>
-            <a:defPPr marR="0" lvl="0" algn="l" rtl="0">
-              <a:lnSpc>
-                <a:spcPct val="100000"/>
-              </a:lnSpc>
-              <a:spcBef>
-                <a:spcPts val="0"/>
-              </a:spcBef>
-              <a:spcAft>
-                <a:spcPts val="0"/>
-              </a:spcAft>
-            </a:defPPr>
-            <a:lvl1pPr marL="457200" marR="0" lvl="0" indent="-342900" algn="l" rtl="0">
-              <a:lnSpc>
-                <a:spcPct val="115000"/>
-              </a:lnSpc>
-              <a:spcBef>
-                <a:spcPts val="0"/>
-              </a:spcBef>
-              <a:spcAft>
-                <a:spcPts val="0"/>
-              </a:spcAft>
-              <a:buClr>
-                <a:schemeClr val="dk2"/>
-              </a:buClr>
-              <a:buSzPts val="1800"/>
-              <a:buFont typeface="Arial"/>
-              <a:buChar char="●"/>
-              <a:defRPr sz="1800" b="0" i="0" u="none" strike="noStrike" cap="none">
-                <a:solidFill>
-                  <a:schemeClr val="dk2"/>
-                </a:solidFill>
-                <a:latin typeface="Arial"/>
-                <a:ea typeface="Arial"/>
-                <a:cs typeface="Arial"/>
-                <a:sym typeface="Arial"/>
-              </a:defRPr>
-            </a:lvl1pPr>
-            <a:lvl2pPr marL="914400" marR="0" lvl="1" indent="-317500" algn="l" rtl="0">
-              <a:lnSpc>
-                <a:spcPct val="115000"/>
-              </a:lnSpc>
-              <a:spcBef>
-                <a:spcPts val="0"/>
-              </a:spcBef>
-              <a:spcAft>
-                <a:spcPts val="0"/>
-              </a:spcAft>
-              <a:buClr>
-                <a:schemeClr val="dk2"/>
-              </a:buClr>
-              <a:buSzPts val="1400"/>
-              <a:buFont typeface="Arial"/>
-              <a:buChar char="○"/>
-              <a:defRPr sz="1400" b="0" i="0" u="none" strike="noStrike" cap="none">
-                <a:solidFill>
-                  <a:schemeClr val="dk2"/>
-                </a:solidFill>
-                <a:latin typeface="Arial"/>
-                <a:ea typeface="Arial"/>
-                <a:cs typeface="Arial"/>
-                <a:sym typeface="Arial"/>
-              </a:defRPr>
-            </a:lvl2pPr>
-            <a:lvl3pPr marL="1371600" marR="0" lvl="2" indent="-317500" algn="l" rtl="0">
-              <a:lnSpc>
-                <a:spcPct val="115000"/>
-              </a:lnSpc>
-              <a:spcBef>
-                <a:spcPts val="0"/>
-              </a:spcBef>
-              <a:spcAft>
-                <a:spcPts val="0"/>
-              </a:spcAft>
-              <a:buClr>
-                <a:schemeClr val="dk2"/>
-              </a:buClr>
-              <a:buSzPts val="1400"/>
-              <a:buFont typeface="Arial"/>
-              <a:buChar char="■"/>
-              <a:defRPr sz="1400" b="0" i="0" u="none" strike="noStrike" cap="none">
-                <a:solidFill>
-                  <a:schemeClr val="dk2"/>
-                </a:solidFill>
-                <a:latin typeface="Arial"/>
-                <a:ea typeface="Arial"/>
-                <a:cs typeface="Arial"/>
-                <a:sym typeface="Arial"/>
-              </a:defRPr>
-            </a:lvl3pPr>
-            <a:lvl4pPr marL="1828800" marR="0" lvl="3" indent="-317500" algn="l" rtl="0">
-              <a:lnSpc>
-                <a:spcPct val="115000"/>
-              </a:lnSpc>
-              <a:spcBef>
-                <a:spcPts val="0"/>
-              </a:spcBef>
-              <a:spcAft>
-                <a:spcPts val="0"/>
-              </a:spcAft>
-              <a:buClr>
-                <a:schemeClr val="dk2"/>
-              </a:buClr>
-              <a:buSzPts val="1400"/>
-              <a:buFont typeface="Arial"/>
-              <a:buChar char="●"/>
-              <a:defRPr sz="1400" b="0" i="0" u="none" strike="noStrike" cap="none">
-                <a:solidFill>
-                  <a:schemeClr val="dk2"/>
-                </a:solidFill>
-                <a:latin typeface="Arial"/>
-                <a:ea typeface="Arial"/>
-                <a:cs typeface="Arial"/>
-                <a:sym typeface="Arial"/>
-              </a:defRPr>
-            </a:lvl4pPr>
-            <a:lvl5pPr marL="2286000" marR="0" lvl="4" indent="-317500" algn="l" rtl="0">
-              <a:lnSpc>
-                <a:spcPct val="115000"/>
-              </a:lnSpc>
-              <a:spcBef>
-                <a:spcPts val="0"/>
-              </a:spcBef>
-              <a:spcAft>
-                <a:spcPts val="0"/>
-              </a:spcAft>
-              <a:buClr>
-                <a:schemeClr val="dk2"/>
-              </a:buClr>
-              <a:buSzPts val="1400"/>
-              <a:buFont typeface="Arial"/>
-              <a:buChar char="○"/>
-              <a:defRPr sz="1400" b="0" i="0" u="none" strike="noStrike" cap="none">
-                <a:solidFill>
-                  <a:schemeClr val="dk2"/>
-                </a:solidFill>
-                <a:latin typeface="Arial"/>
-                <a:ea typeface="Arial"/>
-                <a:cs typeface="Arial"/>
-                <a:sym typeface="Arial"/>
-              </a:defRPr>
-            </a:lvl5pPr>
-            <a:lvl6pPr marL="2743200" marR="0" lvl="5" indent="-317500" algn="l" rtl="0">
-              <a:lnSpc>
-                <a:spcPct val="115000"/>
-              </a:lnSpc>
-              <a:spcBef>
-                <a:spcPts val="0"/>
-              </a:spcBef>
-              <a:spcAft>
-                <a:spcPts val="0"/>
-              </a:spcAft>
-              <a:buClr>
-                <a:schemeClr val="dk2"/>
-              </a:buClr>
-              <a:buSzPts val="1400"/>
-              <a:buFont typeface="Arial"/>
-              <a:buChar char="■"/>
-              <a:defRPr sz="1400" b="0" i="0" u="none" strike="noStrike" cap="none">
-                <a:solidFill>
-                  <a:schemeClr val="dk2"/>
-                </a:solidFill>
-                <a:latin typeface="Arial"/>
-                <a:ea typeface="Arial"/>
-                <a:cs typeface="Arial"/>
-                <a:sym typeface="Arial"/>
-              </a:defRPr>
-            </a:lvl6pPr>
-            <a:lvl7pPr marL="3200400" marR="0" lvl="6" indent="-317500" algn="l" rtl="0">
-              <a:lnSpc>
-                <a:spcPct val="115000"/>
-              </a:lnSpc>
-              <a:spcBef>
-                <a:spcPts val="0"/>
-              </a:spcBef>
-              <a:spcAft>
-                <a:spcPts val="0"/>
-              </a:spcAft>
-              <a:buClr>
-                <a:schemeClr val="dk2"/>
-              </a:buClr>
-              <a:buSzPts val="1400"/>
-              <a:buFont typeface="Arial"/>
-              <a:buChar char="●"/>
-              <a:defRPr sz="1400" b="0" i="0" u="none" strike="noStrike" cap="none">
-                <a:solidFill>
-                  <a:schemeClr val="dk2"/>
-                </a:solidFill>
-                <a:latin typeface="Arial"/>
-                <a:ea typeface="Arial"/>
-                <a:cs typeface="Arial"/>
-                <a:sym typeface="Arial"/>
-              </a:defRPr>
-            </a:lvl7pPr>
-            <a:lvl8pPr marL="3657600" marR="0" lvl="7" indent="-317500" algn="l" rtl="0">
-              <a:lnSpc>
-                <a:spcPct val="115000"/>
-              </a:lnSpc>
-              <a:spcBef>
-                <a:spcPts val="0"/>
-              </a:spcBef>
-              <a:spcAft>
-                <a:spcPts val="0"/>
-              </a:spcAft>
-              <a:buClr>
-                <a:schemeClr val="dk2"/>
-              </a:buClr>
-              <a:buSzPts val="1400"/>
-              <a:buFont typeface="Arial"/>
-              <a:buChar char="○"/>
-              <a:defRPr sz="1400" b="0" i="0" u="none" strike="noStrike" cap="none">
-                <a:solidFill>
-                  <a:schemeClr val="dk2"/>
-                </a:solidFill>
-                <a:latin typeface="Arial"/>
-                <a:ea typeface="Arial"/>
-                <a:cs typeface="Arial"/>
-                <a:sym typeface="Arial"/>
-              </a:defRPr>
-            </a:lvl8pPr>
-            <a:lvl9pPr marL="4114800" marR="0" lvl="8" indent="-317500" algn="l" rtl="0">
-              <a:lnSpc>
-                <a:spcPct val="115000"/>
-              </a:lnSpc>
-              <a:spcBef>
-                <a:spcPts val="0"/>
-              </a:spcBef>
-              <a:spcAft>
-                <a:spcPts val="0"/>
-              </a:spcAft>
-              <a:buClr>
-                <a:schemeClr val="dk2"/>
-              </a:buClr>
-              <a:buSzPts val="1400"/>
-              <a:buFont typeface="Arial"/>
-              <a:buChar char="■"/>
-              <a:defRPr sz="1400" b="0" i="0" u="none" strike="noStrike" cap="none">
-                <a:solidFill>
-                  <a:schemeClr val="dk2"/>
-                </a:solidFill>
-                <a:latin typeface="Arial"/>
-                <a:ea typeface="Arial"/>
-                <a:cs typeface="Arial"/>
-                <a:sym typeface="Arial"/>
-              </a:defRPr>
-            </a:lvl9pPr>
-          </a:lstStyle>
-          <a:p>
-            <a:pPr marL="0" indent="0">
-              <a:spcBef>
-                <a:spcPts val="1200"/>
-              </a:spcBef>
-              <a:buFont typeface="Arial"/>
-              <a:buNone/>
-            </a:pPr>
-            <a:r>
-              <a:rPr lang="ja" altLang="en-US"/>
-              <a:t>・</a:t>
-            </a:r>
-          </a:p>
-          <a:p>
-            <a:pPr marL="0" indent="0">
-              <a:spcBef>
-                <a:spcPts val="1200"/>
-              </a:spcBef>
-              <a:buFont typeface="Arial"/>
-              <a:buNone/>
-            </a:pPr>
-            <a:endParaRPr lang="ja" altLang="en-US"/>
-          </a:p>
-          <a:p>
-            <a:pPr marL="0" indent="0">
-              <a:spcBef>
-                <a:spcPts val="1200"/>
-              </a:spcBef>
-              <a:buFont typeface="Arial"/>
-              <a:buNone/>
-            </a:pPr>
-            <a:r>
-              <a:rPr lang="ja" altLang="en-US"/>
-              <a:t>・</a:t>
-            </a:r>
-          </a:p>
-          <a:p>
-            <a:pPr marL="0" indent="0">
-              <a:spcBef>
-                <a:spcPts val="1200"/>
-              </a:spcBef>
-              <a:spcAft>
-                <a:spcPts val="1200"/>
-              </a:spcAft>
-              <a:buFont typeface="Arial"/>
-              <a:buNone/>
-            </a:pPr>
-            <a:endParaRPr lang="ja" altLang="en-US"/>
-          </a:p>
-          <a:p>
-            <a:pPr marL="0" indent="0">
-              <a:spcBef>
-                <a:spcPts val="1200"/>
-              </a:spcBef>
-              <a:spcAft>
-                <a:spcPts val="1200"/>
-              </a:spcAft>
-              <a:buFont typeface="Arial"/>
-              <a:buNone/>
-            </a:pPr>
-            <a:r>
-              <a:rPr lang="ja" altLang="en-US"/>
-              <a:t>・</a:t>
-            </a:r>
-          </a:p>
-        </p:txBody>
-      </p:sp>
-    </p:spTree>
-  </p:cSld>
-  <p:clrMapOvr>
-    <a:masterClrMapping/>
-  </p:clrMapOvr>
-</p:sld>
-</file>
-
-<file path=ppt/slides/slide7.xml><?xml version="1.0" encoding="utf-8"?>
-<p:sld xmlns:a="http://schemas.openxmlformats.org/drawingml/2006/main" xmlns:r="http://schemas.openxmlformats.org/officeDocument/2006/relationships" xmlns:p="http://schemas.openxmlformats.org/presentationml/2006/main">
-  <p:cSld>
-    <p:spTree>
-      <p:nvGrpSpPr>
-        <p:cNvPr id="1" name="Shape 90"/>
-        <p:cNvGrpSpPr/>
-        <p:nvPr/>
-      </p:nvGrpSpPr>
-      <p:grpSpPr>
-        <a:xfrm>
-          <a:off x="0" y="0"/>
-          <a:ext cx="0" cy="0"/>
-          <a:chOff x="0" y="0"/>
-          <a:chExt cx="0" cy="0"/>
-        </a:xfrm>
-      </p:grpSpPr>
-      <p:sp>
-        <p:nvSpPr>
-          <p:cNvPr id="91" name="Google Shape;91;p7"/>
-          <p:cNvSpPr txBox="1">
-            <a:spLocks noGrp="1"/>
-          </p:cNvSpPr>
-          <p:nvPr>
-            <p:ph type="title"/>
-          </p:nvPr>
-        </p:nvSpPr>
-        <p:spPr>
-          <a:prstGeom prst="rect">
-            <a:avLst/>
-          </a:prstGeom>
-          <a:noFill/>
-          <a:ln>
-            <a:noFill/>
-          </a:ln>
-        </p:spPr>
-        <p:txBody>
-          <a:bodyPr spcFirstLastPara="1" wrap="square" lIns="91425" tIns="91425" rIns="91425" bIns="91425" anchor="t" anchorCtr="0">
-            <a:normAutofit/>
-          </a:bodyPr>
-          <a:lstStyle/>
-          <a:p>
-            <a:pPr marL="0" lvl="0" indent="0" algn="l" rtl="0">
-              <a:lnSpc>
-                <a:spcPct val="100000"/>
-              </a:lnSpc>
-              <a:spcBef>
-                <a:spcPts val="0"/>
-              </a:spcBef>
-              <a:spcAft>
-                <a:spcPts val="0"/>
-              </a:spcAft>
-              <a:buSzPts val="2800"/>
-              <a:buNone/>
-            </a:pPr>
-            <a:r>
-              <a:rPr lang="ja" sz="2200" dirty="0"/>
-              <a:t>Q</a:t>
-            </a:r>
-            <a:r>
-              <a:rPr lang="en-US" altLang="ja" sz="2200" dirty="0"/>
-              <a:t>5</a:t>
-            </a:r>
-            <a:r>
-              <a:rPr lang="ja" sz="2200" dirty="0"/>
-              <a:t>.</a:t>
-            </a:r>
-            <a:r>
-              <a:rPr lang="ja-JP" altLang="en-US" sz="2200" dirty="0"/>
-              <a:t>今回の制作で</a:t>
-            </a:r>
-            <a:r>
-              <a:rPr lang="ja" sz="2200" dirty="0"/>
-              <a:t>感じた</a:t>
-            </a:r>
-            <a:r>
-              <a:rPr lang="ja-JP" altLang="en-US" sz="2200" dirty="0" err="1"/>
-              <a:t>、</a:t>
-            </a:r>
-            <a:r>
-              <a:rPr lang="ja" sz="2200" dirty="0"/>
-              <a:t>自分の課題を教えてください</a:t>
-            </a:r>
-            <a:r>
-              <a:rPr lang="ja-JP" altLang="en-US" sz="2200" dirty="0" err="1"/>
-              <a:t>。</a:t>
-            </a:r>
-            <a:endParaRPr sz="2200" dirty="0"/>
-          </a:p>
-        </p:txBody>
-      </p:sp>
-      <p:sp>
-        <p:nvSpPr>
-          <p:cNvPr id="6" name="Google Shape;67;p3">
-            <a:extLst>
-              <a:ext uri="{FF2B5EF4-FFF2-40B4-BE49-F238E27FC236}">
-                <a16:creationId xmlns:a16="http://schemas.microsoft.com/office/drawing/2014/main" id="{29BB7ADE-4125-4E07-B834-A29976BD84AC}"/>
-              </a:ext>
-            </a:extLst>
-          </p:cNvPr>
-          <p:cNvSpPr txBox="1">
-            <a:spLocks/>
-          </p:cNvSpPr>
-          <p:nvPr/>
-        </p:nvSpPr>
-        <p:spPr>
-          <a:xfrm>
-            <a:off x="464100" y="1304875"/>
-            <a:ext cx="8520600" cy="3416400"/>
-          </a:xfrm>
-          <a:prstGeom prst="rect">
-            <a:avLst/>
-          </a:prstGeom>
-          <a:noFill/>
-          <a:ln>
-            <a:noFill/>
-          </a:ln>
-        </p:spPr>
-        <p:txBody>
-          <a:bodyPr spcFirstLastPara="1" wrap="square" lIns="91425" tIns="91425" rIns="91425" bIns="91425" anchor="t" anchorCtr="0">
-            <a:normAutofit/>
-          </a:bodyPr>
-          <a:lstStyle>
-            <a:defPPr marR="0" lvl="0" algn="l" rtl="0">
-              <a:lnSpc>
-                <a:spcPct val="100000"/>
-              </a:lnSpc>
-              <a:spcBef>
-                <a:spcPts val="0"/>
-              </a:spcBef>
-              <a:spcAft>
-                <a:spcPts val="0"/>
-              </a:spcAft>
-            </a:defPPr>
-            <a:lvl1pPr marL="457200" marR="0" lvl="0" indent="-342900" algn="l" rtl="0">
-              <a:lnSpc>
-                <a:spcPct val="115000"/>
-              </a:lnSpc>
-              <a:spcBef>
-                <a:spcPts val="0"/>
-              </a:spcBef>
-              <a:spcAft>
-                <a:spcPts val="0"/>
-              </a:spcAft>
-              <a:buClr>
-                <a:schemeClr val="dk2"/>
-              </a:buClr>
-              <a:buSzPts val="1800"/>
-              <a:buFont typeface="Arial"/>
-              <a:buChar char="●"/>
-              <a:defRPr sz="1800" b="0" i="0" u="none" strike="noStrike" cap="none">
-                <a:solidFill>
-                  <a:schemeClr val="dk2"/>
-                </a:solidFill>
-                <a:latin typeface="Arial"/>
-                <a:ea typeface="Arial"/>
-                <a:cs typeface="Arial"/>
-                <a:sym typeface="Arial"/>
-              </a:defRPr>
-            </a:lvl1pPr>
-            <a:lvl2pPr marL="914400" marR="0" lvl="1" indent="-317500" algn="l" rtl="0">
-              <a:lnSpc>
-                <a:spcPct val="115000"/>
-              </a:lnSpc>
-              <a:spcBef>
-                <a:spcPts val="0"/>
-              </a:spcBef>
-              <a:spcAft>
-                <a:spcPts val="0"/>
-              </a:spcAft>
-              <a:buClr>
-                <a:schemeClr val="dk2"/>
-              </a:buClr>
-              <a:buSzPts val="1400"/>
-              <a:buFont typeface="Arial"/>
-              <a:buChar char="○"/>
-              <a:defRPr sz="1400" b="0" i="0" u="none" strike="noStrike" cap="none">
-                <a:solidFill>
-                  <a:schemeClr val="dk2"/>
-                </a:solidFill>
-                <a:latin typeface="Arial"/>
-                <a:ea typeface="Arial"/>
-                <a:cs typeface="Arial"/>
-                <a:sym typeface="Arial"/>
-              </a:defRPr>
-            </a:lvl2pPr>
-            <a:lvl3pPr marL="1371600" marR="0" lvl="2" indent="-317500" algn="l" rtl="0">
-              <a:lnSpc>
-                <a:spcPct val="115000"/>
-              </a:lnSpc>
-              <a:spcBef>
-                <a:spcPts val="0"/>
-              </a:spcBef>
-              <a:spcAft>
-                <a:spcPts val="0"/>
-              </a:spcAft>
-              <a:buClr>
-                <a:schemeClr val="dk2"/>
-              </a:buClr>
-              <a:buSzPts val="1400"/>
-              <a:buFont typeface="Arial"/>
-              <a:buChar char="■"/>
-              <a:defRPr sz="1400" b="0" i="0" u="none" strike="noStrike" cap="none">
-                <a:solidFill>
-                  <a:schemeClr val="dk2"/>
-                </a:solidFill>
-                <a:latin typeface="Arial"/>
-                <a:ea typeface="Arial"/>
-                <a:cs typeface="Arial"/>
-                <a:sym typeface="Arial"/>
-              </a:defRPr>
-            </a:lvl3pPr>
-            <a:lvl4pPr marL="1828800" marR="0" lvl="3" indent="-317500" algn="l" rtl="0">
-              <a:lnSpc>
-                <a:spcPct val="115000"/>
-              </a:lnSpc>
-              <a:spcBef>
-                <a:spcPts val="0"/>
-              </a:spcBef>
-              <a:spcAft>
-                <a:spcPts val="0"/>
-              </a:spcAft>
-              <a:buClr>
-                <a:schemeClr val="dk2"/>
-              </a:buClr>
-              <a:buSzPts val="1400"/>
-              <a:buFont typeface="Arial"/>
-              <a:buChar char="●"/>
-              <a:defRPr sz="1400" b="0" i="0" u="none" strike="noStrike" cap="none">
-                <a:solidFill>
-                  <a:schemeClr val="dk2"/>
-                </a:solidFill>
-                <a:latin typeface="Arial"/>
-                <a:ea typeface="Arial"/>
-                <a:cs typeface="Arial"/>
-                <a:sym typeface="Arial"/>
-              </a:defRPr>
-            </a:lvl4pPr>
-            <a:lvl5pPr marL="2286000" marR="0" lvl="4" indent="-317500" algn="l" rtl="0">
-              <a:lnSpc>
-                <a:spcPct val="115000"/>
-              </a:lnSpc>
-              <a:spcBef>
-                <a:spcPts val="0"/>
-              </a:spcBef>
-              <a:spcAft>
-                <a:spcPts val="0"/>
-              </a:spcAft>
-              <a:buClr>
-                <a:schemeClr val="dk2"/>
-              </a:buClr>
-              <a:buSzPts val="1400"/>
-              <a:buFont typeface="Arial"/>
-              <a:buChar char="○"/>
-              <a:defRPr sz="1400" b="0" i="0" u="none" strike="noStrike" cap="none">
-                <a:solidFill>
-                  <a:schemeClr val="dk2"/>
-                </a:solidFill>
-                <a:latin typeface="Arial"/>
-                <a:ea typeface="Arial"/>
-                <a:cs typeface="Arial"/>
-                <a:sym typeface="Arial"/>
-              </a:defRPr>
-            </a:lvl5pPr>
-            <a:lvl6pPr marL="2743200" marR="0" lvl="5" indent="-317500" algn="l" rtl="0">
-              <a:lnSpc>
-                <a:spcPct val="115000"/>
-              </a:lnSpc>
-              <a:spcBef>
-                <a:spcPts val="0"/>
-              </a:spcBef>
-              <a:spcAft>
-                <a:spcPts val="0"/>
-              </a:spcAft>
-              <a:buClr>
-                <a:schemeClr val="dk2"/>
-              </a:buClr>
-              <a:buSzPts val="1400"/>
-              <a:buFont typeface="Arial"/>
-              <a:buChar char="■"/>
-              <a:defRPr sz="1400" b="0" i="0" u="none" strike="noStrike" cap="none">
-                <a:solidFill>
-                  <a:schemeClr val="dk2"/>
-                </a:solidFill>
-                <a:latin typeface="Arial"/>
-                <a:ea typeface="Arial"/>
-                <a:cs typeface="Arial"/>
-                <a:sym typeface="Arial"/>
-              </a:defRPr>
-            </a:lvl6pPr>
-            <a:lvl7pPr marL="3200400" marR="0" lvl="6" indent="-317500" algn="l" rtl="0">
-              <a:lnSpc>
-                <a:spcPct val="115000"/>
-              </a:lnSpc>
-              <a:spcBef>
-                <a:spcPts val="0"/>
-              </a:spcBef>
-              <a:spcAft>
-                <a:spcPts val="0"/>
-              </a:spcAft>
-              <a:buClr>
-                <a:schemeClr val="dk2"/>
-              </a:buClr>
-              <a:buSzPts val="1400"/>
-              <a:buFont typeface="Arial"/>
-              <a:buChar char="●"/>
-              <a:defRPr sz="1400" b="0" i="0" u="none" strike="noStrike" cap="none">
-                <a:solidFill>
-                  <a:schemeClr val="dk2"/>
-                </a:solidFill>
-                <a:latin typeface="Arial"/>
-                <a:ea typeface="Arial"/>
-                <a:cs typeface="Arial"/>
-                <a:sym typeface="Arial"/>
-              </a:defRPr>
-            </a:lvl7pPr>
-            <a:lvl8pPr marL="3657600" marR="0" lvl="7" indent="-317500" algn="l" rtl="0">
-              <a:lnSpc>
-                <a:spcPct val="115000"/>
-              </a:lnSpc>
-              <a:spcBef>
-                <a:spcPts val="0"/>
-              </a:spcBef>
-              <a:spcAft>
-                <a:spcPts val="0"/>
-              </a:spcAft>
-              <a:buClr>
-                <a:schemeClr val="dk2"/>
-              </a:buClr>
-              <a:buSzPts val="1400"/>
-              <a:buFont typeface="Arial"/>
-              <a:buChar char="○"/>
-              <a:defRPr sz="1400" b="0" i="0" u="none" strike="noStrike" cap="none">
-                <a:solidFill>
-                  <a:schemeClr val="dk2"/>
-                </a:solidFill>
-                <a:latin typeface="Arial"/>
-                <a:ea typeface="Arial"/>
-                <a:cs typeface="Arial"/>
-                <a:sym typeface="Arial"/>
-              </a:defRPr>
-            </a:lvl8pPr>
-            <a:lvl9pPr marL="4114800" marR="0" lvl="8" indent="-317500" algn="l" rtl="0">
-              <a:lnSpc>
-                <a:spcPct val="115000"/>
-              </a:lnSpc>
-              <a:spcBef>
-                <a:spcPts val="0"/>
-              </a:spcBef>
-              <a:spcAft>
-                <a:spcPts val="0"/>
-              </a:spcAft>
-              <a:buClr>
-                <a:schemeClr val="dk2"/>
-              </a:buClr>
-              <a:buSzPts val="1400"/>
-              <a:buFont typeface="Arial"/>
-              <a:buChar char="■"/>
-              <a:defRPr sz="1400" b="0" i="0" u="none" strike="noStrike" cap="none">
-                <a:solidFill>
-                  <a:schemeClr val="dk2"/>
-                </a:solidFill>
-                <a:latin typeface="Arial"/>
-                <a:ea typeface="Arial"/>
-                <a:cs typeface="Arial"/>
-                <a:sym typeface="Arial"/>
-              </a:defRPr>
-            </a:lvl9pPr>
-          </a:lstStyle>
-          <a:p>
-            <a:pPr marL="0" indent="0">
-              <a:spcBef>
-                <a:spcPts val="1200"/>
-              </a:spcBef>
-              <a:buFont typeface="Arial"/>
-              <a:buNone/>
-            </a:pPr>
-            <a:r>
-              <a:rPr lang="ja" altLang="en-US"/>
-              <a:t>・</a:t>
-            </a:r>
-          </a:p>
-          <a:p>
-            <a:pPr marL="0" indent="0">
-              <a:spcBef>
-                <a:spcPts val="1200"/>
-              </a:spcBef>
-              <a:buFont typeface="Arial"/>
-              <a:buNone/>
-            </a:pPr>
-            <a:endParaRPr lang="ja" altLang="en-US"/>
-          </a:p>
-          <a:p>
-            <a:pPr marL="0" indent="0">
-              <a:spcBef>
-                <a:spcPts val="1200"/>
-              </a:spcBef>
-              <a:buFont typeface="Arial"/>
-              <a:buNone/>
-            </a:pPr>
-            <a:r>
-              <a:rPr lang="ja" altLang="en-US"/>
-              <a:t>・</a:t>
-            </a:r>
-          </a:p>
-          <a:p>
-            <a:pPr marL="0" indent="0">
-              <a:spcBef>
-                <a:spcPts val="1200"/>
-              </a:spcBef>
-              <a:spcAft>
-                <a:spcPts val="1200"/>
-              </a:spcAft>
-              <a:buFont typeface="Arial"/>
-              <a:buNone/>
-            </a:pPr>
-            <a:endParaRPr lang="ja" altLang="en-US"/>
-          </a:p>
-          <a:p>
-            <a:pPr marL="0" indent="0">
-              <a:spcBef>
-                <a:spcPts val="1200"/>
-              </a:spcBef>
-              <a:spcAft>
-                <a:spcPts val="1200"/>
-              </a:spcAft>
-              <a:buFont typeface="Arial"/>
-              <a:buNone/>
-            </a:pPr>
-            <a:r>
-              <a:rPr lang="ja" altLang="en-US"/>
-              <a:t>・</a:t>
-            </a:r>
-          </a:p>
-        </p:txBody>
-      </p:sp>
-    </p:spTree>
-  </p:cSld>
-  <p:clrMapOvr>
-    <a:masterClrMapping/>
-  </p:clrMapOvr>
-</p:sld>
-</file>
-
-<file path=ppt/slides/slide8.xml><?xml version="1.0" encoding="utf-8"?>
-<p:sld xmlns:a="http://schemas.openxmlformats.org/drawingml/2006/main" xmlns:r="http://schemas.openxmlformats.org/officeDocument/2006/relationships" xmlns:p="http://schemas.openxmlformats.org/presentationml/2006/main">
-  <p:cSld>
-    <p:spTree>
-      <p:nvGrpSpPr>
-        <p:cNvPr id="1" name="Shape 96"/>
-        <p:cNvGrpSpPr/>
-        <p:nvPr/>
-      </p:nvGrpSpPr>
-      <p:grpSpPr>
-        <a:xfrm>
-          <a:off x="0" y="0"/>
-          <a:ext cx="0" cy="0"/>
-          <a:chOff x="0" y="0"/>
-          <a:chExt cx="0" cy="0"/>
-        </a:xfrm>
-      </p:grpSpPr>
-      <p:sp>
-        <p:nvSpPr>
-          <p:cNvPr id="97" name="Google Shape;97;p8"/>
-          <p:cNvSpPr txBox="1">
-            <a:spLocks noGrp="1"/>
-          </p:cNvSpPr>
-          <p:nvPr>
-            <p:ph type="title"/>
-          </p:nvPr>
-        </p:nvSpPr>
-        <p:spPr>
-          <a:prstGeom prst="rect">
-            <a:avLst/>
-          </a:prstGeom>
-          <a:noFill/>
-          <a:ln>
-            <a:noFill/>
-          </a:ln>
-        </p:spPr>
-        <p:txBody>
-          <a:bodyPr spcFirstLastPara="1" wrap="square" lIns="91425" tIns="91425" rIns="91425" bIns="91425" anchor="t" anchorCtr="0">
-            <a:noAutofit/>
-          </a:bodyPr>
-          <a:lstStyle/>
-          <a:p>
-            <a:pPr marL="0" lvl="0" indent="0" algn="l" rtl="0">
-              <a:lnSpc>
-                <a:spcPct val="100000"/>
-              </a:lnSpc>
-              <a:spcBef>
-                <a:spcPts val="0"/>
-              </a:spcBef>
-              <a:spcAft>
-                <a:spcPts val="0"/>
-              </a:spcAft>
-              <a:buSzPts val="2800"/>
-              <a:buNone/>
-            </a:pPr>
-            <a:r>
-              <a:rPr lang="ja" sz="2200" dirty="0"/>
-              <a:t>Q</a:t>
-            </a:r>
-            <a:r>
-              <a:rPr lang="en-US" altLang="ja" sz="2200" dirty="0"/>
-              <a:t>6</a:t>
-            </a:r>
-            <a:r>
-              <a:rPr lang="ja" sz="2200" dirty="0"/>
-              <a:t>. 課題を解消するために取り組みたい事を教えてください。</a:t>
-            </a:r>
-            <a:endParaRPr sz="2200" dirty="0"/>
-          </a:p>
-        </p:txBody>
-      </p:sp>
-      <p:sp>
-        <p:nvSpPr>
-          <p:cNvPr id="6" name="Google Shape;67;p3">
-            <a:extLst>
-              <a:ext uri="{FF2B5EF4-FFF2-40B4-BE49-F238E27FC236}">
-                <a16:creationId xmlns:a16="http://schemas.microsoft.com/office/drawing/2014/main" id="{065DA9C2-D252-482A-9A1D-F2C1636DA1A8}"/>
-              </a:ext>
-            </a:extLst>
-          </p:cNvPr>
-          <p:cNvSpPr txBox="1">
-            <a:spLocks/>
-          </p:cNvSpPr>
-          <p:nvPr/>
-        </p:nvSpPr>
-        <p:spPr>
-          <a:xfrm>
-            <a:off x="464100" y="1304875"/>
-            <a:ext cx="8520600" cy="3416400"/>
-          </a:xfrm>
-          <a:prstGeom prst="rect">
-            <a:avLst/>
-          </a:prstGeom>
-          <a:noFill/>
-          <a:ln>
-            <a:noFill/>
-          </a:ln>
-        </p:spPr>
-        <p:txBody>
-          <a:bodyPr spcFirstLastPara="1" wrap="square" lIns="91425" tIns="91425" rIns="91425" bIns="91425" anchor="t" anchorCtr="0">
-            <a:normAutofit/>
-          </a:bodyPr>
-          <a:lstStyle>
-            <a:defPPr marR="0" lvl="0" algn="l" rtl="0">
-              <a:lnSpc>
-                <a:spcPct val="100000"/>
-              </a:lnSpc>
-              <a:spcBef>
-                <a:spcPts val="0"/>
-              </a:spcBef>
-              <a:spcAft>
-                <a:spcPts val="0"/>
-              </a:spcAft>
-            </a:defPPr>
-            <a:lvl1pPr marL="457200" marR="0" lvl="0" indent="-342900" algn="l" rtl="0">
-              <a:lnSpc>
-                <a:spcPct val="115000"/>
-              </a:lnSpc>
-              <a:spcBef>
-                <a:spcPts val="0"/>
-              </a:spcBef>
-              <a:spcAft>
-                <a:spcPts val="0"/>
-              </a:spcAft>
-              <a:buClr>
-                <a:schemeClr val="dk2"/>
-              </a:buClr>
-              <a:buSzPts val="1800"/>
-              <a:buFont typeface="Arial"/>
-              <a:buChar char="●"/>
-              <a:defRPr sz="1800" b="0" i="0" u="none" strike="noStrike" cap="none">
-                <a:solidFill>
-                  <a:schemeClr val="dk2"/>
-                </a:solidFill>
-                <a:latin typeface="Arial"/>
-                <a:ea typeface="Arial"/>
-                <a:cs typeface="Arial"/>
-                <a:sym typeface="Arial"/>
-              </a:defRPr>
-            </a:lvl1pPr>
-            <a:lvl2pPr marL="914400" marR="0" lvl="1" indent="-317500" algn="l" rtl="0">
-              <a:lnSpc>
-                <a:spcPct val="115000"/>
-              </a:lnSpc>
-              <a:spcBef>
-                <a:spcPts val="0"/>
-              </a:spcBef>
-              <a:spcAft>
-                <a:spcPts val="0"/>
-              </a:spcAft>
-              <a:buClr>
-                <a:schemeClr val="dk2"/>
-              </a:buClr>
-              <a:buSzPts val="1400"/>
-              <a:buFont typeface="Arial"/>
-              <a:buChar char="○"/>
-              <a:defRPr sz="1400" b="0" i="0" u="none" strike="noStrike" cap="none">
-                <a:solidFill>
-                  <a:schemeClr val="dk2"/>
-                </a:solidFill>
-                <a:latin typeface="Arial"/>
-                <a:ea typeface="Arial"/>
-                <a:cs typeface="Arial"/>
-                <a:sym typeface="Arial"/>
-              </a:defRPr>
-            </a:lvl2pPr>
-            <a:lvl3pPr marL="1371600" marR="0" lvl="2" indent="-317500" algn="l" rtl="0">
-              <a:lnSpc>
-                <a:spcPct val="115000"/>
-              </a:lnSpc>
-              <a:spcBef>
-                <a:spcPts val="0"/>
-              </a:spcBef>
-              <a:spcAft>
-                <a:spcPts val="0"/>
-              </a:spcAft>
-              <a:buClr>
-                <a:schemeClr val="dk2"/>
-              </a:buClr>
-              <a:buSzPts val="1400"/>
-              <a:buFont typeface="Arial"/>
-              <a:buChar char="■"/>
-              <a:defRPr sz="1400" b="0" i="0" u="none" strike="noStrike" cap="none">
-                <a:solidFill>
-                  <a:schemeClr val="dk2"/>
-                </a:solidFill>
-                <a:latin typeface="Arial"/>
-                <a:ea typeface="Arial"/>
-                <a:cs typeface="Arial"/>
-                <a:sym typeface="Arial"/>
-              </a:defRPr>
-            </a:lvl3pPr>
-            <a:lvl4pPr marL="1828800" marR="0" lvl="3" indent="-317500" algn="l" rtl="0">
-              <a:lnSpc>
-                <a:spcPct val="115000"/>
-              </a:lnSpc>
-              <a:spcBef>
-                <a:spcPts val="0"/>
-              </a:spcBef>
-              <a:spcAft>
-                <a:spcPts val="0"/>
-              </a:spcAft>
-              <a:buClr>
-                <a:schemeClr val="dk2"/>
-              </a:buClr>
-              <a:buSzPts val="1400"/>
-              <a:buFont typeface="Arial"/>
-              <a:buChar char="●"/>
-              <a:defRPr sz="1400" b="0" i="0" u="none" strike="noStrike" cap="none">
-                <a:solidFill>
-                  <a:schemeClr val="dk2"/>
-                </a:solidFill>
-                <a:latin typeface="Arial"/>
-                <a:ea typeface="Arial"/>
-                <a:cs typeface="Arial"/>
-                <a:sym typeface="Arial"/>
-              </a:defRPr>
-            </a:lvl4pPr>
-            <a:lvl5pPr marL="2286000" marR="0" lvl="4" indent="-317500" algn="l" rtl="0">
-              <a:lnSpc>
-                <a:spcPct val="115000"/>
-              </a:lnSpc>
-              <a:spcBef>
-                <a:spcPts val="0"/>
-              </a:spcBef>
-              <a:spcAft>
-                <a:spcPts val="0"/>
-              </a:spcAft>
-              <a:buClr>
-                <a:schemeClr val="dk2"/>
-              </a:buClr>
-              <a:buSzPts val="1400"/>
-              <a:buFont typeface="Arial"/>
-              <a:buChar char="○"/>
-              <a:defRPr sz="1400" b="0" i="0" u="none" strike="noStrike" cap="none">
-                <a:solidFill>
-                  <a:schemeClr val="dk2"/>
-                </a:solidFill>
-                <a:latin typeface="Arial"/>
-                <a:ea typeface="Arial"/>
-                <a:cs typeface="Arial"/>
-                <a:sym typeface="Arial"/>
-              </a:defRPr>
-            </a:lvl5pPr>
-            <a:lvl6pPr marL="2743200" marR="0" lvl="5" indent="-317500" algn="l" rtl="0">
-              <a:lnSpc>
-                <a:spcPct val="115000"/>
-              </a:lnSpc>
-              <a:spcBef>
-                <a:spcPts val="0"/>
-              </a:spcBef>
-              <a:spcAft>
-                <a:spcPts val="0"/>
-              </a:spcAft>
-              <a:buClr>
-                <a:schemeClr val="dk2"/>
-              </a:buClr>
-              <a:buSzPts val="1400"/>
-              <a:buFont typeface="Arial"/>
-              <a:buChar char="■"/>
-              <a:defRPr sz="1400" b="0" i="0" u="none" strike="noStrike" cap="none">
-                <a:solidFill>
-                  <a:schemeClr val="dk2"/>
-                </a:solidFill>
-                <a:latin typeface="Arial"/>
-                <a:ea typeface="Arial"/>
-                <a:cs typeface="Arial"/>
-                <a:sym typeface="Arial"/>
-              </a:defRPr>
-            </a:lvl6pPr>
-            <a:lvl7pPr marL="3200400" marR="0" lvl="6" indent="-317500" algn="l" rtl="0">
-              <a:lnSpc>
-                <a:spcPct val="115000"/>
-              </a:lnSpc>
-              <a:spcBef>
-                <a:spcPts val="0"/>
-              </a:spcBef>
-              <a:spcAft>
-                <a:spcPts val="0"/>
-              </a:spcAft>
-              <a:buClr>
-                <a:schemeClr val="dk2"/>
-              </a:buClr>
-              <a:buSzPts val="1400"/>
-              <a:buFont typeface="Arial"/>
-              <a:buChar char="●"/>
-              <a:defRPr sz="1400" b="0" i="0" u="none" strike="noStrike" cap="none">
-                <a:solidFill>
-                  <a:schemeClr val="dk2"/>
-                </a:solidFill>
-                <a:latin typeface="Arial"/>
-                <a:ea typeface="Arial"/>
-                <a:cs typeface="Arial"/>
-                <a:sym typeface="Arial"/>
-              </a:defRPr>
-            </a:lvl7pPr>
-            <a:lvl8pPr marL="3657600" marR="0" lvl="7" indent="-317500" algn="l" rtl="0">
-              <a:lnSpc>
-                <a:spcPct val="115000"/>
-              </a:lnSpc>
-              <a:spcBef>
-                <a:spcPts val="0"/>
-              </a:spcBef>
-              <a:spcAft>
-                <a:spcPts val="0"/>
-              </a:spcAft>
-              <a:buClr>
-                <a:schemeClr val="dk2"/>
-              </a:buClr>
-              <a:buSzPts val="1400"/>
-              <a:buFont typeface="Arial"/>
-              <a:buChar char="○"/>
-              <a:defRPr sz="1400" b="0" i="0" u="none" strike="noStrike" cap="none">
-                <a:solidFill>
-                  <a:schemeClr val="dk2"/>
-                </a:solidFill>
-                <a:latin typeface="Arial"/>
-                <a:ea typeface="Arial"/>
-                <a:cs typeface="Arial"/>
-                <a:sym typeface="Arial"/>
-              </a:defRPr>
-            </a:lvl8pPr>
-            <a:lvl9pPr marL="4114800" marR="0" lvl="8" indent="-317500" algn="l" rtl="0">
-              <a:lnSpc>
-                <a:spcPct val="115000"/>
-              </a:lnSpc>
-              <a:spcBef>
-                <a:spcPts val="0"/>
-              </a:spcBef>
-              <a:spcAft>
-                <a:spcPts val="0"/>
-              </a:spcAft>
-              <a:buClr>
-                <a:schemeClr val="dk2"/>
-              </a:buClr>
-              <a:buSzPts val="1400"/>
-              <a:buFont typeface="Arial"/>
-              <a:buChar char="■"/>
-              <a:defRPr sz="1400" b="0" i="0" u="none" strike="noStrike" cap="none">
-                <a:solidFill>
-                  <a:schemeClr val="dk2"/>
-                </a:solidFill>
-                <a:latin typeface="Arial"/>
-                <a:ea typeface="Arial"/>
-                <a:cs typeface="Arial"/>
-                <a:sym typeface="Arial"/>
-              </a:defRPr>
-            </a:lvl9pPr>
-          </a:lstStyle>
-          <a:p>
-            <a:pPr marL="0" indent="0">
-              <a:spcBef>
-                <a:spcPts val="1200"/>
-              </a:spcBef>
-              <a:buFont typeface="Arial"/>
-              <a:buNone/>
-            </a:pPr>
-            <a:r>
-              <a:rPr lang="ja" altLang="en-US"/>
-              <a:t>・</a:t>
-            </a:r>
-          </a:p>
-          <a:p>
-            <a:pPr marL="0" indent="0">
-              <a:spcBef>
-                <a:spcPts val="1200"/>
-              </a:spcBef>
-              <a:buFont typeface="Arial"/>
-              <a:buNone/>
-            </a:pPr>
-            <a:endParaRPr lang="ja" altLang="en-US"/>
-          </a:p>
-          <a:p>
-            <a:pPr marL="0" indent="0">
-              <a:spcBef>
-                <a:spcPts val="1200"/>
-              </a:spcBef>
-              <a:buFont typeface="Arial"/>
-              <a:buNone/>
-            </a:pPr>
-            <a:r>
-              <a:rPr lang="ja" altLang="en-US"/>
-              <a:t>・</a:t>
-            </a:r>
-          </a:p>
-          <a:p>
-            <a:pPr marL="0" indent="0">
-              <a:spcBef>
-                <a:spcPts val="1200"/>
-              </a:spcBef>
-              <a:spcAft>
-                <a:spcPts val="1200"/>
-              </a:spcAft>
-              <a:buFont typeface="Arial"/>
-              <a:buNone/>
-            </a:pPr>
-            <a:endParaRPr lang="ja" altLang="en-US"/>
-          </a:p>
-          <a:p>
-            <a:pPr marL="0" indent="0">
-              <a:spcBef>
-                <a:spcPts val="1200"/>
-              </a:spcBef>
-              <a:spcAft>
-                <a:spcPts val="1200"/>
-              </a:spcAft>
-              <a:buFont typeface="Arial"/>
-              <a:buNone/>
-            </a:pPr>
-            <a:r>
-              <a:rPr lang="ja" altLang="en-US"/>
-              <a:t>・</a:t>
-            </a:r>
-          </a:p>
-        </p:txBody>
-      </p:sp>
-    </p:spTree>
-  </p:cSld>
-  <p:clrMapOvr>
-    <a:masterClrMapping/>
-  </p:clrMapOvr>
-</p:sld>
-</file>
-
-<file path=ppt/slides/slide9.xml><?xml version="1.0" encoding="utf-8"?>
-<p:sld xmlns:a="http://schemas.openxmlformats.org/drawingml/2006/main" xmlns:r="http://schemas.openxmlformats.org/officeDocument/2006/relationships" xmlns:p="http://schemas.openxmlformats.org/presentationml/2006/main">
-  <p:cSld>
-    <p:spTree>
-      <p:nvGrpSpPr>
-        <p:cNvPr id="1" name="Shape 71"/>
-        <p:cNvGrpSpPr/>
-        <p:nvPr/>
-      </p:nvGrpSpPr>
-      <p:grpSpPr>
-        <a:xfrm>
-          <a:off x="0" y="0"/>
-          <a:ext cx="0" cy="0"/>
-          <a:chOff x="0" y="0"/>
-          <a:chExt cx="0" cy="0"/>
-        </a:xfrm>
-      </p:grpSpPr>
-      <p:sp>
-        <p:nvSpPr>
-          <p:cNvPr id="72" name="Google Shape;72;p4"/>
-          <p:cNvSpPr txBox="1">
-            <a:spLocks noGrp="1"/>
-          </p:cNvSpPr>
-          <p:nvPr>
-            <p:ph type="title"/>
-          </p:nvPr>
-        </p:nvSpPr>
-        <p:spPr>
-          <a:prstGeom prst="rect">
-            <a:avLst/>
-          </a:prstGeom>
-          <a:noFill/>
-          <a:ln>
-            <a:noFill/>
-          </a:ln>
-        </p:spPr>
-        <p:txBody>
-          <a:bodyPr spcFirstLastPara="1" wrap="square" lIns="91425" tIns="91425" rIns="91425" bIns="91425" anchor="t" anchorCtr="0">
-            <a:noAutofit/>
-          </a:bodyPr>
-          <a:lstStyle/>
-          <a:p>
-            <a:pPr marL="0" lvl="0" indent="0" algn="l" rtl="0">
-              <a:lnSpc>
-                <a:spcPct val="100000"/>
-              </a:lnSpc>
-              <a:spcBef>
-                <a:spcPts val="0"/>
-              </a:spcBef>
-              <a:spcAft>
-                <a:spcPts val="0"/>
-              </a:spcAft>
-              <a:buSzPct val="111111"/>
-              <a:buNone/>
-            </a:pPr>
-            <a:r>
-              <a:rPr lang="ja" sz="2200" dirty="0"/>
-              <a:t>Q</a:t>
-            </a:r>
-            <a:r>
-              <a:rPr lang="en-US" altLang="ja" sz="2200" dirty="0"/>
-              <a:t>7</a:t>
-            </a:r>
-            <a:r>
-              <a:rPr lang="ja" sz="2200" dirty="0"/>
-              <a:t>.</a:t>
-            </a:r>
-            <a:r>
-              <a:rPr lang="ja-JP" altLang="en-US" sz="2200" dirty="0"/>
-              <a:t>次年度に向けて、チャレンジしたい事は何ですか</a:t>
-            </a:r>
-            <a:r>
-              <a:rPr lang="ja" sz="2200" dirty="0"/>
-              <a:t>？</a:t>
-            </a:r>
-            <a:r>
-              <a:rPr lang="en-US" altLang="ja" sz="2200" dirty="0"/>
-              <a:t/>
-            </a:r>
-            <a:br>
-              <a:rPr lang="en-US" altLang="ja" sz="2200" dirty="0"/>
-            </a:br>
-            <a:r>
-              <a:rPr lang="ja-JP" altLang="en-US" sz="2200" dirty="0"/>
-              <a:t>　</a:t>
-            </a:r>
-            <a:r>
-              <a:rPr lang="en-US" altLang="ja" sz="2200" dirty="0"/>
-              <a:t>(</a:t>
-            </a:r>
-            <a:r>
-              <a:rPr lang="ja-JP" altLang="en-US" sz="2200" dirty="0"/>
-              <a:t>就活、制作、学習面</a:t>
-            </a:r>
-            <a:r>
-              <a:rPr lang="en-US" altLang="ja" sz="2200" dirty="0"/>
-              <a:t>)</a:t>
-            </a:r>
-            <a:endParaRPr sz="2200" dirty="0"/>
-          </a:p>
-        </p:txBody>
-      </p:sp>
-      <p:sp>
-        <p:nvSpPr>
-          <p:cNvPr id="6" name="Google Shape;67;p3">
-            <a:extLst>
-              <a:ext uri="{FF2B5EF4-FFF2-40B4-BE49-F238E27FC236}">
-                <a16:creationId xmlns:a16="http://schemas.microsoft.com/office/drawing/2014/main" id="{15500E5E-7D76-404A-8E0C-851372F1E912}"/>
-              </a:ext>
-            </a:extLst>
-          </p:cNvPr>
-          <p:cNvSpPr txBox="1">
-            <a:spLocks/>
-          </p:cNvSpPr>
-          <p:nvPr/>
-        </p:nvSpPr>
-        <p:spPr>
-          <a:xfrm>
-            <a:off x="464100" y="1304875"/>
-            <a:ext cx="8520600" cy="3416400"/>
-          </a:xfrm>
-          <a:prstGeom prst="rect">
-            <a:avLst/>
-          </a:prstGeom>
-          <a:noFill/>
-          <a:ln>
-            <a:noFill/>
-          </a:ln>
-        </p:spPr>
-        <p:txBody>
-          <a:bodyPr spcFirstLastPara="1" wrap="square" lIns="91425" tIns="91425" rIns="91425" bIns="91425" anchor="t" anchorCtr="0">
-            <a:normAutofit/>
-          </a:bodyPr>
-          <a:lstStyle>
-            <a:defPPr marR="0" lvl="0" algn="l" rtl="0">
-              <a:lnSpc>
-                <a:spcPct val="100000"/>
-              </a:lnSpc>
-              <a:spcBef>
-                <a:spcPts val="0"/>
-              </a:spcBef>
-              <a:spcAft>
-                <a:spcPts val="0"/>
-              </a:spcAft>
-            </a:defPPr>
-            <a:lvl1pPr marL="457200" marR="0" lvl="0" indent="-342900" algn="l" rtl="0">
-              <a:lnSpc>
-                <a:spcPct val="115000"/>
-              </a:lnSpc>
-              <a:spcBef>
-                <a:spcPts val="0"/>
-              </a:spcBef>
-              <a:spcAft>
-                <a:spcPts val="0"/>
-              </a:spcAft>
-              <a:buClr>
-                <a:schemeClr val="dk2"/>
-              </a:buClr>
-              <a:buSzPts val="1800"/>
-              <a:buFont typeface="Arial"/>
-              <a:buChar char="●"/>
-              <a:defRPr sz="1800" b="0" i="0" u="none" strike="noStrike" cap="none">
-                <a:solidFill>
-                  <a:schemeClr val="dk2"/>
-                </a:solidFill>
-                <a:latin typeface="Arial"/>
-                <a:ea typeface="Arial"/>
-                <a:cs typeface="Arial"/>
-                <a:sym typeface="Arial"/>
-              </a:defRPr>
-            </a:lvl1pPr>
-            <a:lvl2pPr marL="914400" marR="0" lvl="1" indent="-317500" algn="l" rtl="0">
-              <a:lnSpc>
-                <a:spcPct val="115000"/>
-              </a:lnSpc>
-              <a:spcBef>
-                <a:spcPts val="0"/>
-              </a:spcBef>
-              <a:spcAft>
-                <a:spcPts val="0"/>
-              </a:spcAft>
-              <a:buClr>
-                <a:schemeClr val="dk2"/>
-              </a:buClr>
-              <a:buSzPts val="1400"/>
-              <a:buFont typeface="Arial"/>
-              <a:buChar char="○"/>
-              <a:defRPr sz="1400" b="0" i="0" u="none" strike="noStrike" cap="none">
-                <a:solidFill>
-                  <a:schemeClr val="dk2"/>
-                </a:solidFill>
-                <a:latin typeface="Arial"/>
-                <a:ea typeface="Arial"/>
-                <a:cs typeface="Arial"/>
-                <a:sym typeface="Arial"/>
-              </a:defRPr>
-            </a:lvl2pPr>
-            <a:lvl3pPr marL="1371600" marR="0" lvl="2" indent="-317500" algn="l" rtl="0">
-              <a:lnSpc>
-                <a:spcPct val="115000"/>
-              </a:lnSpc>
-              <a:spcBef>
-                <a:spcPts val="0"/>
-              </a:spcBef>
-              <a:spcAft>
-                <a:spcPts val="0"/>
-              </a:spcAft>
-              <a:buClr>
-                <a:schemeClr val="dk2"/>
-              </a:buClr>
-              <a:buSzPts val="1400"/>
-              <a:buFont typeface="Arial"/>
-              <a:buChar char="■"/>
-              <a:defRPr sz="1400" b="0" i="0" u="none" strike="noStrike" cap="none">
-                <a:solidFill>
-                  <a:schemeClr val="dk2"/>
-                </a:solidFill>
-                <a:latin typeface="Arial"/>
-                <a:ea typeface="Arial"/>
-                <a:cs typeface="Arial"/>
-                <a:sym typeface="Arial"/>
-              </a:defRPr>
-            </a:lvl3pPr>
-            <a:lvl4pPr marL="1828800" marR="0" lvl="3" indent="-317500" algn="l" rtl="0">
-              <a:lnSpc>
-                <a:spcPct val="115000"/>
-              </a:lnSpc>
-              <a:spcBef>
-                <a:spcPts val="0"/>
-              </a:spcBef>
-              <a:spcAft>
-                <a:spcPts val="0"/>
-              </a:spcAft>
-              <a:buClr>
-                <a:schemeClr val="dk2"/>
-              </a:buClr>
-              <a:buSzPts val="1400"/>
-              <a:buFont typeface="Arial"/>
-              <a:buChar char="●"/>
-              <a:defRPr sz="1400" b="0" i="0" u="none" strike="noStrike" cap="none">
-                <a:solidFill>
-                  <a:schemeClr val="dk2"/>
-                </a:solidFill>
-                <a:latin typeface="Arial"/>
-                <a:ea typeface="Arial"/>
-                <a:cs typeface="Arial"/>
-                <a:sym typeface="Arial"/>
-              </a:defRPr>
-            </a:lvl4pPr>
-            <a:lvl5pPr marL="2286000" marR="0" lvl="4" indent="-317500" algn="l" rtl="0">
-              <a:lnSpc>
-                <a:spcPct val="115000"/>
-              </a:lnSpc>
-              <a:spcBef>
-                <a:spcPts val="0"/>
-              </a:spcBef>
-              <a:spcAft>
-                <a:spcPts val="0"/>
-              </a:spcAft>
-              <a:buClr>
-                <a:schemeClr val="dk2"/>
-              </a:buClr>
-              <a:buSzPts val="1400"/>
-              <a:buFont typeface="Arial"/>
-              <a:buChar char="○"/>
-              <a:defRPr sz="1400" b="0" i="0" u="none" strike="noStrike" cap="none">
-                <a:solidFill>
-                  <a:schemeClr val="dk2"/>
-                </a:solidFill>
-                <a:latin typeface="Arial"/>
-                <a:ea typeface="Arial"/>
-                <a:cs typeface="Arial"/>
-                <a:sym typeface="Arial"/>
-              </a:defRPr>
-            </a:lvl5pPr>
-            <a:lvl6pPr marL="2743200" marR="0" lvl="5" indent="-317500" algn="l" rtl="0">
-              <a:lnSpc>
-                <a:spcPct val="115000"/>
-              </a:lnSpc>
-              <a:spcBef>
-                <a:spcPts val="0"/>
-              </a:spcBef>
-              <a:spcAft>
-                <a:spcPts val="0"/>
-              </a:spcAft>
-              <a:buClr>
-                <a:schemeClr val="dk2"/>
-              </a:buClr>
-              <a:buSzPts val="1400"/>
-              <a:buFont typeface="Arial"/>
-              <a:buChar char="■"/>
-              <a:defRPr sz="1400" b="0" i="0" u="none" strike="noStrike" cap="none">
-                <a:solidFill>
-                  <a:schemeClr val="dk2"/>
-                </a:solidFill>
-                <a:latin typeface="Arial"/>
-                <a:ea typeface="Arial"/>
-                <a:cs typeface="Arial"/>
-                <a:sym typeface="Arial"/>
-              </a:defRPr>
-            </a:lvl6pPr>
-            <a:lvl7pPr marL="3200400" marR="0" lvl="6" indent="-317500" algn="l" rtl="0">
-              <a:lnSpc>
-                <a:spcPct val="115000"/>
-              </a:lnSpc>
-              <a:spcBef>
-                <a:spcPts val="0"/>
-              </a:spcBef>
-              <a:spcAft>
-                <a:spcPts val="0"/>
-              </a:spcAft>
-              <a:buClr>
-                <a:schemeClr val="dk2"/>
-              </a:buClr>
-              <a:buSzPts val="1400"/>
-              <a:buFont typeface="Arial"/>
-              <a:buChar char="●"/>
-              <a:defRPr sz="1400" b="0" i="0" u="none" strike="noStrike" cap="none">
-                <a:solidFill>
-                  <a:schemeClr val="dk2"/>
-                </a:solidFill>
-                <a:latin typeface="Arial"/>
-                <a:ea typeface="Arial"/>
-                <a:cs typeface="Arial"/>
-                <a:sym typeface="Arial"/>
-              </a:defRPr>
-            </a:lvl7pPr>
-            <a:lvl8pPr marL="3657600" marR="0" lvl="7" indent="-317500" algn="l" rtl="0">
-              <a:lnSpc>
-                <a:spcPct val="115000"/>
-              </a:lnSpc>
-              <a:spcBef>
-                <a:spcPts val="0"/>
-              </a:spcBef>
-              <a:spcAft>
-                <a:spcPts val="0"/>
-              </a:spcAft>
-              <a:buClr>
-                <a:schemeClr val="dk2"/>
-              </a:buClr>
-              <a:buSzPts val="1400"/>
-              <a:buFont typeface="Arial"/>
-              <a:buChar char="○"/>
-              <a:defRPr sz="1400" b="0" i="0" u="none" strike="noStrike" cap="none">
-                <a:solidFill>
-                  <a:schemeClr val="dk2"/>
-                </a:solidFill>
-                <a:latin typeface="Arial"/>
-                <a:ea typeface="Arial"/>
-                <a:cs typeface="Arial"/>
-                <a:sym typeface="Arial"/>
-              </a:defRPr>
-            </a:lvl8pPr>
-            <a:lvl9pPr marL="4114800" marR="0" lvl="8" indent="-317500" algn="l" rtl="0">
-              <a:lnSpc>
-                <a:spcPct val="115000"/>
-              </a:lnSpc>
-              <a:spcBef>
-                <a:spcPts val="0"/>
-              </a:spcBef>
-              <a:spcAft>
-                <a:spcPts val="0"/>
-              </a:spcAft>
-              <a:buClr>
-                <a:schemeClr val="dk2"/>
-              </a:buClr>
-              <a:buSzPts val="1400"/>
-              <a:buFont typeface="Arial"/>
-              <a:buChar char="■"/>
-              <a:defRPr sz="1400" b="0" i="0" u="none" strike="noStrike" cap="none">
-                <a:solidFill>
-                  <a:schemeClr val="dk2"/>
-                </a:solidFill>
-                <a:latin typeface="Arial"/>
-                <a:ea typeface="Arial"/>
-                <a:cs typeface="Arial"/>
-                <a:sym typeface="Arial"/>
-              </a:defRPr>
-            </a:lvl9pPr>
-          </a:lstStyle>
-          <a:p>
-            <a:pPr marL="0" indent="0">
-              <a:spcBef>
-                <a:spcPts val="1200"/>
-              </a:spcBef>
-              <a:buFont typeface="Arial"/>
-              <a:buNone/>
-            </a:pPr>
-            <a:r>
-              <a:rPr lang="ja" altLang="en-US"/>
-              <a:t>・</a:t>
-            </a:r>
-          </a:p>
-          <a:p>
-            <a:pPr marL="0" indent="0">
-              <a:spcBef>
-                <a:spcPts val="1200"/>
-              </a:spcBef>
-              <a:buFont typeface="Arial"/>
-              <a:buNone/>
-            </a:pPr>
-            <a:endParaRPr lang="ja" altLang="en-US"/>
-          </a:p>
-          <a:p>
-            <a:pPr marL="0" indent="0">
-              <a:spcBef>
-                <a:spcPts val="1200"/>
-              </a:spcBef>
-              <a:buFont typeface="Arial"/>
-              <a:buNone/>
-            </a:pPr>
-            <a:r>
-              <a:rPr lang="ja" altLang="en-US"/>
-              <a:t>・</a:t>
-            </a:r>
-          </a:p>
-          <a:p>
-            <a:pPr marL="0" indent="0">
-              <a:spcBef>
-                <a:spcPts val="1200"/>
-              </a:spcBef>
-              <a:spcAft>
-                <a:spcPts val="1200"/>
-              </a:spcAft>
-              <a:buFont typeface="Arial"/>
-              <a:buNone/>
-            </a:pPr>
-            <a:endParaRPr lang="ja" altLang="en-US"/>
-          </a:p>
-          <a:p>
-            <a:pPr marL="0" indent="0">
-              <a:spcBef>
-                <a:spcPts val="1200"/>
-              </a:spcBef>
-              <a:spcAft>
-                <a:spcPts val="1200"/>
-              </a:spcAft>
-              <a:buFont typeface="Arial"/>
-              <a:buNone/>
-            </a:pPr>
-            <a:r>
-              <a:rPr lang="ja" altLang="en-US"/>
-              <a:t>・</a:t>
-            </a:r>
-          </a:p>
-        </p:txBody>
-      </p:sp>
-    </p:spTree>
   </p:cSld>
   <p:clrMapOvr>
     <a:masterClrMapping/>
@@ -12419,27 +8936,6 @@
 </file>
 
 <file path=customXml/item1.xml><?xml version="1.0" encoding="utf-8"?>
-<p:properties xmlns:p="http://schemas.microsoft.com/office/2006/metadata/properties" xmlns:xsi="http://www.w3.org/2001/XMLSchema-instance" xmlns:pc="http://schemas.microsoft.com/office/infopath/2007/PartnerControls">
-  <documentManagement>
-    <lcf76f155ced4ddcb4097134ff3c332f xmlns="aaa52e1c-8772-4366-aa63-bf636c80ebd4">
-      <Terms xmlns="http://schemas.microsoft.com/office/infopath/2007/PartnerControls"/>
-    </lcf76f155ced4ddcb4097134ff3c332f>
-    <TaxCatchAll xmlns="0c73c1f5-50cd-4477-a315-44bef7b8a847" xsi:nil="true"/>
-    <_x5b9f__x88c5_ xmlns="aaa52e1c-8772-4366-aa63-bf636c80ebd4">false</_x5b9f__x88c5_>
-  </documentManagement>
-</p:properties>
-</file>
-
-<file path=customXml/item2.xml><?xml version="1.0" encoding="utf-8"?>
-<?mso-contentType ?>
-<FormTemplates xmlns="http://schemas.microsoft.com/sharepoint/v3/contenttype/forms">
-  <Display>DocumentLibraryForm</Display>
-  <Edit>DocumentLibraryForm</Edit>
-  <New>DocumentLibraryForm</New>
-</FormTemplates>
-</file>
-
-<file path=customXml/item3.xml><?xml version="1.0" encoding="utf-8"?>
 <ct:contentTypeSchema xmlns:ct="http://schemas.microsoft.com/office/2006/metadata/contentType" xmlns:ma="http://schemas.microsoft.com/office/2006/metadata/properties/metaAttributes" ct:_="" ma:_="" ma:contentTypeName="ドキュメント" ma:contentTypeID="0x010100A6A6C361903FA540AF4D79E6EA2B777C" ma:contentTypeVersion="20" ma:contentTypeDescription="新しいドキュメントを作成します。" ma:contentTypeScope="" ma:versionID="5005c25ccbe36e1bd78f43fa4ec37af7">
   <xsd:schema xmlns:xsd="http://www.w3.org/2001/XMLSchema" xmlns:xs="http://www.w3.org/2001/XMLSchema" xmlns:p="http://schemas.microsoft.com/office/2006/metadata/properties" xmlns:ns2="aaa52e1c-8772-4366-aa63-bf636c80ebd4" xmlns:ns3="0c73c1f5-50cd-4477-a315-44bef7b8a847" targetNamespace="http://schemas.microsoft.com/office/2006/metadata/properties" ma:root="true" ma:fieldsID="dd4c8e6428aa52bef8f487bbf01a7de2" ns2:_="" ns3:_="">
     <xsd:import namespace="aaa52e1c-8772-4366-aa63-bf636c80ebd4"/>
@@ -12706,7 +9202,55 @@
 </ct:contentTypeSchema>
 </file>
 
+<file path=customXml/item2.xml><?xml version="1.0" encoding="utf-8"?>
+<?mso-contentType ?>
+<FormTemplates xmlns="http://schemas.microsoft.com/sharepoint/v3/contenttype/forms">
+  <Display>DocumentLibraryForm</Display>
+  <Edit>DocumentLibraryForm</Edit>
+  <New>DocumentLibraryForm</New>
+</FormTemplates>
+</file>
+
+<file path=customXml/item3.xml><?xml version="1.0" encoding="utf-8"?>
+<p:properties xmlns:p="http://schemas.microsoft.com/office/2006/metadata/properties" xmlns:xsi="http://www.w3.org/2001/XMLSchema-instance" xmlns:pc="http://schemas.microsoft.com/office/infopath/2007/PartnerControls">
+  <documentManagement>
+    <lcf76f155ced4ddcb4097134ff3c332f xmlns="aaa52e1c-8772-4366-aa63-bf636c80ebd4">
+      <Terms xmlns="http://schemas.microsoft.com/office/infopath/2007/PartnerControls"/>
+    </lcf76f155ced4ddcb4097134ff3c332f>
+    <TaxCatchAll xmlns="0c73c1f5-50cd-4477-a315-44bef7b8a847" xsi:nil="true"/>
+    <_x5b9f__x88c5_ xmlns="aaa52e1c-8772-4366-aa63-bf636c80ebd4">false</_x5b9f__x88c5_>
+  </documentManagement>
+</p:properties>
+</file>
+
 <file path=customXml/itemProps1.xml><?xml version="1.0" encoding="utf-8"?>
+<ds:datastoreItem xmlns:ds="http://schemas.openxmlformats.org/officeDocument/2006/customXml" ds:itemID="{02827527-1695-4099-A2F8-4DABE93CEEE2}">
+  <ds:schemaRefs>
+    <ds:schemaRef ds:uri="http://schemas.microsoft.com/office/2006/metadata/contentType"/>
+    <ds:schemaRef ds:uri="http://schemas.microsoft.com/office/2006/metadata/properties/metaAttributes"/>
+    <ds:schemaRef ds:uri="http://www.w3.org/2001/XMLSchema"/>
+    <ds:schemaRef ds:uri="http://schemas.microsoft.com/office/2006/metadata/properties"/>
+    <ds:schemaRef ds:uri="aaa52e1c-8772-4366-aa63-bf636c80ebd4"/>
+    <ds:schemaRef ds:uri="0c73c1f5-50cd-4477-a315-44bef7b8a847"/>
+    <ds:schemaRef ds:uri="http://schemas.microsoft.com/office/2006/documentManagement/types"/>
+    <ds:schemaRef ds:uri="http://schemas.microsoft.com/office/infopath/2007/PartnerControls"/>
+    <ds:schemaRef ds:uri="http://schemas.openxmlformats.org/package/2006/metadata/core-properties"/>
+    <ds:schemaRef ds:uri="http://purl.org/dc/elements/1.1/"/>
+    <ds:schemaRef ds:uri="http://purl.org/dc/terms/"/>
+    <ds:schemaRef ds:uri="http://schemas.microsoft.com/internal/obd"/>
+  </ds:schemaRefs>
+</ds:datastoreItem>
+</file>
+
+<file path=customXml/itemProps2.xml><?xml version="1.0" encoding="utf-8"?>
+<ds:datastoreItem xmlns:ds="http://schemas.openxmlformats.org/officeDocument/2006/customXml" ds:itemID="{3F7FB1F1-B1EF-4BB2-A7FD-20FB8CD3FBDA}">
+  <ds:schemaRefs>
+    <ds:schemaRef ds:uri="http://schemas.microsoft.com/sharepoint/v3/contenttype/forms"/>
+  </ds:schemaRefs>
+</ds:datastoreItem>
+</file>
+
+<file path=customXml/itemProps3.xml><?xml version="1.0" encoding="utf-8"?>
 <ds:datastoreItem xmlns:ds="http://schemas.openxmlformats.org/officeDocument/2006/customXml" ds:itemID="{D659C01C-C34E-4558-B7B4-930606FA44DD}">
   <ds:schemaRefs>
     <ds:schemaRef ds:uri="0c73c1f5-50cd-4477-a315-44bef7b8a847"/>
@@ -12723,31 +9267,4 @@
     <ds:schemaRef ds:uri="http://www.w3.org/XML/1998/namespace"/>
   </ds:schemaRefs>
 </ds:datastoreItem>
-</file>
-
-<file path=customXml/itemProps2.xml><?xml version="1.0" encoding="utf-8"?>
-<ds:datastoreItem xmlns:ds="http://schemas.openxmlformats.org/officeDocument/2006/customXml" ds:itemID="{3F7FB1F1-B1EF-4BB2-A7FD-20FB8CD3FBDA}">
-  <ds:schemaRefs>
-    <ds:schemaRef ds:uri="http://schemas.microsoft.com/sharepoint/v3/contenttype/forms"/>
-  </ds:schemaRefs>
-</ds:datastoreItem>
-</file>
-
-<file path=customXml/itemProps3.xml><?xml version="1.0" encoding="utf-8"?>
-<ds:datastoreItem xmlns:ds="http://schemas.openxmlformats.org/officeDocument/2006/customXml" ds:itemID="{02827527-1695-4099-A2F8-4DABE93CEEE2}">
-  <ds:schemaRefs>
-    <ds:schemaRef ds:uri="http://schemas.microsoft.com/office/2006/metadata/contentType"/>
-    <ds:schemaRef ds:uri="http://schemas.microsoft.com/office/2006/metadata/properties/metaAttributes"/>
-    <ds:schemaRef ds:uri="http://www.w3.org/2001/XMLSchema"/>
-    <ds:schemaRef ds:uri="http://schemas.microsoft.com/office/2006/metadata/properties"/>
-    <ds:schemaRef ds:uri="aaa52e1c-8772-4366-aa63-bf636c80ebd4"/>
-    <ds:schemaRef ds:uri="0c73c1f5-50cd-4477-a315-44bef7b8a847"/>
-    <ds:schemaRef ds:uri="http://schemas.microsoft.com/office/2006/documentManagement/types"/>
-    <ds:schemaRef ds:uri="http://schemas.microsoft.com/office/infopath/2007/PartnerControls"/>
-    <ds:schemaRef ds:uri="http://schemas.openxmlformats.org/package/2006/metadata/core-properties"/>
-    <ds:schemaRef ds:uri="http://purl.org/dc/elements/1.1/"/>
-    <ds:schemaRef ds:uri="http://purl.org/dc/terms/"/>
-    <ds:schemaRef ds:uri="http://schemas.microsoft.com/internal/obd"/>
-  </ds:schemaRefs>
-</ds:datastoreItem>
 </file>